--- a/docs/presentations/metodika-vnedreniya-promezhutochnyi-srez.pptx
+++ b/docs/presentations/metodika-vnedreniya-promezhutochnyi-srez.pptx
@@ -11,9 +11,11 @@
     <p:sldId id="259" r:id="rId5"/>
     <p:sldId id="260" r:id="rId6"/>
     <p:sldId id="261" r:id="rId7"/>
+    <p:sldId id="262" r:id="rId8"/>
+    <p:sldId id="263" r:id="rId9"/>
   </p:sldIdLst>
   <p:notesMasterIdLst>
-    <p:notesMasterId r:id="rId8"/>
+    <p:notesMasterId r:id="rId10"/>
   </p:notesMasterIdLst>
   <p:sldSz cx="12192000" cy="6858000"/>
   <p:notesSz cx="6858000" cy="12192000"/>
@@ -1965,6 +1967,182 @@
 </p:notes>
 </file>
 
+<file path=ppt/notesSlides/notesSlide7.xml><?xml version="1.0" encoding="utf-8"?>
+<p:notes xmlns:a="http://schemas.openxmlformats.org/drawingml/2006/main" xmlns:r="http://schemas.openxmlformats.org/officeDocument/2006/relationships" xmlns:p="http://schemas.openxmlformats.org/presentationml/2006/main">
+  <p:cSld>
+    <p:spTree>
+      <p:nvGrpSpPr>
+        <p:cNvPr id="1" name=""/>
+        <p:cNvGrpSpPr/>
+        <p:nvPr/>
+      </p:nvGrpSpPr>
+      <p:grpSpPr>
+        <a:xfrm>
+          <a:off x="0" y="0"/>
+          <a:ext cx="0" cy="0"/>
+          <a:chOff x="0" y="0"/>
+          <a:chExt cx="0" cy="0"/>
+        </a:xfrm>
+      </p:grpSpPr>
+      <p:sp>
+        <p:nvSpPr>
+          <p:cNvPr id="2" name="Slide Image Placeholder 1"/>
+          <p:cNvSpPr>
+            <a:spLocks noGrp="1" noRot="1" noChangeAspect="1"/>
+          </p:cNvSpPr>
+          <p:nvPr>
+            <p:ph type="sldImg"/>
+          </p:nvPr>
+        </p:nvSpPr>
+        <p:spPr/>
+      </p:sp>
+      <p:sp>
+        <p:nvSpPr>
+          <p:cNvPr id="3" name="Notes Placeholder 2"/>
+          <p:cNvSpPr>
+            <a:spLocks noGrp="1"/>
+          </p:cNvSpPr>
+          <p:nvPr>
+            <p:ph type="body" idx="1"/>
+          </p:nvPr>
+        </p:nvSpPr>
+        <p:spPr/>
+        <p:txBody>
+          <a:bodyPr/>
+          <a:lstStyle/>
+          <a:p>
+            <a:r>
+              <a:rPr lang="en-US" dirty="0"/>
+              <a:t/>
+            </a:r>
+            <a:endParaRPr lang="en-US" dirty="0"/>
+          </a:p>
+        </p:txBody>
+      </p:sp>
+      <p:sp>
+        <p:nvSpPr>
+          <p:cNvPr id="4" name="Slide Number Placeholder 3"/>
+          <p:cNvSpPr>
+            <a:spLocks noGrp="1"/>
+          </p:cNvSpPr>
+          <p:nvPr>
+            <p:ph type="sldNum" sz="quarter" idx="10"/>
+          </p:nvPr>
+        </p:nvSpPr>
+        <p:spPr/>
+        <p:txBody>
+          <a:bodyPr/>
+          <a:lstStyle/>
+          <a:p>
+            <a:fld id="{F7021451-1387-4CA6-816F-3879F97B5CBC}" type="slidenum">
+              <a:rPr lang="en-US"/>
+              <a:t>7</a:t>
+            </a:fld>
+            <a:endParaRPr lang="en-US"/>
+          </a:p>
+        </p:txBody>
+      </p:sp>
+    </p:spTree>
+    <p:extLst>
+      <p:ext uri="{BB962C8B-B14F-4D97-AF65-F5344CB8AC3E}">
+        <p14:creationId xmlns:p14="http://schemas.microsoft.com/office/powerpoint/2010/main" val="1024086991"/>
+      </p:ext>
+    </p:extLst>
+  </p:cSld>
+  <p:clrMapOvr>
+    <a:masterClrMapping/>
+  </p:clrMapOvr>
+</p:notes>
+</file>
+
+<file path=ppt/notesSlides/notesSlide8.xml><?xml version="1.0" encoding="utf-8"?>
+<p:notes xmlns:a="http://schemas.openxmlformats.org/drawingml/2006/main" xmlns:r="http://schemas.openxmlformats.org/officeDocument/2006/relationships" xmlns:p="http://schemas.openxmlformats.org/presentationml/2006/main">
+  <p:cSld>
+    <p:spTree>
+      <p:nvGrpSpPr>
+        <p:cNvPr id="1" name=""/>
+        <p:cNvGrpSpPr/>
+        <p:nvPr/>
+      </p:nvGrpSpPr>
+      <p:grpSpPr>
+        <a:xfrm>
+          <a:off x="0" y="0"/>
+          <a:ext cx="0" cy="0"/>
+          <a:chOff x="0" y="0"/>
+          <a:chExt cx="0" cy="0"/>
+        </a:xfrm>
+      </p:grpSpPr>
+      <p:sp>
+        <p:nvSpPr>
+          <p:cNvPr id="2" name="Slide Image Placeholder 1"/>
+          <p:cNvSpPr>
+            <a:spLocks noGrp="1" noRot="1" noChangeAspect="1"/>
+          </p:cNvSpPr>
+          <p:nvPr>
+            <p:ph type="sldImg"/>
+          </p:nvPr>
+        </p:nvSpPr>
+        <p:spPr/>
+      </p:sp>
+      <p:sp>
+        <p:nvSpPr>
+          <p:cNvPr id="3" name="Notes Placeholder 2"/>
+          <p:cNvSpPr>
+            <a:spLocks noGrp="1"/>
+          </p:cNvSpPr>
+          <p:nvPr>
+            <p:ph type="body" idx="1"/>
+          </p:nvPr>
+        </p:nvSpPr>
+        <p:spPr/>
+        <p:txBody>
+          <a:bodyPr/>
+          <a:lstStyle/>
+          <a:p>
+            <a:r>
+              <a:rPr lang="en-US" dirty="0"/>
+              <a:t/>
+            </a:r>
+            <a:endParaRPr lang="en-US" dirty="0"/>
+          </a:p>
+        </p:txBody>
+      </p:sp>
+      <p:sp>
+        <p:nvSpPr>
+          <p:cNvPr id="4" name="Slide Number Placeholder 3"/>
+          <p:cNvSpPr>
+            <a:spLocks noGrp="1"/>
+          </p:cNvSpPr>
+          <p:nvPr>
+            <p:ph type="sldNum" sz="quarter" idx="10"/>
+          </p:nvPr>
+        </p:nvSpPr>
+        <p:spPr/>
+        <p:txBody>
+          <a:bodyPr/>
+          <a:lstStyle/>
+          <a:p>
+            <a:fld id="{F7021451-1387-4CA6-816F-3879F97B5CBC}" type="slidenum">
+              <a:rPr lang="en-US"/>
+              <a:t>8</a:t>
+            </a:fld>
+            <a:endParaRPr lang="en-US"/>
+          </a:p>
+        </p:txBody>
+      </p:sp>
+    </p:spTree>
+    <p:extLst>
+      <p:ext uri="{BB962C8B-B14F-4D97-AF65-F5344CB8AC3E}">
+        <p14:creationId xmlns:p14="http://schemas.microsoft.com/office/powerpoint/2010/main" val="1024086991"/>
+      </p:ext>
+    </p:extLst>
+  </p:cSld>
+  <p:clrMapOvr>
+    <a:masterClrMapping/>
+  </p:clrMapOvr>
+</p:notes>
+</file>
+
 <file path=ppt/slideLayouts/slideLayout1.xml><?xml version="1.0" encoding="utf-8"?>
 <p:sldLayout xmlns:a="http://schemas.openxmlformats.org/drawingml/2006/main" xmlns:r="http://schemas.openxmlformats.org/officeDocument/2006/relationships" xmlns:p="http://schemas.openxmlformats.org/presentationml/2006/main" preserve="1">
   <p:cSld name="DEFAULT">
@@ -2370,7 +2548,7 @@
         <p:spPr>
           <a:xfrm>
             <a:off x="502920" y="960120"/>
-            <a:ext cx="11155680" cy="1188720"/>
+            <a:ext cx="11155680" cy="914400"/>
           </a:xfrm>
           <a:prstGeom prst="rect">
             <a:avLst/>
@@ -2383,9 +2561,6 @@
           <a:lstStyle/>
           <a:p>
             <a:pPr indent="0" marL="0">
-              <a:lnSpc>
-                <a:spcPct val="105000"/>
-              </a:lnSpc>
               <a:buNone/>
             </a:pPr>
             <a:r>
@@ -2397,7 +2572,7 @@
                 <a:ea typeface="Cambria" pitchFamily="34" charset="-122"/>
                 <a:cs typeface="Cambria" pitchFamily="34" charset="-120"/>
               </a:rPr>
-              <a:t>Методика внедрения: этапы, роли, загрузка</a:t>
+              <a:t>Два кейса: Пилот и Проект</a:t>
             </a:r>
             <a:endParaRPr lang="en-US" sz="3800" dirty="0"/>
           </a:p>
@@ -2411,8 +2586,8 @@
         </p:nvSpPr>
         <p:spPr>
           <a:xfrm>
-            <a:off x="502920" y="2148840"/>
-            <a:ext cx="7680960" cy="1005840"/>
+            <a:off x="502920" y="1828800"/>
+            <a:ext cx="7680960" cy="914400"/>
           </a:xfrm>
           <a:prstGeom prst="rect">
             <a:avLst/>
@@ -2439,7 +2614,7 @@
                 <a:ea typeface="Calibri" pitchFamily="34" charset="-122"/>
                 <a:cs typeface="Calibri" pitchFamily="34" charset="-120"/>
               </a:rPr>
-              <a:t>Операционный уровень методики, выведенной из фактического хода пилота Д8 и перепроверенной на пилоте «Эко»: кто что делает на каждом из 9 этапов, сколько это стоит по времени, и где команда упирается в потолок по загрузке.</a:t>
+              <a:t>Методика внедрения платформы у нового заказчика: как команда проходит 9 этапов пилота, и что меняется, когда пилот перерастает в полный проект.</a:t>
             </a:r>
             <a:endParaRPr lang="en-US" sz="1450" dirty="0"/>
           </a:p>
@@ -2453,20 +2628,20 @@
         </p:nvSpPr>
         <p:spPr>
           <a:xfrm>
-            <a:off x="502920" y="3520440"/>
-            <a:ext cx="2606040" cy="1600200"/>
+            <a:off x="502920" y="3063240"/>
+            <a:ext cx="5349240" cy="2606040"/>
           </a:xfrm>
           <a:prstGeom prst="roundRect">
             <a:avLst>
-              <a:gd name="adj" fmla="val 4571"/>
+              <a:gd name="adj" fmla="val 2807"/>
             </a:avLst>
           </a:prstGeom>
           <a:solidFill>
             <a:srgbClr val="F4F6F7"/>
           </a:solidFill>
-          <a:ln w="9525">
+          <a:ln w="15875">
             <a:solidFill>
-              <a:srgbClr val="D8DEE2"/>
+              <a:srgbClr val="0E7C86"/>
             </a:solidFill>
             <a:prstDash val="solid"/>
           </a:ln>
@@ -2480,8 +2655,8 @@
         </p:nvSpPr>
         <p:spPr>
           <a:xfrm>
-            <a:off x="667512" y="3685032"/>
-            <a:ext cx="2276856" cy="777240"/>
+            <a:off x="822960" y="3337560"/>
+            <a:ext cx="4709160" cy="274320"/>
           </a:xfrm>
           <a:prstGeom prst="rect">
             <a:avLst/>
@@ -2497,30 +2672,69 @@
               <a:buNone/>
             </a:pPr>
             <a:r>
-              <a:rPr lang="en-US" sz="3400" b="1" dirty="0">
+              <a:rPr lang="en-US" sz="1100" b="1" spc="120" kern="0" dirty="0">
                 <a:solidFill>
-                  <a:srgbClr val="0A5F67"/>
+                  <a:srgbClr val="0E7C86"/>
+                </a:solidFill>
+                <a:latin typeface="Calibri" pitchFamily="34" charset="0"/>
+                <a:ea typeface="Calibri" pitchFamily="34" charset="-122"/>
+                <a:cs typeface="Calibri" pitchFamily="34" charset="-120"/>
+              </a:rPr>
+              <a:t>КЕЙС 1</a:t>
+            </a:r>
+            <a:endParaRPr lang="en-US" sz="1100" dirty="0"/>
+          </a:p>
+        </p:txBody>
+      </p:sp>
+      <p:sp>
+        <p:nvSpPr>
+          <p:cNvPr id="7" name="Text 5"/>
+          <p:cNvSpPr txBox="1"/>
+          <p:nvPr/>
+        </p:nvSpPr>
+        <p:spPr>
+          <a:xfrm>
+            <a:off x="822960" y="3657600"/>
+            <a:ext cx="4709160" cy="594360"/>
+          </a:xfrm>
+          <a:prstGeom prst="rect">
+            <a:avLst/>
+          </a:prstGeom>
+          <a:noFill/>
+          <a:ln/>
+        </p:spPr>
+        <p:txBody>
+          <a:bodyPr wrap="square" lIns="0" tIns="0" rIns="0" bIns="0" rtlCol="0" anchor="ctr"/>
+          <a:lstStyle/>
+          <a:p>
+            <a:pPr indent="0" marL="0">
+              <a:buNone/>
+            </a:pPr>
+            <a:r>
+              <a:rPr lang="en-US" sz="2600" b="1" dirty="0">
+                <a:solidFill>
+                  <a:srgbClr val="1A2733"/>
                 </a:solidFill>
                 <a:latin typeface="Cambria" pitchFamily="34" charset="0"/>
                 <a:ea typeface="Cambria" pitchFamily="34" charset="-122"/>
                 <a:cs typeface="Cambria" pitchFamily="34" charset="-120"/>
               </a:rPr>
-              <a:t>9</a:t>
+              <a:t>Пилот</a:t>
             </a:r>
-            <a:endParaRPr lang="en-US" sz="3400" dirty="0"/>
+            <a:endParaRPr lang="en-US" sz="2600" dirty="0"/>
           </a:p>
         </p:txBody>
       </p:sp>
       <p:sp>
         <p:nvSpPr>
-          <p:cNvPr id="7" name="Text 5"/>
+          <p:cNvPr id="8" name="Text 6"/>
           <p:cNvSpPr txBox="1"/>
           <p:nvPr/>
         </p:nvSpPr>
         <p:spPr>
           <a:xfrm>
-            <a:off x="667512" y="4480560"/>
-            <a:ext cx="2276856" cy="548640"/>
+            <a:off x="822960" y="4343400"/>
+            <a:ext cx="4709160" cy="1188720"/>
           </a:xfrm>
           <a:prstGeom prst="rect">
             <a:avLst/>
@@ -2534,12 +2748,12 @@
           <a:p>
             <a:pPr indent="0" marL="0">
               <a:lnSpc>
-                <a:spcPct val="110000"/>
+                <a:spcPct val="125000"/>
               </a:lnSpc>
               <a:buNone/>
             </a:pPr>
             <a:r>
-              <a:rPr lang="en-US" sz="1250" dirty="0">
+              <a:rPr lang="en-US" sz="1300" dirty="0">
                 <a:solidFill>
                   <a:srgbClr val="5B6B7A"/>
                 </a:solidFill>
@@ -2547,34 +2761,34 @@
                 <a:ea typeface="Calibri" pitchFamily="34" charset="-122"/>
                 <a:cs typeface="Calibri" pitchFamily="34" charset="-120"/>
               </a:rPr>
-              <a:t>этапов внедрения</a:t>
+              <a:t>9 этапов, ~55–81 чел.-дн., 6–8 недель. Реконструирован из фактического хода пилота Д8 — проверенная практика.</a:t>
             </a:r>
-            <a:endParaRPr lang="en-US" sz="1250" dirty="0"/>
+            <a:endParaRPr lang="en-US" sz="1300" dirty="0"/>
           </a:p>
         </p:txBody>
       </p:sp>
       <p:sp>
         <p:nvSpPr>
-          <p:cNvPr id="8" name="Shape 6"/>
+          <p:cNvPr id="9" name="Shape 7"/>
           <p:cNvSpPr/>
           <p:nvPr/>
         </p:nvSpPr>
         <p:spPr>
           <a:xfrm>
-            <a:off x="3337560" y="3520440"/>
-            <a:ext cx="2606040" cy="1600200"/>
+            <a:off x="6309360" y="3063240"/>
+            <a:ext cx="5349240" cy="2606040"/>
           </a:xfrm>
           <a:prstGeom prst="roundRect">
             <a:avLst>
-              <a:gd name="adj" fmla="val 4571"/>
+              <a:gd name="adj" fmla="val 2807"/>
             </a:avLst>
           </a:prstGeom>
           <a:solidFill>
             <a:srgbClr val="F4F6F7"/>
           </a:solidFill>
-          <a:ln w="9525">
+          <a:ln w="15875">
             <a:solidFill>
-              <a:srgbClr val="D8DEE2"/>
+              <a:srgbClr val="C97A1A"/>
             </a:solidFill>
             <a:prstDash val="solid"/>
           </a:ln>
@@ -2582,14 +2796,14 @@
       </p:sp>
       <p:sp>
         <p:nvSpPr>
-          <p:cNvPr id="9" name="Text 7"/>
+          <p:cNvPr id="10" name="Text 8"/>
           <p:cNvSpPr txBox="1"/>
           <p:nvPr/>
         </p:nvSpPr>
         <p:spPr>
           <a:xfrm>
-            <a:off x="3502152" y="3685032"/>
-            <a:ext cx="2276856" cy="777240"/>
+            <a:off x="6629400" y="3337560"/>
+            <a:ext cx="4709160" cy="274320"/>
           </a:xfrm>
           <a:prstGeom prst="rect">
             <a:avLst/>
@@ -2605,30 +2819,69 @@
               <a:buNone/>
             </a:pPr>
             <a:r>
-              <a:rPr lang="en-US" sz="3400" b="1" dirty="0">
+              <a:rPr lang="en-US" sz="1100" b="1" spc="120" kern="0" dirty="0">
                 <a:solidFill>
-                  <a:srgbClr val="0A5F67"/>
+                  <a:srgbClr val="C97A1A"/>
+                </a:solidFill>
+                <a:latin typeface="Calibri" pitchFamily="34" charset="0"/>
+                <a:ea typeface="Calibri" pitchFamily="34" charset="-122"/>
+                <a:cs typeface="Calibri" pitchFamily="34" charset="-120"/>
+              </a:rPr>
+              <a:t>КЕЙС 2</a:t>
+            </a:r>
+            <a:endParaRPr lang="en-US" sz="1100" dirty="0"/>
+          </a:p>
+        </p:txBody>
+      </p:sp>
+      <p:sp>
+        <p:nvSpPr>
+          <p:cNvPr id="11" name="Text 9"/>
+          <p:cNvSpPr txBox="1"/>
+          <p:nvPr/>
+        </p:nvSpPr>
+        <p:spPr>
+          <a:xfrm>
+            <a:off x="6629400" y="3657600"/>
+            <a:ext cx="4709160" cy="594360"/>
+          </a:xfrm>
+          <a:prstGeom prst="rect">
+            <a:avLst/>
+          </a:prstGeom>
+          <a:noFill/>
+          <a:ln/>
+        </p:spPr>
+        <p:txBody>
+          <a:bodyPr wrap="square" lIns="0" tIns="0" rIns="0" bIns="0" rtlCol="0" anchor="ctr"/>
+          <a:lstStyle/>
+          <a:p>
+            <a:pPr indent="0" marL="0">
+              <a:buNone/>
+            </a:pPr>
+            <a:r>
+              <a:rPr lang="en-US" sz="2600" b="1" dirty="0">
+                <a:solidFill>
+                  <a:srgbClr val="1A2733"/>
                 </a:solidFill>
                 <a:latin typeface="Cambria" pitchFamily="34" charset="0"/>
                 <a:ea typeface="Cambria" pitchFamily="34" charset="-122"/>
                 <a:cs typeface="Cambria" pitchFamily="34" charset="-120"/>
               </a:rPr>
-              <a:t>~55–81</a:t>
+              <a:t>Проект</a:t>
             </a:r>
-            <a:endParaRPr lang="en-US" sz="3400" dirty="0"/>
+            <a:endParaRPr lang="en-US" sz="2600" dirty="0"/>
           </a:p>
         </p:txBody>
       </p:sp>
       <p:sp>
         <p:nvSpPr>
-          <p:cNvPr id="10" name="Text 8"/>
+          <p:cNvPr id="12" name="Text 10"/>
           <p:cNvSpPr txBox="1"/>
           <p:nvPr/>
         </p:nvSpPr>
         <p:spPr>
           <a:xfrm>
-            <a:off x="3502152" y="4480560"/>
-            <a:ext cx="2276856" cy="548640"/>
+            <a:off x="6629400" y="4343400"/>
+            <a:ext cx="4709160" cy="1188720"/>
           </a:xfrm>
           <a:prstGeom prst="rect">
             <a:avLst/>
@@ -2642,12 +2895,12 @@
           <a:p>
             <a:pPr indent="0" marL="0">
               <a:lnSpc>
-                <a:spcPct val="110000"/>
+                <a:spcPct val="125000"/>
               </a:lnSpc>
               <a:buNone/>
             </a:pPr>
             <a:r>
-              <a:rPr lang="en-US" sz="1250" dirty="0">
+              <a:rPr lang="en-US" sz="1300" dirty="0">
                 <a:solidFill>
                   <a:srgbClr val="5B6B7A"/>
                 </a:solidFill>
@@ -2655,231 +2908,15 @@
                 <a:ea typeface="Calibri" pitchFamily="34" charset="-122"/>
                 <a:cs typeface="Calibri" pitchFamily="34" charset="-120"/>
               </a:rPr>
-              <a:t>чел.-дн. на пилот</a:t>
+              <a:t>5 фаз масштабирования после пилота на весь периметр заказчика. Логическое продолжение методики — пока без реального прецедента.</a:t>
             </a:r>
-            <a:endParaRPr lang="en-US" sz="1250" dirty="0"/>
+            <a:endParaRPr lang="en-US" sz="1300" dirty="0"/>
           </a:p>
         </p:txBody>
       </p:sp>
       <p:sp>
         <p:nvSpPr>
-          <p:cNvPr id="11" name="Shape 9"/>
-          <p:cNvSpPr/>
-          <p:nvPr/>
-        </p:nvSpPr>
-        <p:spPr>
-          <a:xfrm>
-            <a:off x="6172200" y="3520440"/>
-            <a:ext cx="2606040" cy="1600200"/>
-          </a:xfrm>
-          <a:prstGeom prst="roundRect">
-            <a:avLst>
-              <a:gd name="adj" fmla="val 4571"/>
-            </a:avLst>
-          </a:prstGeom>
-          <a:solidFill>
-            <a:srgbClr val="F4F6F7"/>
-          </a:solidFill>
-          <a:ln w="9525">
-            <a:solidFill>
-              <a:srgbClr val="D8DEE2"/>
-            </a:solidFill>
-            <a:prstDash val="solid"/>
-          </a:ln>
-        </p:spPr>
-      </p:sp>
-      <p:sp>
-        <p:nvSpPr>
-          <p:cNvPr id="12" name="Text 10"/>
-          <p:cNvSpPr txBox="1"/>
-          <p:nvPr/>
-        </p:nvSpPr>
-        <p:spPr>
-          <a:xfrm>
-            <a:off x="6336792" y="3685032"/>
-            <a:ext cx="2276856" cy="777240"/>
-          </a:xfrm>
-          <a:prstGeom prst="rect">
-            <a:avLst/>
-          </a:prstGeom>
-          <a:noFill/>
-          <a:ln/>
-        </p:spPr>
-        <p:txBody>
-          <a:bodyPr wrap="square" lIns="0" tIns="0" rIns="0" bIns="0" rtlCol="0" anchor="ctr"/>
-          <a:lstStyle/>
-          <a:p>
-            <a:pPr indent="0" marL="0">
-              <a:buNone/>
-            </a:pPr>
-            <a:r>
-              <a:rPr lang="en-US" sz="3400" b="1" dirty="0">
-                <a:solidFill>
-                  <a:srgbClr val="0A5F67"/>
-                </a:solidFill>
-                <a:latin typeface="Cambria" pitchFamily="34" charset="0"/>
-                <a:ea typeface="Cambria" pitchFamily="34" charset="-122"/>
-                <a:cs typeface="Cambria" pitchFamily="34" charset="-120"/>
-              </a:rPr>
-              <a:t>6–8</a:t>
-            </a:r>
-            <a:endParaRPr lang="en-US" sz="3400" dirty="0"/>
-          </a:p>
-        </p:txBody>
-      </p:sp>
-      <p:sp>
-        <p:nvSpPr>
           <p:cNvPr id="13" name="Text 11"/>
-          <p:cNvSpPr txBox="1"/>
-          <p:nvPr/>
-        </p:nvSpPr>
-        <p:spPr>
-          <a:xfrm>
-            <a:off x="6336792" y="4480560"/>
-            <a:ext cx="2276856" cy="548640"/>
-          </a:xfrm>
-          <a:prstGeom prst="rect">
-            <a:avLst/>
-          </a:prstGeom>
-          <a:noFill/>
-          <a:ln/>
-        </p:spPr>
-        <p:txBody>
-          <a:bodyPr wrap="square" lIns="0" tIns="0" rIns="0" bIns="0" rtlCol="0" anchor="ctr"/>
-          <a:lstStyle/>
-          <a:p>
-            <a:pPr indent="0" marL="0">
-              <a:lnSpc>
-                <a:spcPct val="110000"/>
-              </a:lnSpc>
-              <a:buNone/>
-            </a:pPr>
-            <a:r>
-              <a:rPr lang="en-US" sz="1250" dirty="0">
-                <a:solidFill>
-                  <a:srgbClr val="5B6B7A"/>
-                </a:solidFill>
-                <a:latin typeface="Calibri" pitchFamily="34" charset="0"/>
-                <a:ea typeface="Calibri" pitchFamily="34" charset="-122"/>
-                <a:cs typeface="Calibri" pitchFamily="34" charset="-120"/>
-              </a:rPr>
-              <a:t>недель календаря</a:t>
-            </a:r>
-            <a:endParaRPr lang="en-US" sz="1250" dirty="0"/>
-          </a:p>
-        </p:txBody>
-      </p:sp>
-      <p:sp>
-        <p:nvSpPr>
-          <p:cNvPr id="14" name="Shape 12"/>
-          <p:cNvSpPr/>
-          <p:nvPr/>
-        </p:nvSpPr>
-        <p:spPr>
-          <a:xfrm>
-            <a:off x="9006840" y="3520440"/>
-            <a:ext cx="2606040" cy="1600200"/>
-          </a:xfrm>
-          <a:prstGeom prst="roundRect">
-            <a:avLst>
-              <a:gd name="adj" fmla="val 4571"/>
-            </a:avLst>
-          </a:prstGeom>
-          <a:solidFill>
-            <a:srgbClr val="F4F6F7"/>
-          </a:solidFill>
-          <a:ln w="9525">
-            <a:solidFill>
-              <a:srgbClr val="D8DEE2"/>
-            </a:solidFill>
-            <a:prstDash val="solid"/>
-          </a:ln>
-        </p:spPr>
-      </p:sp>
-      <p:sp>
-        <p:nvSpPr>
-          <p:cNvPr id="15" name="Text 13"/>
-          <p:cNvSpPr txBox="1"/>
-          <p:nvPr/>
-        </p:nvSpPr>
-        <p:spPr>
-          <a:xfrm>
-            <a:off x="9171432" y="3685032"/>
-            <a:ext cx="2276856" cy="777240"/>
-          </a:xfrm>
-          <a:prstGeom prst="rect">
-            <a:avLst/>
-          </a:prstGeom>
-          <a:noFill/>
-          <a:ln/>
-        </p:spPr>
-        <p:txBody>
-          <a:bodyPr wrap="square" lIns="0" tIns="0" rIns="0" bIns="0" rtlCol="0" anchor="ctr"/>
-          <a:lstStyle/>
-          <a:p>
-            <a:pPr indent="0" marL="0">
-              <a:buNone/>
-            </a:pPr>
-            <a:r>
-              <a:rPr lang="en-US" sz="3400" b="1" dirty="0">
-                <a:solidFill>
-                  <a:srgbClr val="0A5F67"/>
-                </a:solidFill>
-                <a:latin typeface="Cambria" pitchFamily="34" charset="0"/>
-                <a:ea typeface="Cambria" pitchFamily="34" charset="-122"/>
-                <a:cs typeface="Cambria" pitchFamily="34" charset="-120"/>
-              </a:rPr>
-              <a:t>2</a:t>
-            </a:r>
-            <a:endParaRPr lang="en-US" sz="3400" dirty="0"/>
-          </a:p>
-        </p:txBody>
-      </p:sp>
-      <p:sp>
-        <p:nvSpPr>
-          <p:cNvPr id="16" name="Text 14"/>
-          <p:cNvSpPr txBox="1"/>
-          <p:nvPr/>
-        </p:nvSpPr>
-        <p:spPr>
-          <a:xfrm>
-            <a:off x="9171432" y="4480560"/>
-            <a:ext cx="2276856" cy="548640"/>
-          </a:xfrm>
-          <a:prstGeom prst="rect">
-            <a:avLst/>
-          </a:prstGeom>
-          <a:noFill/>
-          <a:ln/>
-        </p:spPr>
-        <p:txBody>
-          <a:bodyPr wrap="square" lIns="0" tIns="0" rIns="0" bIns="0" rtlCol="0" anchor="ctr"/>
-          <a:lstStyle/>
-          <a:p>
-            <a:pPr indent="0" marL="0">
-              <a:lnSpc>
-                <a:spcPct val="110000"/>
-              </a:lnSpc>
-              <a:buNone/>
-            </a:pPr>
-            <a:r>
-              <a:rPr lang="en-US" sz="1250" dirty="0">
-                <a:solidFill>
-                  <a:srgbClr val="5B6B7A"/>
-                </a:solidFill>
-                <a:latin typeface="Calibri" pitchFamily="34" charset="0"/>
-                <a:ea typeface="Calibri" pitchFamily="34" charset="-122"/>
-                <a:cs typeface="Calibri" pitchFamily="34" charset="-120"/>
-              </a:rPr>
-              <a:t>роли в команде — А / Р</a:t>
-            </a:r>
-            <a:endParaRPr lang="en-US" sz="1250" dirty="0"/>
-          </a:p>
-        </p:txBody>
-      </p:sp>
-      <p:sp>
-        <p:nvSpPr>
-          <p:cNvPr id="17" name="Text 15"/>
           <p:cNvSpPr txBox="1"/>
           <p:nvPr/>
         </p:nvSpPr>
@@ -2918,7 +2955,7 @@
       </p:sp>
       <p:sp>
         <p:nvSpPr>
-          <p:cNvPr id="18" name="Text 16"/>
+          <p:cNvPr id="14" name="Text 12"/>
           <p:cNvSpPr txBox="1"/>
           <p:nvPr/>
         </p:nvSpPr>
@@ -2949,7 +2986,7 @@
                 <a:ea typeface="Calibri" pitchFamily="34" charset="-122"/>
                 <a:cs typeface="Calibri" pitchFamily="34" charset="-120"/>
               </a:rPr>
-              <a:t>1 / 6</a:t>
+              <a:t>1 / 8</a:t>
             </a:r>
             <a:endParaRPr lang="en-US" sz="1050" dirty="0"/>
           </a:p>
@@ -3013,7 +3050,7 @@
                 <a:ea typeface="Calibri" pitchFamily="34" charset="-122"/>
                 <a:cs typeface="Calibri" pitchFamily="34" charset="-120"/>
               </a:rPr>
-              <a:t>§1 — КАРТА ЭТАПОВ</a:t>
+              <a:t>КЕЙС 1 — ПИЛОТ</a:t>
             </a:r>
             <a:endParaRPr lang="en-US" sz="1100" dirty="0"/>
           </a:p>
@@ -3027,7 +3064,7 @@
         </p:nvSpPr>
         <p:spPr>
           <a:xfrm>
-            <a:off x="502920" y="621792"/>
+            <a:off x="502920" y="658368"/>
             <a:ext cx="11155680" cy="566928"/>
           </a:xfrm>
           <a:prstGeom prst="rect">
@@ -3044,7 +3081,7 @@
               <a:buNone/>
             </a:pPr>
             <a:r>
-              <a:rPr lang="en-US" sz="3000" b="1" dirty="0">
+              <a:rPr lang="en-US" sz="2800" b="1" dirty="0">
                 <a:solidFill>
                   <a:srgbClr val="1A2733"/>
                 </a:solidFill>
@@ -3052,9 +3089,9 @@
                 <a:ea typeface="Cambria" pitchFamily="34" charset="-122"/>
                 <a:cs typeface="Cambria" pitchFamily="34" charset="-120"/>
               </a:rPr>
-              <a:t>9 этапов, ведущая роль, что фиксируем</a:t>
+              <a:t>Прохождение 9 этапов пилота</a:t>
             </a:r>
-            <a:endParaRPr lang="en-US" sz="3000" dirty="0"/>
+            <a:endParaRPr lang="en-US" sz="2800" dirty="0"/>
           </a:p>
         </p:txBody>
       </p:sp>
@@ -3066,7 +3103,7 @@
         </p:nvSpPr>
         <p:spPr>
           <a:xfrm>
-            <a:off x="502920" y="1207008"/>
+            <a:off x="502920" y="1225296"/>
             <a:ext cx="11155680" cy="365760"/>
           </a:xfrm>
           <a:prstGeom prst="rect">
@@ -3083,7 +3120,7 @@
               <a:buNone/>
             </a:pPr>
             <a:r>
-              <a:rPr lang="en-US" sz="1400" dirty="0">
+              <a:rPr lang="en-US" sz="1350" dirty="0">
                 <a:solidFill>
                   <a:srgbClr val="5B6B7A"/>
                 </a:solidFill>
@@ -3091,15 +3128,2389 @@
                 <a:ea typeface="Calibri" pitchFamily="34" charset="-122"/>
                 <a:cs typeface="Calibri" pitchFamily="34" charset="-120"/>
               </a:rPr>
-              <a:t>А — аналитик, Р — разработчик, АР — распределено между обоими</a:t>
+              <a:t>Один цикл, ~6–8 недель: от диагностики до закрытия — точка перехода в Кейс 2 на этапе 8</a:t>
             </a:r>
-            <a:endParaRPr lang="en-US" sz="1400" dirty="0"/>
+            <a:endParaRPr lang="en-US" sz="1350" dirty="0"/>
+          </a:p>
+        </p:txBody>
+      </p:sp>
+      <p:sp>
+        <p:nvSpPr>
+          <p:cNvPr id="5" name="Shape 3"/>
+          <p:cNvSpPr/>
+          <p:nvPr/>
+        </p:nvSpPr>
+        <p:spPr>
+          <a:xfrm>
+            <a:off x="502920" y="1874520"/>
+            <a:ext cx="1133856" cy="1554480"/>
+          </a:xfrm>
+          <a:prstGeom prst="roundRect">
+            <a:avLst>
+              <a:gd name="adj" fmla="val 5645"/>
+            </a:avLst>
+          </a:prstGeom>
+          <a:solidFill>
+            <a:srgbClr val="F4F6F7"/>
+          </a:solidFill>
+          <a:ln w="15875">
+            <a:solidFill>
+              <a:srgbClr val="0A5F67"/>
+            </a:solidFill>
+            <a:prstDash val="solid"/>
+          </a:ln>
+        </p:spPr>
+      </p:sp>
+      <p:sp>
+        <p:nvSpPr>
+          <p:cNvPr id="6" name="Shape 4"/>
+          <p:cNvSpPr/>
+          <p:nvPr/>
+        </p:nvSpPr>
+        <p:spPr>
+          <a:xfrm>
+            <a:off x="868680" y="2020824"/>
+            <a:ext cx="402336" cy="402336"/>
+          </a:xfrm>
+          <a:prstGeom prst="ellipse">
+            <a:avLst/>
+          </a:prstGeom>
+          <a:solidFill>
+            <a:srgbClr val="0A5F67"/>
+          </a:solidFill>
+          <a:ln/>
+        </p:spPr>
+      </p:sp>
+      <p:sp>
+        <p:nvSpPr>
+          <p:cNvPr id="7" name="Text 5"/>
+          <p:cNvSpPr txBox="1"/>
+          <p:nvPr/>
+        </p:nvSpPr>
+        <p:spPr>
+          <a:xfrm>
+            <a:off x="868680" y="2020824"/>
+            <a:ext cx="402336" cy="402336"/>
+          </a:xfrm>
+          <a:prstGeom prst="rect">
+            <a:avLst/>
+          </a:prstGeom>
+          <a:noFill/>
+          <a:ln/>
+        </p:spPr>
+        <p:txBody>
+          <a:bodyPr wrap="square" lIns="0" tIns="0" rIns="0" bIns="0" rtlCol="0" anchor="ctr"/>
+          <a:lstStyle/>
+          <a:p>
+            <a:pPr algn="ctr" indent="0" marL="0">
+              <a:buNone/>
+            </a:pPr>
+            <a:r>
+              <a:rPr lang="en-US" sz="1600" b="1" dirty="0">
+                <a:solidFill>
+                  <a:srgbClr val="FFFFFF"/>
+                </a:solidFill>
+                <a:latin typeface="Cambria" pitchFamily="34" charset="0"/>
+                <a:ea typeface="Cambria" pitchFamily="34" charset="-122"/>
+                <a:cs typeface="Cambria" pitchFamily="34" charset="-120"/>
+              </a:rPr>
+              <a:t>0</a:t>
+            </a:r>
+            <a:endParaRPr lang="en-US" sz="1600" dirty="0"/>
+          </a:p>
+        </p:txBody>
+      </p:sp>
+      <p:sp>
+        <p:nvSpPr>
+          <p:cNvPr id="8" name="Text 6"/>
+          <p:cNvSpPr txBox="1"/>
+          <p:nvPr/>
+        </p:nvSpPr>
+        <p:spPr>
+          <a:xfrm>
+            <a:off x="557784" y="2496312"/>
+            <a:ext cx="1024128" cy="685800"/>
+          </a:xfrm>
+          <a:prstGeom prst="rect">
+            <a:avLst/>
+          </a:prstGeom>
+          <a:noFill/>
+          <a:ln/>
+        </p:spPr>
+        <p:txBody>
+          <a:bodyPr wrap="square" lIns="0" tIns="0" rIns="0" bIns="0" rtlCol="0" anchor="ctr"/>
+          <a:lstStyle/>
+          <a:p>
+            <a:pPr algn="ctr" indent="0" marL="0">
+              <a:lnSpc>
+                <a:spcPct val="105000"/>
+              </a:lnSpc>
+              <a:buNone/>
+            </a:pPr>
+            <a:r>
+              <a:rPr lang="en-US" sz="1050" b="1" dirty="0">
+                <a:solidFill>
+                  <a:srgbClr val="1A2733"/>
+                </a:solidFill>
+                <a:latin typeface="Calibri" pitchFamily="34" charset="0"/>
+                <a:ea typeface="Calibri" pitchFamily="34" charset="-122"/>
+                <a:cs typeface="Calibri" pitchFamily="34" charset="-120"/>
+              </a:rPr>
+              <a:t>Диагностика</a:t>
+            </a:r>
+            <a:endParaRPr lang="en-US" sz="1050" dirty="0"/>
+          </a:p>
+        </p:txBody>
+      </p:sp>
+      <p:sp>
+        <p:nvSpPr>
+          <p:cNvPr id="9" name="Text 7"/>
+          <p:cNvSpPr txBox="1"/>
+          <p:nvPr/>
+        </p:nvSpPr>
+        <p:spPr>
+          <a:xfrm>
+            <a:off x="557784" y="3099816"/>
+            <a:ext cx="1024128" cy="274320"/>
+          </a:xfrm>
+          <a:prstGeom prst="rect">
+            <a:avLst/>
+          </a:prstGeom>
+          <a:noFill/>
+          <a:ln/>
+        </p:spPr>
+        <p:txBody>
+          <a:bodyPr wrap="square" lIns="0" tIns="0" rIns="0" bIns="0" rtlCol="0" anchor="ctr"/>
+          <a:lstStyle/>
+          <a:p>
+            <a:pPr algn="ctr" indent="0" marL="0">
+              <a:buNone/>
+            </a:pPr>
+            <a:r>
+              <a:rPr lang="en-US" sz="1000" b="1" dirty="0">
+                <a:solidFill>
+                  <a:srgbClr val="0A5F67"/>
+                </a:solidFill>
+                <a:latin typeface="Calibri" pitchFamily="34" charset="0"/>
+                <a:ea typeface="Calibri" pitchFamily="34" charset="-122"/>
+                <a:cs typeface="Calibri" pitchFamily="34" charset="-120"/>
+              </a:rPr>
+              <a:t>А</a:t>
+            </a:r>
+            <a:endParaRPr lang="en-US" sz="1000" dirty="0"/>
+          </a:p>
+        </p:txBody>
+      </p:sp>
+      <p:sp>
+        <p:nvSpPr>
+          <p:cNvPr id="10" name="Shape 8"/>
+          <p:cNvSpPr/>
+          <p:nvPr/>
+        </p:nvSpPr>
+        <p:spPr>
+          <a:xfrm>
+            <a:off x="1641348" y="2569464"/>
+            <a:ext cx="91440" cy="164592"/>
+          </a:xfrm>
+          <a:prstGeom prst="chevron">
+            <a:avLst/>
+          </a:prstGeom>
+          <a:solidFill>
+            <a:srgbClr val="8C99A6"/>
+          </a:solidFill>
+          <a:ln/>
+        </p:spPr>
+      </p:sp>
+      <p:sp>
+        <p:nvSpPr>
+          <p:cNvPr id="11" name="Shape 9"/>
+          <p:cNvSpPr/>
+          <p:nvPr/>
+        </p:nvSpPr>
+        <p:spPr>
+          <a:xfrm>
+            <a:off x="1737360" y="1874520"/>
+            <a:ext cx="1133856" cy="1554480"/>
+          </a:xfrm>
+          <a:prstGeom prst="roundRect">
+            <a:avLst>
+              <a:gd name="adj" fmla="val 5645"/>
+            </a:avLst>
+          </a:prstGeom>
+          <a:solidFill>
+            <a:srgbClr val="F4F6F7"/>
+          </a:solidFill>
+          <a:ln w="15875">
+            <a:solidFill>
+              <a:srgbClr val="5B6B7A"/>
+            </a:solidFill>
+            <a:prstDash val="solid"/>
+          </a:ln>
+        </p:spPr>
+      </p:sp>
+      <p:sp>
+        <p:nvSpPr>
+          <p:cNvPr id="12" name="Shape 10"/>
+          <p:cNvSpPr/>
+          <p:nvPr/>
+        </p:nvSpPr>
+        <p:spPr>
+          <a:xfrm>
+            <a:off x="2103120" y="2020824"/>
+            <a:ext cx="402336" cy="402336"/>
+          </a:xfrm>
+          <a:prstGeom prst="ellipse">
+            <a:avLst/>
+          </a:prstGeom>
+          <a:solidFill>
+            <a:srgbClr val="5B6B7A"/>
+          </a:solidFill>
+          <a:ln/>
+        </p:spPr>
+      </p:sp>
+      <p:sp>
+        <p:nvSpPr>
+          <p:cNvPr id="13" name="Text 11"/>
+          <p:cNvSpPr txBox="1"/>
+          <p:nvPr/>
+        </p:nvSpPr>
+        <p:spPr>
+          <a:xfrm>
+            <a:off x="2103120" y="2020824"/>
+            <a:ext cx="402336" cy="402336"/>
+          </a:xfrm>
+          <a:prstGeom prst="rect">
+            <a:avLst/>
+          </a:prstGeom>
+          <a:noFill/>
+          <a:ln/>
+        </p:spPr>
+        <p:txBody>
+          <a:bodyPr wrap="square" lIns="0" tIns="0" rIns="0" bIns="0" rtlCol="0" anchor="ctr"/>
+          <a:lstStyle/>
+          <a:p>
+            <a:pPr algn="ctr" indent="0" marL="0">
+              <a:buNone/>
+            </a:pPr>
+            <a:r>
+              <a:rPr lang="en-US" sz="1600" b="1" dirty="0">
+                <a:solidFill>
+                  <a:srgbClr val="FFFFFF"/>
+                </a:solidFill>
+                <a:latin typeface="Cambria" pitchFamily="34" charset="0"/>
+                <a:ea typeface="Cambria" pitchFamily="34" charset="-122"/>
+                <a:cs typeface="Cambria" pitchFamily="34" charset="-120"/>
+              </a:rPr>
+              <a:t>1</a:t>
+            </a:r>
+            <a:endParaRPr lang="en-US" sz="1600" dirty="0"/>
+          </a:p>
+        </p:txBody>
+      </p:sp>
+      <p:sp>
+        <p:nvSpPr>
+          <p:cNvPr id="14" name="Text 12"/>
+          <p:cNvSpPr txBox="1"/>
+          <p:nvPr/>
+        </p:nvSpPr>
+        <p:spPr>
+          <a:xfrm>
+            <a:off x="1792224" y="2496312"/>
+            <a:ext cx="1024128" cy="685800"/>
+          </a:xfrm>
+          <a:prstGeom prst="rect">
+            <a:avLst/>
+          </a:prstGeom>
+          <a:noFill/>
+          <a:ln/>
+        </p:spPr>
+        <p:txBody>
+          <a:bodyPr wrap="square" lIns="0" tIns="0" rIns="0" bIns="0" rtlCol="0" anchor="ctr"/>
+          <a:lstStyle/>
+          <a:p>
+            <a:pPr algn="ctr" indent="0" marL="0">
+              <a:lnSpc>
+                <a:spcPct val="105000"/>
+              </a:lnSpc>
+              <a:buNone/>
+            </a:pPr>
+            <a:r>
+              <a:rPr lang="en-US" sz="1050" b="1" dirty="0">
+                <a:solidFill>
+                  <a:srgbClr val="1A2733"/>
+                </a:solidFill>
+                <a:latin typeface="Calibri" pitchFamily="34" charset="0"/>
+                <a:ea typeface="Calibri" pitchFamily="34" charset="-122"/>
+                <a:cs typeface="Calibri" pitchFamily="34" charset="-120"/>
+              </a:rPr>
+              <a:t>Скоуп и</a:t>
+            </a:r>
+            <a:endParaRPr lang="en-US" sz="1050" dirty="0"/>
+          </a:p>
+          <a:p>
+            <a:pPr algn="ctr" indent="0" marL="0">
+              <a:lnSpc>
+                <a:spcPct val="105000"/>
+              </a:lnSpc>
+              <a:buNone/>
+            </a:pPr>
+            <a:r>
+              <a:rPr lang="en-US" sz="1050" b="1" dirty="0">
+                <a:solidFill>
+                  <a:srgbClr val="1A2733"/>
+                </a:solidFill>
+                <a:latin typeface="Calibri" pitchFamily="34" charset="0"/>
+                <a:ea typeface="Calibri" pitchFamily="34" charset="-122"/>
+                <a:cs typeface="Calibri" pitchFamily="34" charset="-120"/>
+              </a:rPr>
+              <a:t>контракт</a:t>
+            </a:r>
+            <a:endParaRPr lang="en-US" sz="1050" dirty="0"/>
+          </a:p>
+        </p:txBody>
+      </p:sp>
+      <p:sp>
+        <p:nvSpPr>
+          <p:cNvPr id="15" name="Text 13"/>
+          <p:cNvSpPr txBox="1"/>
+          <p:nvPr/>
+        </p:nvSpPr>
+        <p:spPr>
+          <a:xfrm>
+            <a:off x="1792224" y="3099816"/>
+            <a:ext cx="1024128" cy="274320"/>
+          </a:xfrm>
+          <a:prstGeom prst="rect">
+            <a:avLst/>
+          </a:prstGeom>
+          <a:noFill/>
+          <a:ln/>
+        </p:spPr>
+        <p:txBody>
+          <a:bodyPr wrap="square" lIns="0" tIns="0" rIns="0" bIns="0" rtlCol="0" anchor="ctr"/>
+          <a:lstStyle/>
+          <a:p>
+            <a:pPr algn="ctr" indent="0" marL="0">
+              <a:buNone/>
+            </a:pPr>
+            <a:r>
+              <a:rPr lang="en-US" sz="1000" b="1" dirty="0">
+                <a:solidFill>
+                  <a:srgbClr val="5B6B7A"/>
+                </a:solidFill>
+                <a:latin typeface="Calibri" pitchFamily="34" charset="0"/>
+                <a:ea typeface="Calibri" pitchFamily="34" charset="-122"/>
+                <a:cs typeface="Calibri" pitchFamily="34" charset="-120"/>
+              </a:rPr>
+              <a:t>АР</a:t>
+            </a:r>
+            <a:endParaRPr lang="en-US" sz="1000" dirty="0"/>
+          </a:p>
+        </p:txBody>
+      </p:sp>
+      <p:sp>
+        <p:nvSpPr>
+          <p:cNvPr id="16" name="Shape 14"/>
+          <p:cNvSpPr/>
+          <p:nvPr/>
+        </p:nvSpPr>
+        <p:spPr>
+          <a:xfrm>
+            <a:off x="2875788" y="2569464"/>
+            <a:ext cx="91440" cy="164592"/>
+          </a:xfrm>
+          <a:prstGeom prst="chevron">
+            <a:avLst/>
+          </a:prstGeom>
+          <a:solidFill>
+            <a:srgbClr val="8C99A6"/>
+          </a:solidFill>
+          <a:ln/>
+        </p:spPr>
+      </p:sp>
+      <p:sp>
+        <p:nvSpPr>
+          <p:cNvPr id="17" name="Shape 15"/>
+          <p:cNvSpPr/>
+          <p:nvPr/>
+        </p:nvSpPr>
+        <p:spPr>
+          <a:xfrm>
+            <a:off x="2971800" y="1874520"/>
+            <a:ext cx="1133856" cy="1554480"/>
+          </a:xfrm>
+          <a:prstGeom prst="roundRect">
+            <a:avLst>
+              <a:gd name="adj" fmla="val 5645"/>
+            </a:avLst>
+          </a:prstGeom>
+          <a:solidFill>
+            <a:srgbClr val="F4F6F7"/>
+          </a:solidFill>
+          <a:ln w="15875">
+            <a:solidFill>
+              <a:srgbClr val="C97A1A"/>
+            </a:solidFill>
+            <a:prstDash val="solid"/>
+          </a:ln>
+        </p:spPr>
+      </p:sp>
+      <p:sp>
+        <p:nvSpPr>
+          <p:cNvPr id="18" name="Shape 16"/>
+          <p:cNvSpPr/>
+          <p:nvPr/>
+        </p:nvSpPr>
+        <p:spPr>
+          <a:xfrm>
+            <a:off x="3337560" y="2020824"/>
+            <a:ext cx="402336" cy="402336"/>
+          </a:xfrm>
+          <a:prstGeom prst="ellipse">
+            <a:avLst/>
+          </a:prstGeom>
+          <a:solidFill>
+            <a:srgbClr val="C97A1A"/>
+          </a:solidFill>
+          <a:ln/>
+        </p:spPr>
+      </p:sp>
+      <p:sp>
+        <p:nvSpPr>
+          <p:cNvPr id="19" name="Text 17"/>
+          <p:cNvSpPr txBox="1"/>
+          <p:nvPr/>
+        </p:nvSpPr>
+        <p:spPr>
+          <a:xfrm>
+            <a:off x="3337560" y="2020824"/>
+            <a:ext cx="402336" cy="402336"/>
+          </a:xfrm>
+          <a:prstGeom prst="rect">
+            <a:avLst/>
+          </a:prstGeom>
+          <a:noFill/>
+          <a:ln/>
+        </p:spPr>
+        <p:txBody>
+          <a:bodyPr wrap="square" lIns="0" tIns="0" rIns="0" bIns="0" rtlCol="0" anchor="ctr"/>
+          <a:lstStyle/>
+          <a:p>
+            <a:pPr algn="ctr" indent="0" marL="0">
+              <a:buNone/>
+            </a:pPr>
+            <a:r>
+              <a:rPr lang="en-US" sz="1600" b="1" dirty="0">
+                <a:solidFill>
+                  <a:srgbClr val="FFFFFF"/>
+                </a:solidFill>
+                <a:latin typeface="Cambria" pitchFamily="34" charset="0"/>
+                <a:ea typeface="Cambria" pitchFamily="34" charset="-122"/>
+                <a:cs typeface="Cambria" pitchFamily="34" charset="-120"/>
+              </a:rPr>
+              <a:t>2</a:t>
+            </a:r>
+            <a:endParaRPr lang="en-US" sz="1600" dirty="0"/>
+          </a:p>
+        </p:txBody>
+      </p:sp>
+      <p:sp>
+        <p:nvSpPr>
+          <p:cNvPr id="20" name="Text 18"/>
+          <p:cNvSpPr txBox="1"/>
+          <p:nvPr/>
+        </p:nvSpPr>
+        <p:spPr>
+          <a:xfrm>
+            <a:off x="3026664" y="2496312"/>
+            <a:ext cx="1024128" cy="685800"/>
+          </a:xfrm>
+          <a:prstGeom prst="rect">
+            <a:avLst/>
+          </a:prstGeom>
+          <a:noFill/>
+          <a:ln/>
+        </p:spPr>
+        <p:txBody>
+          <a:bodyPr wrap="square" lIns="0" tIns="0" rIns="0" bIns="0" rtlCol="0" anchor="ctr"/>
+          <a:lstStyle/>
+          <a:p>
+            <a:pPr algn="ctr" indent="0" marL="0">
+              <a:lnSpc>
+                <a:spcPct val="105000"/>
+              </a:lnSpc>
+              <a:buNone/>
+            </a:pPr>
+            <a:r>
+              <a:rPr lang="en-US" sz="1050" b="1" dirty="0">
+                <a:solidFill>
+                  <a:srgbClr val="1A2733"/>
+                </a:solidFill>
+                <a:latin typeface="Calibri" pitchFamily="34" charset="0"/>
+                <a:ea typeface="Calibri" pitchFamily="34" charset="-122"/>
+                <a:cs typeface="Calibri" pitchFamily="34" charset="-120"/>
+              </a:rPr>
+              <a:t>Готовность</a:t>
+            </a:r>
+            <a:endParaRPr lang="en-US" sz="1050" dirty="0"/>
+          </a:p>
+          <a:p>
+            <a:pPr algn="ctr" indent="0" marL="0">
+              <a:lnSpc>
+                <a:spcPct val="105000"/>
+              </a:lnSpc>
+              <a:buNone/>
+            </a:pPr>
+            <a:r>
+              <a:rPr lang="en-US" sz="1050" b="1" dirty="0">
+                <a:solidFill>
+                  <a:srgbClr val="1A2733"/>
+                </a:solidFill>
+                <a:latin typeface="Calibri" pitchFamily="34" charset="0"/>
+                <a:ea typeface="Calibri" pitchFamily="34" charset="-122"/>
+                <a:cs typeface="Calibri" pitchFamily="34" charset="-120"/>
+              </a:rPr>
+              <a:t>интеграции</a:t>
+            </a:r>
+            <a:endParaRPr lang="en-US" sz="1050" dirty="0"/>
+          </a:p>
+        </p:txBody>
+      </p:sp>
+      <p:sp>
+        <p:nvSpPr>
+          <p:cNvPr id="21" name="Text 19"/>
+          <p:cNvSpPr txBox="1"/>
+          <p:nvPr/>
+        </p:nvSpPr>
+        <p:spPr>
+          <a:xfrm>
+            <a:off x="3026664" y="3099816"/>
+            <a:ext cx="1024128" cy="274320"/>
+          </a:xfrm>
+          <a:prstGeom prst="rect">
+            <a:avLst/>
+          </a:prstGeom>
+          <a:noFill/>
+          <a:ln/>
+        </p:spPr>
+        <p:txBody>
+          <a:bodyPr wrap="square" lIns="0" tIns="0" rIns="0" bIns="0" rtlCol="0" anchor="ctr"/>
+          <a:lstStyle/>
+          <a:p>
+            <a:pPr algn="ctr" indent="0" marL="0">
+              <a:buNone/>
+            </a:pPr>
+            <a:r>
+              <a:rPr lang="en-US" sz="1000" b="1" dirty="0">
+                <a:solidFill>
+                  <a:srgbClr val="C97A1A"/>
+                </a:solidFill>
+                <a:latin typeface="Calibri" pitchFamily="34" charset="0"/>
+                <a:ea typeface="Calibri" pitchFamily="34" charset="-122"/>
+                <a:cs typeface="Calibri" pitchFamily="34" charset="-120"/>
+              </a:rPr>
+              <a:t>Р</a:t>
+            </a:r>
+            <a:endParaRPr lang="en-US" sz="1000" dirty="0"/>
+          </a:p>
+        </p:txBody>
+      </p:sp>
+      <p:sp>
+        <p:nvSpPr>
+          <p:cNvPr id="22" name="Shape 20"/>
+          <p:cNvSpPr/>
+          <p:nvPr/>
+        </p:nvSpPr>
+        <p:spPr>
+          <a:xfrm>
+            <a:off x="4110228" y="2569464"/>
+            <a:ext cx="91440" cy="164592"/>
+          </a:xfrm>
+          <a:prstGeom prst="chevron">
+            <a:avLst/>
+          </a:prstGeom>
+          <a:solidFill>
+            <a:srgbClr val="8C99A6"/>
+          </a:solidFill>
+          <a:ln/>
+        </p:spPr>
+      </p:sp>
+      <p:sp>
+        <p:nvSpPr>
+          <p:cNvPr id="23" name="Shape 21"/>
+          <p:cNvSpPr/>
+          <p:nvPr/>
+        </p:nvSpPr>
+        <p:spPr>
+          <a:xfrm>
+            <a:off x="4206240" y="1874520"/>
+            <a:ext cx="1133856" cy="1554480"/>
+          </a:xfrm>
+          <a:prstGeom prst="roundRect">
+            <a:avLst>
+              <a:gd name="adj" fmla="val 5645"/>
+            </a:avLst>
+          </a:prstGeom>
+          <a:solidFill>
+            <a:srgbClr val="F4F6F7"/>
+          </a:solidFill>
+          <a:ln w="15875">
+            <a:solidFill>
+              <a:srgbClr val="5B6B7A"/>
+            </a:solidFill>
+            <a:prstDash val="solid"/>
+          </a:ln>
+        </p:spPr>
+      </p:sp>
+      <p:sp>
+        <p:nvSpPr>
+          <p:cNvPr id="24" name="Shape 22"/>
+          <p:cNvSpPr/>
+          <p:nvPr/>
+        </p:nvSpPr>
+        <p:spPr>
+          <a:xfrm>
+            <a:off x="4572000" y="2020824"/>
+            <a:ext cx="402336" cy="402336"/>
+          </a:xfrm>
+          <a:prstGeom prst="ellipse">
+            <a:avLst/>
+          </a:prstGeom>
+          <a:solidFill>
+            <a:srgbClr val="5B6B7A"/>
+          </a:solidFill>
+          <a:ln/>
+        </p:spPr>
+      </p:sp>
+      <p:sp>
+        <p:nvSpPr>
+          <p:cNvPr id="25" name="Text 23"/>
+          <p:cNvSpPr txBox="1"/>
+          <p:nvPr/>
+        </p:nvSpPr>
+        <p:spPr>
+          <a:xfrm>
+            <a:off x="4572000" y="2020824"/>
+            <a:ext cx="402336" cy="402336"/>
+          </a:xfrm>
+          <a:prstGeom prst="rect">
+            <a:avLst/>
+          </a:prstGeom>
+          <a:noFill/>
+          <a:ln/>
+        </p:spPr>
+        <p:txBody>
+          <a:bodyPr wrap="square" lIns="0" tIns="0" rIns="0" bIns="0" rtlCol="0" anchor="ctr"/>
+          <a:lstStyle/>
+          <a:p>
+            <a:pPr algn="ctr" indent="0" marL="0">
+              <a:buNone/>
+            </a:pPr>
+            <a:r>
+              <a:rPr lang="en-US" sz="1600" b="1" dirty="0">
+                <a:solidFill>
+                  <a:srgbClr val="FFFFFF"/>
+                </a:solidFill>
+                <a:latin typeface="Cambria" pitchFamily="34" charset="0"/>
+                <a:ea typeface="Cambria" pitchFamily="34" charset="-122"/>
+                <a:cs typeface="Cambria" pitchFamily="34" charset="-120"/>
+              </a:rPr>
+              <a:t>3</a:t>
+            </a:r>
+            <a:endParaRPr lang="en-US" sz="1600" dirty="0"/>
+          </a:p>
+        </p:txBody>
+      </p:sp>
+      <p:sp>
+        <p:nvSpPr>
+          <p:cNvPr id="26" name="Text 24"/>
+          <p:cNvSpPr txBox="1"/>
+          <p:nvPr/>
+        </p:nvSpPr>
+        <p:spPr>
+          <a:xfrm>
+            <a:off x="4261104" y="2496312"/>
+            <a:ext cx="1024128" cy="685800"/>
+          </a:xfrm>
+          <a:prstGeom prst="rect">
+            <a:avLst/>
+          </a:prstGeom>
+          <a:noFill/>
+          <a:ln/>
+        </p:spPr>
+        <p:txBody>
+          <a:bodyPr wrap="square" lIns="0" tIns="0" rIns="0" bIns="0" rtlCol="0" anchor="ctr"/>
+          <a:lstStyle/>
+          <a:p>
+            <a:pPr algn="ctr" indent="0" marL="0">
+              <a:lnSpc>
+                <a:spcPct val="105000"/>
+              </a:lnSpc>
+              <a:buNone/>
+            </a:pPr>
+            <a:r>
+              <a:rPr lang="en-US" sz="1050" b="1" dirty="0">
+                <a:solidFill>
+                  <a:srgbClr val="1A2733"/>
+                </a:solidFill>
+                <a:latin typeface="Calibri" pitchFamily="34" charset="0"/>
+                <a:ea typeface="Calibri" pitchFamily="34" charset="-122"/>
+                <a:cs typeface="Calibri" pitchFamily="34" charset="-120"/>
+              </a:rPr>
+              <a:t>Проекти-</a:t>
+            </a:r>
+            <a:endParaRPr lang="en-US" sz="1050" dirty="0"/>
+          </a:p>
+          <a:p>
+            <a:pPr algn="ctr" indent="0" marL="0">
+              <a:lnSpc>
+                <a:spcPct val="105000"/>
+              </a:lnSpc>
+              <a:buNone/>
+            </a:pPr>
+            <a:r>
+              <a:rPr lang="en-US" sz="1050" b="1" dirty="0">
+                <a:solidFill>
+                  <a:srgbClr val="1A2733"/>
+                </a:solidFill>
+                <a:latin typeface="Calibri" pitchFamily="34" charset="0"/>
+                <a:ea typeface="Calibri" pitchFamily="34" charset="-122"/>
+                <a:cs typeface="Calibri" pitchFamily="34" charset="-120"/>
+              </a:rPr>
+              <a:t>рование теста</a:t>
+            </a:r>
+            <a:endParaRPr lang="en-US" sz="1050" dirty="0"/>
+          </a:p>
+        </p:txBody>
+      </p:sp>
+      <p:sp>
+        <p:nvSpPr>
+          <p:cNvPr id="27" name="Text 25"/>
+          <p:cNvSpPr txBox="1"/>
+          <p:nvPr/>
+        </p:nvSpPr>
+        <p:spPr>
+          <a:xfrm>
+            <a:off x="4261104" y="3099816"/>
+            <a:ext cx="1024128" cy="274320"/>
+          </a:xfrm>
+          <a:prstGeom prst="rect">
+            <a:avLst/>
+          </a:prstGeom>
+          <a:noFill/>
+          <a:ln/>
+        </p:spPr>
+        <p:txBody>
+          <a:bodyPr wrap="square" lIns="0" tIns="0" rIns="0" bIns="0" rtlCol="0" anchor="ctr"/>
+          <a:lstStyle/>
+          <a:p>
+            <a:pPr algn="ctr" indent="0" marL="0">
+              <a:buNone/>
+            </a:pPr>
+            <a:r>
+              <a:rPr lang="en-US" sz="1000" b="1" dirty="0">
+                <a:solidFill>
+                  <a:srgbClr val="5B6B7A"/>
+                </a:solidFill>
+                <a:latin typeface="Calibri" pitchFamily="34" charset="0"/>
+                <a:ea typeface="Calibri" pitchFamily="34" charset="-122"/>
+                <a:cs typeface="Calibri" pitchFamily="34" charset="-120"/>
+              </a:rPr>
+              <a:t>АР</a:t>
+            </a:r>
+            <a:endParaRPr lang="en-US" sz="1000" dirty="0"/>
+          </a:p>
+        </p:txBody>
+      </p:sp>
+      <p:sp>
+        <p:nvSpPr>
+          <p:cNvPr id="28" name="Shape 26"/>
+          <p:cNvSpPr/>
+          <p:nvPr/>
+        </p:nvSpPr>
+        <p:spPr>
+          <a:xfrm>
+            <a:off x="5344668" y="2569464"/>
+            <a:ext cx="91440" cy="164592"/>
+          </a:xfrm>
+          <a:prstGeom prst="chevron">
+            <a:avLst/>
+          </a:prstGeom>
+          <a:solidFill>
+            <a:srgbClr val="8C99A6"/>
+          </a:solidFill>
+          <a:ln/>
+        </p:spPr>
+      </p:sp>
+      <p:sp>
+        <p:nvSpPr>
+          <p:cNvPr id="29" name="Shape 27"/>
+          <p:cNvSpPr/>
+          <p:nvPr/>
+        </p:nvSpPr>
+        <p:spPr>
+          <a:xfrm>
+            <a:off x="5440680" y="1874520"/>
+            <a:ext cx="1133856" cy="1554480"/>
+          </a:xfrm>
+          <a:prstGeom prst="roundRect">
+            <a:avLst>
+              <a:gd name="adj" fmla="val 5645"/>
+            </a:avLst>
+          </a:prstGeom>
+          <a:solidFill>
+            <a:srgbClr val="F4F6F7"/>
+          </a:solidFill>
+          <a:ln w="15875">
+            <a:solidFill>
+              <a:srgbClr val="0A5F67"/>
+            </a:solidFill>
+            <a:prstDash val="solid"/>
+          </a:ln>
+        </p:spPr>
+      </p:sp>
+      <p:sp>
+        <p:nvSpPr>
+          <p:cNvPr id="30" name="Shape 28"/>
+          <p:cNvSpPr/>
+          <p:nvPr/>
+        </p:nvSpPr>
+        <p:spPr>
+          <a:xfrm>
+            <a:off x="5806440" y="2020824"/>
+            <a:ext cx="402336" cy="402336"/>
+          </a:xfrm>
+          <a:prstGeom prst="ellipse">
+            <a:avLst/>
+          </a:prstGeom>
+          <a:solidFill>
+            <a:srgbClr val="0A5F67"/>
+          </a:solidFill>
+          <a:ln/>
+        </p:spPr>
+      </p:sp>
+      <p:sp>
+        <p:nvSpPr>
+          <p:cNvPr id="31" name="Text 29"/>
+          <p:cNvSpPr txBox="1"/>
+          <p:nvPr/>
+        </p:nvSpPr>
+        <p:spPr>
+          <a:xfrm>
+            <a:off x="5806440" y="2020824"/>
+            <a:ext cx="402336" cy="402336"/>
+          </a:xfrm>
+          <a:prstGeom prst="rect">
+            <a:avLst/>
+          </a:prstGeom>
+          <a:noFill/>
+          <a:ln/>
+        </p:spPr>
+        <p:txBody>
+          <a:bodyPr wrap="square" lIns="0" tIns="0" rIns="0" bIns="0" rtlCol="0" anchor="ctr"/>
+          <a:lstStyle/>
+          <a:p>
+            <a:pPr algn="ctr" indent="0" marL="0">
+              <a:buNone/>
+            </a:pPr>
+            <a:r>
+              <a:rPr lang="en-US" sz="1600" b="1" dirty="0">
+                <a:solidFill>
+                  <a:srgbClr val="FFFFFF"/>
+                </a:solidFill>
+                <a:latin typeface="Cambria" pitchFamily="34" charset="0"/>
+                <a:ea typeface="Cambria" pitchFamily="34" charset="-122"/>
+                <a:cs typeface="Cambria" pitchFamily="34" charset="-120"/>
+              </a:rPr>
+              <a:t>4</a:t>
+            </a:r>
+            <a:endParaRPr lang="en-US" sz="1600" dirty="0"/>
+          </a:p>
+        </p:txBody>
+      </p:sp>
+      <p:sp>
+        <p:nvSpPr>
+          <p:cNvPr id="32" name="Text 30"/>
+          <p:cNvSpPr txBox="1"/>
+          <p:nvPr/>
+        </p:nvSpPr>
+        <p:spPr>
+          <a:xfrm>
+            <a:off x="5495544" y="2496312"/>
+            <a:ext cx="1024128" cy="685800"/>
+          </a:xfrm>
+          <a:prstGeom prst="rect">
+            <a:avLst/>
+          </a:prstGeom>
+          <a:noFill/>
+          <a:ln/>
+        </p:spPr>
+        <p:txBody>
+          <a:bodyPr wrap="square" lIns="0" tIns="0" rIns="0" bIns="0" rtlCol="0" anchor="ctr"/>
+          <a:lstStyle/>
+          <a:p>
+            <a:pPr algn="ctr" indent="0" marL="0">
+              <a:lnSpc>
+                <a:spcPct val="105000"/>
+              </a:lnSpc>
+              <a:buNone/>
+            </a:pPr>
+            <a:r>
+              <a:rPr lang="en-US" sz="1050" b="1" dirty="0">
+                <a:solidFill>
+                  <a:srgbClr val="1A2733"/>
+                </a:solidFill>
+                <a:latin typeface="Calibri" pitchFamily="34" charset="0"/>
+                <a:ea typeface="Calibri" pitchFamily="34" charset="-122"/>
+                <a:cs typeface="Calibri" pitchFamily="34" charset="-120"/>
+              </a:rPr>
+              <a:t>Исполнение</a:t>
+            </a:r>
+            <a:endParaRPr lang="en-US" sz="1050" dirty="0"/>
+          </a:p>
+        </p:txBody>
+      </p:sp>
+      <p:sp>
+        <p:nvSpPr>
+          <p:cNvPr id="33" name="Text 31"/>
+          <p:cNvSpPr txBox="1"/>
+          <p:nvPr/>
+        </p:nvSpPr>
+        <p:spPr>
+          <a:xfrm>
+            <a:off x="5495544" y="3099816"/>
+            <a:ext cx="1024128" cy="274320"/>
+          </a:xfrm>
+          <a:prstGeom prst="rect">
+            <a:avLst/>
+          </a:prstGeom>
+          <a:noFill/>
+          <a:ln/>
+        </p:spPr>
+        <p:txBody>
+          <a:bodyPr wrap="square" lIns="0" tIns="0" rIns="0" bIns="0" rtlCol="0" anchor="ctr"/>
+          <a:lstStyle/>
+          <a:p>
+            <a:pPr algn="ctr" indent="0" marL="0">
+              <a:buNone/>
+            </a:pPr>
+            <a:r>
+              <a:rPr lang="en-US" sz="1000" b="1" dirty="0">
+                <a:solidFill>
+                  <a:srgbClr val="0A5F67"/>
+                </a:solidFill>
+                <a:latin typeface="Calibri" pitchFamily="34" charset="0"/>
+                <a:ea typeface="Calibri" pitchFamily="34" charset="-122"/>
+                <a:cs typeface="Calibri" pitchFamily="34" charset="-120"/>
+              </a:rPr>
+              <a:t>А</a:t>
+            </a:r>
+            <a:endParaRPr lang="en-US" sz="1000" dirty="0"/>
+          </a:p>
+        </p:txBody>
+      </p:sp>
+      <p:sp>
+        <p:nvSpPr>
+          <p:cNvPr id="34" name="Shape 32"/>
+          <p:cNvSpPr/>
+          <p:nvPr/>
+        </p:nvSpPr>
+        <p:spPr>
+          <a:xfrm>
+            <a:off x="6579108" y="2569464"/>
+            <a:ext cx="91440" cy="164592"/>
+          </a:xfrm>
+          <a:prstGeom prst="chevron">
+            <a:avLst/>
+          </a:prstGeom>
+          <a:solidFill>
+            <a:srgbClr val="8C99A6"/>
+          </a:solidFill>
+          <a:ln/>
+        </p:spPr>
+      </p:sp>
+      <p:sp>
+        <p:nvSpPr>
+          <p:cNvPr id="35" name="Shape 33"/>
+          <p:cNvSpPr/>
+          <p:nvPr/>
+        </p:nvSpPr>
+        <p:spPr>
+          <a:xfrm>
+            <a:off x="6675120" y="1874520"/>
+            <a:ext cx="1133856" cy="1554480"/>
+          </a:xfrm>
+          <a:prstGeom prst="roundRect">
+            <a:avLst>
+              <a:gd name="adj" fmla="val 5645"/>
+            </a:avLst>
+          </a:prstGeom>
+          <a:solidFill>
+            <a:srgbClr val="F4F6F7"/>
+          </a:solidFill>
+          <a:ln w="15875">
+            <a:solidFill>
+              <a:srgbClr val="5B6B7A"/>
+            </a:solidFill>
+            <a:prstDash val="solid"/>
+          </a:ln>
+        </p:spPr>
+      </p:sp>
+      <p:sp>
+        <p:nvSpPr>
+          <p:cNvPr id="36" name="Shape 34"/>
+          <p:cNvSpPr/>
+          <p:nvPr/>
+        </p:nvSpPr>
+        <p:spPr>
+          <a:xfrm>
+            <a:off x="7040880" y="2020824"/>
+            <a:ext cx="402336" cy="402336"/>
+          </a:xfrm>
+          <a:prstGeom prst="ellipse">
+            <a:avLst/>
+          </a:prstGeom>
+          <a:solidFill>
+            <a:srgbClr val="5B6B7A"/>
+          </a:solidFill>
+          <a:ln/>
+        </p:spPr>
+      </p:sp>
+      <p:sp>
+        <p:nvSpPr>
+          <p:cNvPr id="37" name="Text 35"/>
+          <p:cNvSpPr txBox="1"/>
+          <p:nvPr/>
+        </p:nvSpPr>
+        <p:spPr>
+          <a:xfrm>
+            <a:off x="7040880" y="2020824"/>
+            <a:ext cx="402336" cy="402336"/>
+          </a:xfrm>
+          <a:prstGeom prst="rect">
+            <a:avLst/>
+          </a:prstGeom>
+          <a:noFill/>
+          <a:ln/>
+        </p:spPr>
+        <p:txBody>
+          <a:bodyPr wrap="square" lIns="0" tIns="0" rIns="0" bIns="0" rtlCol="0" anchor="ctr"/>
+          <a:lstStyle/>
+          <a:p>
+            <a:pPr algn="ctr" indent="0" marL="0">
+              <a:buNone/>
+            </a:pPr>
+            <a:r>
+              <a:rPr lang="en-US" sz="1600" b="1" dirty="0">
+                <a:solidFill>
+                  <a:srgbClr val="FFFFFF"/>
+                </a:solidFill>
+                <a:latin typeface="Cambria" pitchFamily="34" charset="0"/>
+                <a:ea typeface="Cambria" pitchFamily="34" charset="-122"/>
+                <a:cs typeface="Cambria" pitchFamily="34" charset="-120"/>
+              </a:rPr>
+              <a:t>5</a:t>
+            </a:r>
+            <a:endParaRPr lang="en-US" sz="1600" dirty="0"/>
+          </a:p>
+        </p:txBody>
+      </p:sp>
+      <p:sp>
+        <p:nvSpPr>
+          <p:cNvPr id="38" name="Text 36"/>
+          <p:cNvSpPr txBox="1"/>
+          <p:nvPr/>
+        </p:nvSpPr>
+        <p:spPr>
+          <a:xfrm>
+            <a:off x="6729984" y="2496312"/>
+            <a:ext cx="1024128" cy="685800"/>
+          </a:xfrm>
+          <a:prstGeom prst="rect">
+            <a:avLst/>
+          </a:prstGeom>
+          <a:noFill/>
+          <a:ln/>
+        </p:spPr>
+        <p:txBody>
+          <a:bodyPr wrap="square" lIns="0" tIns="0" rIns="0" bIns="0" rtlCol="0" anchor="ctr"/>
+          <a:lstStyle/>
+          <a:p>
+            <a:pPr algn="ctr" indent="0" marL="0">
+              <a:lnSpc>
+                <a:spcPct val="105000"/>
+              </a:lnSpc>
+              <a:buNone/>
+            </a:pPr>
+            <a:r>
+              <a:rPr lang="en-US" sz="1050" b="1" dirty="0">
+                <a:solidFill>
+                  <a:srgbClr val="1A2733"/>
+                </a:solidFill>
+                <a:latin typeface="Calibri" pitchFamily="34" charset="0"/>
+                <a:ea typeface="Calibri" pitchFamily="34" charset="-122"/>
+                <a:cs typeface="Calibri" pitchFamily="34" charset="-120"/>
+              </a:rPr>
+              <a:t>Разбор</a:t>
+            </a:r>
+            <a:endParaRPr lang="en-US" sz="1050" dirty="0"/>
+          </a:p>
+          <a:p>
+            <a:pPr algn="ctr" indent="0" marL="0">
+              <a:lnSpc>
+                <a:spcPct val="105000"/>
+              </a:lnSpc>
+              <a:buNone/>
+            </a:pPr>
+            <a:r>
+              <a:rPr lang="en-US" sz="1050" b="1" dirty="0">
+                <a:solidFill>
+                  <a:srgbClr val="1A2733"/>
+                </a:solidFill>
+                <a:latin typeface="Calibri" pitchFamily="34" charset="0"/>
+                <a:ea typeface="Calibri" pitchFamily="34" charset="-122"/>
+                <a:cs typeface="Calibri" pitchFamily="34" charset="-120"/>
+              </a:rPr>
+              <a:t>находок</a:t>
+            </a:r>
+            <a:endParaRPr lang="en-US" sz="1050" dirty="0"/>
+          </a:p>
+        </p:txBody>
+      </p:sp>
+      <p:sp>
+        <p:nvSpPr>
+          <p:cNvPr id="39" name="Text 37"/>
+          <p:cNvSpPr txBox="1"/>
+          <p:nvPr/>
+        </p:nvSpPr>
+        <p:spPr>
+          <a:xfrm>
+            <a:off x="6729984" y="3099816"/>
+            <a:ext cx="1024128" cy="274320"/>
+          </a:xfrm>
+          <a:prstGeom prst="rect">
+            <a:avLst/>
+          </a:prstGeom>
+          <a:noFill/>
+          <a:ln/>
+        </p:spPr>
+        <p:txBody>
+          <a:bodyPr wrap="square" lIns="0" tIns="0" rIns="0" bIns="0" rtlCol="0" anchor="ctr"/>
+          <a:lstStyle/>
+          <a:p>
+            <a:pPr algn="ctr" indent="0" marL="0">
+              <a:buNone/>
+            </a:pPr>
+            <a:r>
+              <a:rPr lang="en-US" sz="1000" b="1" dirty="0">
+                <a:solidFill>
+                  <a:srgbClr val="5B6B7A"/>
+                </a:solidFill>
+                <a:latin typeface="Calibri" pitchFamily="34" charset="0"/>
+                <a:ea typeface="Calibri" pitchFamily="34" charset="-122"/>
+                <a:cs typeface="Calibri" pitchFamily="34" charset="-120"/>
+              </a:rPr>
+              <a:t>АР</a:t>
+            </a:r>
+            <a:endParaRPr lang="en-US" sz="1000" dirty="0"/>
+          </a:p>
+        </p:txBody>
+      </p:sp>
+      <p:sp>
+        <p:nvSpPr>
+          <p:cNvPr id="40" name="Shape 38"/>
+          <p:cNvSpPr/>
+          <p:nvPr/>
+        </p:nvSpPr>
+        <p:spPr>
+          <a:xfrm>
+            <a:off x="7813548" y="2569464"/>
+            <a:ext cx="91440" cy="164592"/>
+          </a:xfrm>
+          <a:prstGeom prst="chevron">
+            <a:avLst/>
+          </a:prstGeom>
+          <a:solidFill>
+            <a:srgbClr val="8C99A6"/>
+          </a:solidFill>
+          <a:ln/>
+        </p:spPr>
+      </p:sp>
+      <p:sp>
+        <p:nvSpPr>
+          <p:cNvPr id="41" name="Shape 39"/>
+          <p:cNvSpPr/>
+          <p:nvPr/>
+        </p:nvSpPr>
+        <p:spPr>
+          <a:xfrm>
+            <a:off x="7909560" y="1874520"/>
+            <a:ext cx="1133856" cy="1554480"/>
+          </a:xfrm>
+          <a:prstGeom prst="roundRect">
+            <a:avLst>
+              <a:gd name="adj" fmla="val 5645"/>
+            </a:avLst>
+          </a:prstGeom>
+          <a:solidFill>
+            <a:srgbClr val="F4F6F7"/>
+          </a:solidFill>
+          <a:ln w="15875">
+            <a:solidFill>
+              <a:srgbClr val="5B6B7A"/>
+            </a:solidFill>
+            <a:prstDash val="solid"/>
+          </a:ln>
+        </p:spPr>
+      </p:sp>
+      <p:sp>
+        <p:nvSpPr>
+          <p:cNvPr id="42" name="Shape 40"/>
+          <p:cNvSpPr/>
+          <p:nvPr/>
+        </p:nvSpPr>
+        <p:spPr>
+          <a:xfrm>
+            <a:off x="8275320" y="2020824"/>
+            <a:ext cx="402336" cy="402336"/>
+          </a:xfrm>
+          <a:prstGeom prst="ellipse">
+            <a:avLst/>
+          </a:prstGeom>
+          <a:solidFill>
+            <a:srgbClr val="5B6B7A"/>
+          </a:solidFill>
+          <a:ln/>
+        </p:spPr>
+      </p:sp>
+      <p:sp>
+        <p:nvSpPr>
+          <p:cNvPr id="43" name="Text 41"/>
+          <p:cNvSpPr txBox="1"/>
+          <p:nvPr/>
+        </p:nvSpPr>
+        <p:spPr>
+          <a:xfrm>
+            <a:off x="8275320" y="2020824"/>
+            <a:ext cx="402336" cy="402336"/>
+          </a:xfrm>
+          <a:prstGeom prst="rect">
+            <a:avLst/>
+          </a:prstGeom>
+          <a:noFill/>
+          <a:ln/>
+        </p:spPr>
+        <p:txBody>
+          <a:bodyPr wrap="square" lIns="0" tIns="0" rIns="0" bIns="0" rtlCol="0" anchor="ctr"/>
+          <a:lstStyle/>
+          <a:p>
+            <a:pPr algn="ctr" indent="0" marL="0">
+              <a:buNone/>
+            </a:pPr>
+            <a:r>
+              <a:rPr lang="en-US" sz="1600" b="1" dirty="0">
+                <a:solidFill>
+                  <a:srgbClr val="FFFFFF"/>
+                </a:solidFill>
+                <a:latin typeface="Cambria" pitchFamily="34" charset="0"/>
+                <a:ea typeface="Cambria" pitchFamily="34" charset="-122"/>
+                <a:cs typeface="Cambria" pitchFamily="34" charset="-120"/>
+              </a:rPr>
+              <a:t>6</a:t>
+            </a:r>
+            <a:endParaRPr lang="en-US" sz="1600" dirty="0"/>
+          </a:p>
+        </p:txBody>
+      </p:sp>
+      <p:sp>
+        <p:nvSpPr>
+          <p:cNvPr id="44" name="Text 42"/>
+          <p:cNvSpPr txBox="1"/>
+          <p:nvPr/>
+        </p:nvSpPr>
+        <p:spPr>
+          <a:xfrm>
+            <a:off x="7964424" y="2496312"/>
+            <a:ext cx="1024128" cy="685800"/>
+          </a:xfrm>
+          <a:prstGeom prst="rect">
+            <a:avLst/>
+          </a:prstGeom>
+          <a:noFill/>
+          <a:ln/>
+        </p:spPr>
+        <p:txBody>
+          <a:bodyPr wrap="square" lIns="0" tIns="0" rIns="0" bIns="0" rtlCol="0" anchor="ctr"/>
+          <a:lstStyle/>
+          <a:p>
+            <a:pPr algn="ctr" indent="0" marL="0">
+              <a:lnSpc>
+                <a:spcPct val="105000"/>
+              </a:lnSpc>
+              <a:buNone/>
+            </a:pPr>
+            <a:r>
+              <a:rPr lang="en-US" sz="1050" b="1" dirty="0">
+                <a:solidFill>
+                  <a:srgbClr val="1A2733"/>
+                </a:solidFill>
+                <a:latin typeface="Calibri" pitchFamily="34" charset="0"/>
+                <a:ea typeface="Calibri" pitchFamily="34" charset="-122"/>
+                <a:cs typeface="Calibri" pitchFamily="34" charset="-120"/>
+              </a:rPr>
+              <a:t>Проверка</a:t>
+            </a:r>
+            <a:endParaRPr lang="en-US" sz="1050" dirty="0"/>
+          </a:p>
+          <a:p>
+            <a:pPr algn="ctr" indent="0" marL="0">
+              <a:lnSpc>
+                <a:spcPct val="105000"/>
+              </a:lnSpc>
+              <a:buNone/>
+            </a:pPr>
+            <a:r>
+              <a:rPr lang="en-US" sz="1050" b="1" dirty="0">
+                <a:solidFill>
+                  <a:srgbClr val="1A2733"/>
+                </a:solidFill>
+                <a:latin typeface="Calibri" pitchFamily="34" charset="0"/>
+                <a:ea typeface="Calibri" pitchFamily="34" charset="-122"/>
+                <a:cs typeface="Calibri" pitchFamily="34" charset="-120"/>
+              </a:rPr>
+              <a:t>фиксов</a:t>
+            </a:r>
+            <a:endParaRPr lang="en-US" sz="1050" dirty="0"/>
+          </a:p>
+        </p:txBody>
+      </p:sp>
+      <p:sp>
+        <p:nvSpPr>
+          <p:cNvPr id="45" name="Text 43"/>
+          <p:cNvSpPr txBox="1"/>
+          <p:nvPr/>
+        </p:nvSpPr>
+        <p:spPr>
+          <a:xfrm>
+            <a:off x="7964424" y="3099816"/>
+            <a:ext cx="1024128" cy="274320"/>
+          </a:xfrm>
+          <a:prstGeom prst="rect">
+            <a:avLst/>
+          </a:prstGeom>
+          <a:noFill/>
+          <a:ln/>
+        </p:spPr>
+        <p:txBody>
+          <a:bodyPr wrap="square" lIns="0" tIns="0" rIns="0" bIns="0" rtlCol="0" anchor="ctr"/>
+          <a:lstStyle/>
+          <a:p>
+            <a:pPr algn="ctr" indent="0" marL="0">
+              <a:buNone/>
+            </a:pPr>
+            <a:r>
+              <a:rPr lang="en-US" sz="1000" b="1" dirty="0">
+                <a:solidFill>
+                  <a:srgbClr val="5B6B7A"/>
+                </a:solidFill>
+                <a:latin typeface="Calibri" pitchFamily="34" charset="0"/>
+                <a:ea typeface="Calibri" pitchFamily="34" charset="-122"/>
+                <a:cs typeface="Calibri" pitchFamily="34" charset="-120"/>
+              </a:rPr>
+              <a:t>АР</a:t>
+            </a:r>
+            <a:endParaRPr lang="en-US" sz="1000" dirty="0"/>
+          </a:p>
+        </p:txBody>
+      </p:sp>
+      <p:sp>
+        <p:nvSpPr>
+          <p:cNvPr id="46" name="Shape 44"/>
+          <p:cNvSpPr/>
+          <p:nvPr/>
+        </p:nvSpPr>
+        <p:spPr>
+          <a:xfrm>
+            <a:off x="9047988" y="2569464"/>
+            <a:ext cx="91440" cy="164592"/>
+          </a:xfrm>
+          <a:prstGeom prst="chevron">
+            <a:avLst/>
+          </a:prstGeom>
+          <a:solidFill>
+            <a:srgbClr val="8C99A6"/>
+          </a:solidFill>
+          <a:ln/>
+        </p:spPr>
+      </p:sp>
+      <p:sp>
+        <p:nvSpPr>
+          <p:cNvPr id="47" name="Shape 45"/>
+          <p:cNvSpPr/>
+          <p:nvPr/>
+        </p:nvSpPr>
+        <p:spPr>
+          <a:xfrm>
+            <a:off x="9144000" y="1874520"/>
+            <a:ext cx="1133856" cy="1554480"/>
+          </a:xfrm>
+          <a:prstGeom prst="roundRect">
+            <a:avLst>
+              <a:gd name="adj" fmla="val 5645"/>
+            </a:avLst>
+          </a:prstGeom>
+          <a:solidFill>
+            <a:srgbClr val="F4F6F7"/>
+          </a:solidFill>
+          <a:ln w="15875">
+            <a:solidFill>
+              <a:srgbClr val="0A5F67"/>
+            </a:solidFill>
+            <a:prstDash val="solid"/>
+          </a:ln>
+        </p:spPr>
+      </p:sp>
+      <p:sp>
+        <p:nvSpPr>
+          <p:cNvPr id="48" name="Shape 46"/>
+          <p:cNvSpPr/>
+          <p:nvPr/>
+        </p:nvSpPr>
+        <p:spPr>
+          <a:xfrm>
+            <a:off x="9509760" y="2020824"/>
+            <a:ext cx="402336" cy="402336"/>
+          </a:xfrm>
+          <a:prstGeom prst="ellipse">
+            <a:avLst/>
+          </a:prstGeom>
+          <a:solidFill>
+            <a:srgbClr val="0A5F67"/>
+          </a:solidFill>
+          <a:ln/>
+        </p:spPr>
+      </p:sp>
+      <p:sp>
+        <p:nvSpPr>
+          <p:cNvPr id="49" name="Text 47"/>
+          <p:cNvSpPr txBox="1"/>
+          <p:nvPr/>
+        </p:nvSpPr>
+        <p:spPr>
+          <a:xfrm>
+            <a:off x="9509760" y="2020824"/>
+            <a:ext cx="402336" cy="402336"/>
+          </a:xfrm>
+          <a:prstGeom prst="rect">
+            <a:avLst/>
+          </a:prstGeom>
+          <a:noFill/>
+          <a:ln/>
+        </p:spPr>
+        <p:txBody>
+          <a:bodyPr wrap="square" lIns="0" tIns="0" rIns="0" bIns="0" rtlCol="0" anchor="ctr"/>
+          <a:lstStyle/>
+          <a:p>
+            <a:pPr algn="ctr" indent="0" marL="0">
+              <a:buNone/>
+            </a:pPr>
+            <a:r>
+              <a:rPr lang="en-US" sz="1600" b="1" dirty="0">
+                <a:solidFill>
+                  <a:srgbClr val="FFFFFF"/>
+                </a:solidFill>
+                <a:latin typeface="Cambria" pitchFamily="34" charset="0"/>
+                <a:ea typeface="Cambria" pitchFamily="34" charset="-122"/>
+                <a:cs typeface="Cambria" pitchFamily="34" charset="-120"/>
+              </a:rPr>
+              <a:t>7</a:t>
+            </a:r>
+            <a:endParaRPr lang="en-US" sz="1600" dirty="0"/>
+          </a:p>
+        </p:txBody>
+      </p:sp>
+      <p:sp>
+        <p:nvSpPr>
+          <p:cNvPr id="50" name="Text 48"/>
+          <p:cNvSpPr txBox="1"/>
+          <p:nvPr/>
+        </p:nvSpPr>
+        <p:spPr>
+          <a:xfrm>
+            <a:off x="9198864" y="2496312"/>
+            <a:ext cx="1024128" cy="685800"/>
+          </a:xfrm>
+          <a:prstGeom prst="rect">
+            <a:avLst/>
+          </a:prstGeom>
+          <a:noFill/>
+          <a:ln/>
+        </p:spPr>
+        <p:txBody>
+          <a:bodyPr wrap="square" lIns="0" tIns="0" rIns="0" bIns="0" rtlCol="0" anchor="ctr"/>
+          <a:lstStyle/>
+          <a:p>
+            <a:pPr algn="ctr" indent="0" marL="0">
+              <a:lnSpc>
+                <a:spcPct val="105000"/>
+              </a:lnSpc>
+              <a:buNone/>
+            </a:pPr>
+            <a:r>
+              <a:rPr lang="en-US" sz="1050" b="1" dirty="0">
+                <a:solidFill>
+                  <a:srgbClr val="1A2733"/>
+                </a:solidFill>
+                <a:latin typeface="Calibri" pitchFamily="34" charset="0"/>
+                <a:ea typeface="Calibri" pitchFamily="34" charset="-122"/>
+                <a:cs typeface="Calibri" pitchFamily="34" charset="-120"/>
+              </a:rPr>
+              <a:t>Оценка</a:t>
+            </a:r>
+            <a:endParaRPr lang="en-US" sz="1050" dirty="0"/>
+          </a:p>
+          <a:p>
+            <a:pPr algn="ctr" indent="0" marL="0">
+              <a:lnSpc>
+                <a:spcPct val="105000"/>
+              </a:lnSpc>
+              <a:buNone/>
+            </a:pPr>
+            <a:r>
+              <a:rPr lang="en-US" sz="1050" b="1" dirty="0">
+                <a:solidFill>
+                  <a:srgbClr val="1A2733"/>
+                </a:solidFill>
+                <a:latin typeface="Calibri" pitchFamily="34" charset="0"/>
+                <a:ea typeface="Calibri" pitchFamily="34" charset="-122"/>
+                <a:cs typeface="Calibri" pitchFamily="34" charset="-120"/>
+              </a:rPr>
+              <a:t>приёмки</a:t>
+            </a:r>
+            <a:endParaRPr lang="en-US" sz="1050" dirty="0"/>
+          </a:p>
+        </p:txBody>
+      </p:sp>
+      <p:sp>
+        <p:nvSpPr>
+          <p:cNvPr id="51" name="Text 49"/>
+          <p:cNvSpPr txBox="1"/>
+          <p:nvPr/>
+        </p:nvSpPr>
+        <p:spPr>
+          <a:xfrm>
+            <a:off x="9198864" y="3099816"/>
+            <a:ext cx="1024128" cy="274320"/>
+          </a:xfrm>
+          <a:prstGeom prst="rect">
+            <a:avLst/>
+          </a:prstGeom>
+          <a:noFill/>
+          <a:ln/>
+        </p:spPr>
+        <p:txBody>
+          <a:bodyPr wrap="square" lIns="0" tIns="0" rIns="0" bIns="0" rtlCol="0" anchor="ctr"/>
+          <a:lstStyle/>
+          <a:p>
+            <a:pPr algn="ctr" indent="0" marL="0">
+              <a:buNone/>
+            </a:pPr>
+            <a:r>
+              <a:rPr lang="en-US" sz="1000" b="1" dirty="0">
+                <a:solidFill>
+                  <a:srgbClr val="0A5F67"/>
+                </a:solidFill>
+                <a:latin typeface="Calibri" pitchFamily="34" charset="0"/>
+                <a:ea typeface="Calibri" pitchFamily="34" charset="-122"/>
+                <a:cs typeface="Calibri" pitchFamily="34" charset="-120"/>
+              </a:rPr>
+              <a:t>А</a:t>
+            </a:r>
+            <a:endParaRPr lang="en-US" sz="1000" dirty="0"/>
+          </a:p>
+        </p:txBody>
+      </p:sp>
+      <p:sp>
+        <p:nvSpPr>
+          <p:cNvPr id="52" name="Shape 50"/>
+          <p:cNvSpPr/>
+          <p:nvPr/>
+        </p:nvSpPr>
+        <p:spPr>
+          <a:xfrm>
+            <a:off x="10282428" y="2569464"/>
+            <a:ext cx="91440" cy="164592"/>
+          </a:xfrm>
+          <a:prstGeom prst="chevron">
+            <a:avLst/>
+          </a:prstGeom>
+          <a:solidFill>
+            <a:srgbClr val="8C99A6"/>
+          </a:solidFill>
+          <a:ln/>
+        </p:spPr>
+      </p:sp>
+      <p:sp>
+        <p:nvSpPr>
+          <p:cNvPr id="53" name="Shape 51"/>
+          <p:cNvSpPr/>
+          <p:nvPr/>
+        </p:nvSpPr>
+        <p:spPr>
+          <a:xfrm>
+            <a:off x="10378440" y="1874520"/>
+            <a:ext cx="1133856" cy="1554480"/>
+          </a:xfrm>
+          <a:prstGeom prst="roundRect">
+            <a:avLst>
+              <a:gd name="adj" fmla="val 5645"/>
+            </a:avLst>
+          </a:prstGeom>
+          <a:solidFill>
+            <a:srgbClr val="F4F6F7"/>
+          </a:solidFill>
+          <a:ln w="15875">
+            <a:solidFill>
+              <a:srgbClr val="5B6B7A"/>
+            </a:solidFill>
+            <a:prstDash val="solid"/>
+          </a:ln>
+        </p:spPr>
+      </p:sp>
+      <p:sp>
+        <p:nvSpPr>
+          <p:cNvPr id="54" name="Shape 52"/>
+          <p:cNvSpPr/>
+          <p:nvPr/>
+        </p:nvSpPr>
+        <p:spPr>
+          <a:xfrm>
+            <a:off x="10744200" y="2020824"/>
+            <a:ext cx="402336" cy="402336"/>
+          </a:xfrm>
+          <a:prstGeom prst="ellipse">
+            <a:avLst/>
+          </a:prstGeom>
+          <a:solidFill>
+            <a:srgbClr val="5B6B7A"/>
+          </a:solidFill>
+          <a:ln/>
+        </p:spPr>
+      </p:sp>
+      <p:sp>
+        <p:nvSpPr>
+          <p:cNvPr id="55" name="Text 53"/>
+          <p:cNvSpPr txBox="1"/>
+          <p:nvPr/>
+        </p:nvSpPr>
+        <p:spPr>
+          <a:xfrm>
+            <a:off x="10744200" y="2020824"/>
+            <a:ext cx="402336" cy="402336"/>
+          </a:xfrm>
+          <a:prstGeom prst="rect">
+            <a:avLst/>
+          </a:prstGeom>
+          <a:noFill/>
+          <a:ln/>
+        </p:spPr>
+        <p:txBody>
+          <a:bodyPr wrap="square" lIns="0" tIns="0" rIns="0" bIns="0" rtlCol="0" anchor="ctr"/>
+          <a:lstStyle/>
+          <a:p>
+            <a:pPr algn="ctr" indent="0" marL="0">
+              <a:buNone/>
+            </a:pPr>
+            <a:r>
+              <a:rPr lang="en-US" sz="1600" b="1" dirty="0">
+                <a:solidFill>
+                  <a:srgbClr val="FFFFFF"/>
+                </a:solidFill>
+                <a:latin typeface="Cambria" pitchFamily="34" charset="0"/>
+                <a:ea typeface="Cambria" pitchFamily="34" charset="-122"/>
+                <a:cs typeface="Cambria" pitchFamily="34" charset="-120"/>
+              </a:rPr>
+              <a:t>8</a:t>
+            </a:r>
+            <a:endParaRPr lang="en-US" sz="1600" dirty="0"/>
+          </a:p>
+        </p:txBody>
+      </p:sp>
+      <p:sp>
+        <p:nvSpPr>
+          <p:cNvPr id="56" name="Text 54"/>
+          <p:cNvSpPr txBox="1"/>
+          <p:nvPr/>
+        </p:nvSpPr>
+        <p:spPr>
+          <a:xfrm>
+            <a:off x="10433304" y="2496312"/>
+            <a:ext cx="1024128" cy="685800"/>
+          </a:xfrm>
+          <a:prstGeom prst="rect">
+            <a:avLst/>
+          </a:prstGeom>
+          <a:noFill/>
+          <a:ln/>
+        </p:spPr>
+        <p:txBody>
+          <a:bodyPr wrap="square" lIns="0" tIns="0" rIns="0" bIns="0" rtlCol="0" anchor="ctr"/>
+          <a:lstStyle/>
+          <a:p>
+            <a:pPr algn="ctr" indent="0" marL="0">
+              <a:lnSpc>
+                <a:spcPct val="105000"/>
+              </a:lnSpc>
+              <a:buNone/>
+            </a:pPr>
+            <a:r>
+              <a:rPr lang="en-US" sz="1050" b="1" dirty="0">
+                <a:solidFill>
+                  <a:srgbClr val="1A2733"/>
+                </a:solidFill>
+                <a:latin typeface="Calibri" pitchFamily="34" charset="0"/>
+                <a:ea typeface="Calibri" pitchFamily="34" charset="-122"/>
+                <a:cs typeface="Calibri" pitchFamily="34" charset="-120"/>
+              </a:rPr>
+              <a:t>Закрытие /</a:t>
+            </a:r>
+            <a:endParaRPr lang="en-US" sz="1050" dirty="0"/>
+          </a:p>
+          <a:p>
+            <a:pPr algn="ctr" indent="0" marL="0">
+              <a:lnSpc>
+                <a:spcPct val="105000"/>
+              </a:lnSpc>
+              <a:buNone/>
+            </a:pPr>
+            <a:r>
+              <a:rPr lang="en-US" sz="1050" b="1" dirty="0">
+                <a:solidFill>
+                  <a:srgbClr val="1A2733"/>
+                </a:solidFill>
+                <a:latin typeface="Calibri" pitchFamily="34" charset="0"/>
+                <a:ea typeface="Calibri" pitchFamily="34" charset="-122"/>
+                <a:cs typeface="Calibri" pitchFamily="34" charset="-120"/>
+              </a:rPr>
+              <a:t>роадмап</a:t>
+            </a:r>
+            <a:endParaRPr lang="en-US" sz="1050" dirty="0"/>
+          </a:p>
+        </p:txBody>
+      </p:sp>
+      <p:sp>
+        <p:nvSpPr>
+          <p:cNvPr id="57" name="Text 55"/>
+          <p:cNvSpPr txBox="1"/>
+          <p:nvPr/>
+        </p:nvSpPr>
+        <p:spPr>
+          <a:xfrm>
+            <a:off x="10433304" y="3099816"/>
+            <a:ext cx="1024128" cy="274320"/>
+          </a:xfrm>
+          <a:prstGeom prst="rect">
+            <a:avLst/>
+          </a:prstGeom>
+          <a:noFill/>
+          <a:ln/>
+        </p:spPr>
+        <p:txBody>
+          <a:bodyPr wrap="square" lIns="0" tIns="0" rIns="0" bIns="0" rtlCol="0" anchor="ctr"/>
+          <a:lstStyle/>
+          <a:p>
+            <a:pPr algn="ctr" indent="0" marL="0">
+              <a:buNone/>
+            </a:pPr>
+            <a:r>
+              <a:rPr lang="en-US" sz="1000" b="1" dirty="0">
+                <a:solidFill>
+                  <a:srgbClr val="5B6B7A"/>
+                </a:solidFill>
+                <a:latin typeface="Calibri" pitchFamily="34" charset="0"/>
+                <a:ea typeface="Calibri" pitchFamily="34" charset="-122"/>
+                <a:cs typeface="Calibri" pitchFamily="34" charset="-120"/>
+              </a:rPr>
+              <a:t>АР</a:t>
+            </a:r>
+            <a:endParaRPr lang="en-US" sz="1000" dirty="0"/>
+          </a:p>
+        </p:txBody>
+      </p:sp>
+      <p:sp>
+        <p:nvSpPr>
+          <p:cNvPr id="58" name="Shape 56"/>
+          <p:cNvSpPr/>
+          <p:nvPr/>
+        </p:nvSpPr>
+        <p:spPr>
+          <a:xfrm>
+            <a:off x="502920" y="3749040"/>
+            <a:ext cx="182880" cy="182880"/>
+          </a:xfrm>
+          <a:prstGeom prst="ellipse">
+            <a:avLst/>
+          </a:prstGeom>
+          <a:solidFill>
+            <a:srgbClr val="0A5F67"/>
+          </a:solidFill>
+          <a:ln/>
+        </p:spPr>
+      </p:sp>
+      <p:sp>
+        <p:nvSpPr>
+          <p:cNvPr id="59" name="Text 57"/>
+          <p:cNvSpPr txBox="1"/>
+          <p:nvPr/>
+        </p:nvSpPr>
+        <p:spPr>
+          <a:xfrm>
+            <a:off x="758952" y="3694176"/>
+            <a:ext cx="1188720" cy="292608"/>
+          </a:xfrm>
+          <a:prstGeom prst="rect">
+            <a:avLst/>
+          </a:prstGeom>
+          <a:noFill/>
+          <a:ln/>
+        </p:spPr>
+        <p:txBody>
+          <a:bodyPr wrap="square" lIns="0" tIns="0" rIns="0" bIns="0" rtlCol="0" anchor="ctr"/>
+          <a:lstStyle/>
+          <a:p>
+            <a:pPr indent="0" marL="0">
+              <a:buNone/>
+            </a:pPr>
+            <a:r>
+              <a:rPr lang="en-US" sz="1050" dirty="0">
+                <a:solidFill>
+                  <a:srgbClr val="5B6B7A"/>
+                </a:solidFill>
+                <a:latin typeface="Calibri" pitchFamily="34" charset="0"/>
+                <a:ea typeface="Calibri" pitchFamily="34" charset="-122"/>
+                <a:cs typeface="Calibri" pitchFamily="34" charset="-120"/>
+              </a:rPr>
+              <a:t>Аналитик</a:t>
+            </a:r>
+            <a:endParaRPr lang="en-US" sz="1050" dirty="0"/>
+          </a:p>
+        </p:txBody>
+      </p:sp>
+      <p:sp>
+        <p:nvSpPr>
+          <p:cNvPr id="60" name="Shape 58"/>
+          <p:cNvSpPr/>
+          <p:nvPr/>
+        </p:nvSpPr>
+        <p:spPr>
+          <a:xfrm>
+            <a:off x="1920240" y="3749040"/>
+            <a:ext cx="182880" cy="182880"/>
+          </a:xfrm>
+          <a:prstGeom prst="ellipse">
+            <a:avLst/>
+          </a:prstGeom>
+          <a:solidFill>
+            <a:srgbClr val="C97A1A"/>
+          </a:solidFill>
+          <a:ln/>
+        </p:spPr>
+      </p:sp>
+      <p:sp>
+        <p:nvSpPr>
+          <p:cNvPr id="61" name="Text 59"/>
+          <p:cNvSpPr txBox="1"/>
+          <p:nvPr/>
+        </p:nvSpPr>
+        <p:spPr>
+          <a:xfrm>
+            <a:off x="2176272" y="3694176"/>
+            <a:ext cx="1188720" cy="292608"/>
+          </a:xfrm>
+          <a:prstGeom prst="rect">
+            <a:avLst/>
+          </a:prstGeom>
+          <a:noFill/>
+          <a:ln/>
+        </p:spPr>
+        <p:txBody>
+          <a:bodyPr wrap="square" lIns="0" tIns="0" rIns="0" bIns="0" rtlCol="0" anchor="ctr"/>
+          <a:lstStyle/>
+          <a:p>
+            <a:pPr indent="0" marL="0">
+              <a:buNone/>
+            </a:pPr>
+            <a:r>
+              <a:rPr lang="en-US" sz="1050" dirty="0">
+                <a:solidFill>
+                  <a:srgbClr val="5B6B7A"/>
+                </a:solidFill>
+                <a:latin typeface="Calibri" pitchFamily="34" charset="0"/>
+                <a:ea typeface="Calibri" pitchFamily="34" charset="-122"/>
+                <a:cs typeface="Calibri" pitchFamily="34" charset="-120"/>
+              </a:rPr>
+              <a:t>Разработчик</a:t>
+            </a:r>
+            <a:endParaRPr lang="en-US" sz="1050" dirty="0"/>
+          </a:p>
+        </p:txBody>
+      </p:sp>
+      <p:sp>
+        <p:nvSpPr>
+          <p:cNvPr id="62" name="Shape 60"/>
+          <p:cNvSpPr/>
+          <p:nvPr/>
+        </p:nvSpPr>
+        <p:spPr>
+          <a:xfrm>
+            <a:off x="3337560" y="3749040"/>
+            <a:ext cx="182880" cy="182880"/>
+          </a:xfrm>
+          <a:prstGeom prst="ellipse">
+            <a:avLst/>
+          </a:prstGeom>
+          <a:solidFill>
+            <a:srgbClr val="5B6B7A"/>
+          </a:solidFill>
+          <a:ln/>
+        </p:spPr>
+      </p:sp>
+      <p:sp>
+        <p:nvSpPr>
+          <p:cNvPr id="63" name="Text 61"/>
+          <p:cNvSpPr txBox="1"/>
+          <p:nvPr/>
+        </p:nvSpPr>
+        <p:spPr>
+          <a:xfrm>
+            <a:off x="3593592" y="3694176"/>
+            <a:ext cx="1188720" cy="292608"/>
+          </a:xfrm>
+          <a:prstGeom prst="rect">
+            <a:avLst/>
+          </a:prstGeom>
+          <a:noFill/>
+          <a:ln/>
+        </p:spPr>
+        <p:txBody>
+          <a:bodyPr wrap="square" lIns="0" tIns="0" rIns="0" bIns="0" rtlCol="0" anchor="ctr"/>
+          <a:lstStyle/>
+          <a:p>
+            <a:pPr indent="0" marL="0">
+              <a:buNone/>
+            </a:pPr>
+            <a:r>
+              <a:rPr lang="en-US" sz="1050" dirty="0">
+                <a:solidFill>
+                  <a:srgbClr val="5B6B7A"/>
+                </a:solidFill>
+                <a:latin typeface="Calibri" pitchFamily="34" charset="0"/>
+                <a:ea typeface="Calibri" pitchFamily="34" charset="-122"/>
+                <a:cs typeface="Calibri" pitchFamily="34" charset="-120"/>
+              </a:rPr>
+              <a:t>Оба</a:t>
+            </a:r>
+            <a:endParaRPr lang="en-US" sz="1050" dirty="0"/>
+          </a:p>
+        </p:txBody>
+      </p:sp>
+      <p:sp>
+        <p:nvSpPr>
+          <p:cNvPr id="64" name="Text 62"/>
+          <p:cNvSpPr txBox="1"/>
+          <p:nvPr/>
+        </p:nvSpPr>
+        <p:spPr>
+          <a:xfrm>
+            <a:off x="502920" y="4251960"/>
+            <a:ext cx="10607040" cy="731520"/>
+          </a:xfrm>
+          <a:prstGeom prst="rect">
+            <a:avLst/>
+          </a:prstGeom>
+          <a:noFill/>
+          <a:ln/>
+        </p:spPr>
+        <p:txBody>
+          <a:bodyPr wrap="square" lIns="0" tIns="0" rIns="0" bIns="0" rtlCol="0" anchor="ctr"/>
+          <a:lstStyle/>
+          <a:p>
+            <a:pPr indent="0" marL="0">
+              <a:lnSpc>
+                <a:spcPct val="125000"/>
+              </a:lnSpc>
+              <a:buNone/>
+            </a:pPr>
+            <a:r>
+              <a:rPr lang="en-US" sz="1200" dirty="0">
+                <a:solidFill>
+                  <a:srgbClr val="5B6B7A"/>
+                </a:solidFill>
+                <a:latin typeface="Calibri" pitchFamily="34" charset="0"/>
+                <a:ea typeface="Calibri" pitchFamily="34" charset="-122"/>
+                <a:cs typeface="Calibri" pitchFamily="34" charset="-120"/>
+              </a:rPr>
+              <a:t>Этапы 2–3 идут параллельно, этап 6 — итеративно внутри 4–5. Разбивка по ролям и трудоёмкости на каждом этапе — docs/metodika-vnedreniya.md, §2.</a:t>
+            </a:r>
+            <a:endParaRPr lang="en-US" sz="1200" dirty="0"/>
+          </a:p>
+        </p:txBody>
+      </p:sp>
+      <p:sp>
+        <p:nvSpPr>
+          <p:cNvPr id="65" name="Shape 63"/>
+          <p:cNvSpPr/>
+          <p:nvPr/>
+        </p:nvSpPr>
+        <p:spPr>
+          <a:xfrm>
+            <a:off x="502920" y="5166360"/>
+            <a:ext cx="10607040" cy="594360"/>
+          </a:xfrm>
+          <a:prstGeom prst="roundRect">
+            <a:avLst>
+              <a:gd name="adj" fmla="val 9231"/>
+            </a:avLst>
+          </a:prstGeom>
+          <a:solidFill>
+            <a:srgbClr val="F4F6F7"/>
+          </a:solidFill>
+          <a:ln w="9525">
+            <a:solidFill>
+              <a:srgbClr val="D8DEE2"/>
+            </a:solidFill>
+            <a:prstDash val="solid"/>
+          </a:ln>
+        </p:spPr>
+      </p:sp>
+      <p:sp>
+        <p:nvSpPr>
+          <p:cNvPr id="66" name="Text 64"/>
+          <p:cNvSpPr txBox="1"/>
+          <p:nvPr/>
+        </p:nvSpPr>
+        <p:spPr>
+          <a:xfrm>
+            <a:off x="685800" y="5166360"/>
+            <a:ext cx="2103120" cy="594360"/>
+          </a:xfrm>
+          <a:prstGeom prst="rect">
+            <a:avLst/>
+          </a:prstGeom>
+          <a:noFill/>
+          <a:ln/>
+        </p:spPr>
+        <p:txBody>
+          <a:bodyPr wrap="square" lIns="0" tIns="0" rIns="0" bIns="0" rtlCol="0" anchor="ctr"/>
+          <a:lstStyle/>
+          <a:p>
+            <a:pPr indent="0" marL="0">
+              <a:buNone/>
+            </a:pPr>
+            <a:r>
+              <a:rPr lang="en-US" sz="1150" b="1" dirty="0">
+                <a:solidFill>
+                  <a:srgbClr val="0A5F67"/>
+                </a:solidFill>
+                <a:latin typeface="Calibri" pitchFamily="34" charset="0"/>
+                <a:ea typeface="Calibri" pitchFamily="34" charset="-122"/>
+                <a:cs typeface="Calibri" pitchFamily="34" charset="-120"/>
+              </a:rPr>
+              <a:t>Каждый этап</a:t>
+            </a:r>
+            <a:endParaRPr lang="en-US" sz="1150" dirty="0"/>
+          </a:p>
+        </p:txBody>
+      </p:sp>
+      <p:sp>
+        <p:nvSpPr>
+          <p:cNvPr id="67" name="Text 65"/>
+          <p:cNvSpPr txBox="1"/>
+          <p:nvPr/>
+        </p:nvSpPr>
+        <p:spPr>
+          <a:xfrm>
+            <a:off x="2880360" y="5166360"/>
+            <a:ext cx="8138160" cy="594360"/>
+          </a:xfrm>
+          <a:prstGeom prst="rect">
+            <a:avLst/>
+          </a:prstGeom>
+          <a:noFill/>
+          <a:ln/>
+        </p:spPr>
+        <p:txBody>
+          <a:bodyPr wrap="square" lIns="0" tIns="0" rIns="0" bIns="0" rtlCol="0" anchor="ctr"/>
+          <a:lstStyle/>
+          <a:p>
+            <a:pPr indent="0" marL="0">
+              <a:buNone/>
+            </a:pPr>
+            <a:r>
+              <a:rPr lang="en-US" sz="1150" dirty="0">
+                <a:solidFill>
+                  <a:srgbClr val="5B6B7A"/>
+                </a:solidFill>
+                <a:latin typeface="Calibri" pitchFamily="34" charset="0"/>
+                <a:ea typeface="Calibri" pitchFamily="34" charset="-122"/>
+                <a:cs typeface="Calibri" pitchFamily="34" charset="-120"/>
+              </a:rPr>
+              <a:t>фиксирует конкретный артефакт — не «продвигаемся», а документ/таблица/статус</a:t>
+            </a:r>
+            <a:endParaRPr lang="en-US" sz="1150" dirty="0"/>
+          </a:p>
+        </p:txBody>
+      </p:sp>
+      <p:sp>
+        <p:nvSpPr>
+          <p:cNvPr id="68" name="Shape 66"/>
+          <p:cNvSpPr/>
+          <p:nvPr/>
+        </p:nvSpPr>
+        <p:spPr>
+          <a:xfrm>
+            <a:off x="502920" y="5897880"/>
+            <a:ext cx="10607040" cy="594360"/>
+          </a:xfrm>
+          <a:prstGeom prst="roundRect">
+            <a:avLst>
+              <a:gd name="adj" fmla="val 9231"/>
+            </a:avLst>
+          </a:prstGeom>
+          <a:solidFill>
+            <a:srgbClr val="F4F6F7"/>
+          </a:solidFill>
+          <a:ln w="9525">
+            <a:solidFill>
+              <a:srgbClr val="D8DEE2"/>
+            </a:solidFill>
+            <a:prstDash val="solid"/>
+          </a:ln>
+        </p:spPr>
+      </p:sp>
+      <p:sp>
+        <p:nvSpPr>
+          <p:cNvPr id="69" name="Text 67"/>
+          <p:cNvSpPr txBox="1"/>
+          <p:nvPr/>
+        </p:nvSpPr>
+        <p:spPr>
+          <a:xfrm>
+            <a:off x="685800" y="5897880"/>
+            <a:ext cx="2103120" cy="594360"/>
+          </a:xfrm>
+          <a:prstGeom prst="rect">
+            <a:avLst/>
+          </a:prstGeom>
+          <a:noFill/>
+          <a:ln/>
+        </p:spPr>
+        <p:txBody>
+          <a:bodyPr wrap="square" lIns="0" tIns="0" rIns="0" bIns="0" rtlCol="0" anchor="ctr"/>
+          <a:lstStyle/>
+          <a:p>
+            <a:pPr indent="0" marL="0">
+              <a:buNone/>
+            </a:pPr>
+            <a:r>
+              <a:rPr lang="en-US" sz="1150" b="1" dirty="0">
+                <a:solidFill>
+                  <a:srgbClr val="0A5F67"/>
+                </a:solidFill>
+                <a:latin typeface="Calibri" pitchFamily="34" charset="0"/>
+                <a:ea typeface="Calibri" pitchFamily="34" charset="-122"/>
+                <a:cs typeface="Calibri" pitchFamily="34" charset="-120"/>
+              </a:rPr>
+              <a:t>Финал (этап 8)</a:t>
+            </a:r>
+            <a:endParaRPr lang="en-US" sz="1150" dirty="0"/>
+          </a:p>
+        </p:txBody>
+      </p:sp>
+      <p:sp>
+        <p:nvSpPr>
+          <p:cNvPr id="70" name="Text 68"/>
+          <p:cNvSpPr txBox="1"/>
+          <p:nvPr/>
+        </p:nvSpPr>
+        <p:spPr>
+          <a:xfrm>
+            <a:off x="2880360" y="5897880"/>
+            <a:ext cx="8138160" cy="594360"/>
+          </a:xfrm>
+          <a:prstGeom prst="rect">
+            <a:avLst/>
+          </a:prstGeom>
+          <a:noFill/>
+          <a:ln/>
+        </p:spPr>
+        <p:txBody>
+          <a:bodyPr wrap="square" lIns="0" tIns="0" rIns="0" bIns="0" rtlCol="0" anchor="ctr"/>
+          <a:lstStyle/>
+          <a:p>
+            <a:pPr indent="0" marL="0">
+              <a:buNone/>
+            </a:pPr>
+            <a:r>
+              <a:rPr lang="en-US" sz="1150" dirty="0">
+                <a:solidFill>
+                  <a:srgbClr val="5B6B7A"/>
+                </a:solidFill>
+                <a:latin typeface="Calibri" pitchFamily="34" charset="0"/>
+                <a:ea typeface="Calibri" pitchFamily="34" charset="-122"/>
+                <a:cs typeface="Calibri" pitchFamily="34" charset="-120"/>
+              </a:rPr>
+              <a:t>финальный отчёт: у каждого пункта баг-репорта явный статус — исправлено / не исправлено / принято как ограничение</a:t>
+            </a:r>
+            <a:endParaRPr lang="en-US" sz="1150" dirty="0"/>
+          </a:p>
+        </p:txBody>
+      </p:sp>
+      <p:sp>
+        <p:nvSpPr>
+          <p:cNvPr id="71" name="Text 69"/>
+          <p:cNvSpPr txBox="1"/>
+          <p:nvPr/>
+        </p:nvSpPr>
+        <p:spPr>
+          <a:xfrm>
+            <a:off x="10881360" y="6473952"/>
+            <a:ext cx="822960" cy="274320"/>
+          </a:xfrm>
+          <a:prstGeom prst="rect">
+            <a:avLst/>
+          </a:prstGeom>
+          <a:noFill/>
+          <a:ln/>
+        </p:spPr>
+        <p:txBody>
+          <a:bodyPr wrap="square" lIns="0" tIns="0" rIns="0" bIns="0" rtlCol="0" anchor="ctr"/>
+          <a:lstStyle/>
+          <a:p>
+            <a:pPr algn="r" indent="0" marL="0">
+              <a:buNone/>
+            </a:pPr>
+            <a:r>
+              <a:rPr lang="en-US" sz="1050" dirty="0">
+                <a:solidFill>
+                  <a:srgbClr val="8C99A6"/>
+                </a:solidFill>
+                <a:latin typeface="Calibri" pitchFamily="34" charset="0"/>
+                <a:ea typeface="Calibri" pitchFamily="34" charset="-122"/>
+                <a:cs typeface="Calibri" pitchFamily="34" charset="-120"/>
+              </a:rPr>
+              <a:t>2 / 8</a:t>
+            </a:r>
+            <a:endParaRPr lang="en-US" sz="1050" dirty="0"/>
+          </a:p>
+        </p:txBody>
+      </p:sp>
+    </p:spTree>
+  </p:cSld>
+  <p:clrMapOvr>
+    <a:masterClrMapping/>
+  </p:clrMapOvr>
+</p:sld>
+</file>
+
+<file path=ppt/slides/slide3.xml><?xml version="1.0" encoding="utf-8"?>
+<p:sld xmlns:a="http://schemas.openxmlformats.org/drawingml/2006/main" xmlns:r="http://schemas.openxmlformats.org/officeDocument/2006/relationships" xmlns:p="http://schemas.openxmlformats.org/presentationml/2006/main">
+  <p:cSld name="Slide 3">
+    <p:spTree>
+      <p:nvGrpSpPr>
+        <p:cNvPr id="1" name=""/>
+        <p:cNvGrpSpPr/>
+        <p:nvPr/>
+      </p:nvGrpSpPr>
+      <p:grpSpPr>
+        <a:xfrm>
+          <a:off x="0" y="0"/>
+          <a:ext cx="0" cy="0"/>
+          <a:chOff x="0" y="0"/>
+          <a:chExt cx="0" cy="0"/>
+        </a:xfrm>
+      </p:grpSpPr>
+      <p:sp>
+        <p:nvSpPr>
+          <p:cNvPr id="2" name="Text 0"/>
+          <p:cNvSpPr txBox="1"/>
+          <p:nvPr/>
+        </p:nvSpPr>
+        <p:spPr>
+          <a:xfrm>
+            <a:off x="502920" y="320040"/>
+            <a:ext cx="11155680" cy="274320"/>
+          </a:xfrm>
+          <a:prstGeom prst="rect">
+            <a:avLst/>
+          </a:prstGeom>
+          <a:noFill/>
+          <a:ln/>
+        </p:spPr>
+        <p:txBody>
+          <a:bodyPr wrap="square" lIns="0" tIns="0" rIns="0" bIns="0" rtlCol="0" anchor="ctr"/>
+          <a:lstStyle/>
+          <a:p>
+            <a:pPr indent="0" marL="0">
+              <a:buNone/>
+            </a:pPr>
+            <a:r>
+              <a:rPr lang="en-US" sz="1100" b="1" spc="120" kern="0" dirty="0">
+                <a:solidFill>
+                  <a:srgbClr val="0E7C86"/>
+                </a:solidFill>
+                <a:latin typeface="Calibri" pitchFamily="34" charset="0"/>
+                <a:ea typeface="Calibri" pitchFamily="34" charset="-122"/>
+                <a:cs typeface="Calibri" pitchFamily="34" charset="-120"/>
+              </a:rPr>
+              <a:t>КЕЙС 1 — ПИЛОТ · СПРАВОЧНО</a:t>
+            </a:r>
+            <a:endParaRPr lang="en-US" sz="1100" dirty="0"/>
+          </a:p>
+        </p:txBody>
+      </p:sp>
+      <p:sp>
+        <p:nvSpPr>
+          <p:cNvPr id="3" name="Text 1"/>
+          <p:cNvSpPr txBox="1"/>
+          <p:nvPr/>
+        </p:nvSpPr>
+        <p:spPr>
+          <a:xfrm>
+            <a:off x="502920" y="658368"/>
+            <a:ext cx="11155680" cy="566928"/>
+          </a:xfrm>
+          <a:prstGeom prst="rect">
+            <a:avLst/>
+          </a:prstGeom>
+          <a:noFill/>
+          <a:ln/>
+        </p:spPr>
+        <p:txBody>
+          <a:bodyPr wrap="square" lIns="0" tIns="0" rIns="0" bIns="0" rtlCol="0" anchor="ctr"/>
+          <a:lstStyle/>
+          <a:p>
+            <a:pPr indent="0" marL="0">
+              <a:buNone/>
+            </a:pPr>
+            <a:r>
+              <a:rPr lang="en-US" sz="2800" b="1" dirty="0">
+                <a:solidFill>
+                  <a:srgbClr val="1A2733"/>
+                </a:solidFill>
+                <a:latin typeface="Cambria" pitchFamily="34" charset="0"/>
+                <a:ea typeface="Cambria" pitchFamily="34" charset="-122"/>
+                <a:cs typeface="Cambria" pitchFamily="34" charset="-120"/>
+              </a:rPr>
+              <a:t>9 этапов пилота — роли и результат подробно</a:t>
+            </a:r>
+            <a:endParaRPr lang="en-US" sz="2800" dirty="0"/>
           </a:p>
         </p:txBody>
       </p:sp>
       <p:graphicFrame>
         <p:nvGraphicFramePr>
-          <p:cNvPr id="3" name="Table 0"/>
+          <p:cNvPr id="4" name="Table 0"/>
           <p:cNvGraphicFramePr>
             <a:graphicFrameLocks noGrp="1"/>
           </p:cNvGraphicFramePr>
@@ -3112,8 +5523,8 @@
           </p:nvPr>
         </p:nvGraphicFramePr>
         <p:xfrm>
-          <a:off x="502920" y="1691640"/>
-          <a:ext cx="11155680" cy="4572000"/>
+          <a:off x="502920" y="1600200"/>
+          <a:ext cx="11155680" cy="4663440"/>
         </p:xfrm>
         <a:graphic>
           <a:graphicData uri="http://schemas.openxmlformats.org/drawingml/2006/table">
@@ -3125,7 +5536,7 @@
                 <a:gridCol w="914400"/>
                 <a:gridCol w="5943600"/>
               </a:tblGrid>
-              <a:tr h="457200">
+              <a:tr h="466344">
                 <a:tc>
                   <a:txBody>
                     <a:bodyPr/>
@@ -3399,7 +5810,7 @@
                   </a:tcPr>
                 </a:tc>
               </a:tr>
-              <a:tr h="457200">
+              <a:tr h="466344">
                 <a:tc>
                   <a:txBody>
                     <a:bodyPr/>
@@ -3661,7 +6072,7 @@
                   </a:tcPr>
                 </a:tc>
               </a:tr>
-              <a:tr h="457200">
+              <a:tr h="466344">
                 <a:tc>
                   <a:txBody>
                     <a:bodyPr/>
@@ -3923,7 +6334,7 @@
                   </a:tcPr>
                 </a:tc>
               </a:tr>
-              <a:tr h="457200">
+              <a:tr h="466344">
                 <a:tc>
                   <a:txBody>
                     <a:bodyPr/>
@@ -4185,7 +6596,7 @@
                   </a:tcPr>
                 </a:tc>
               </a:tr>
-              <a:tr h="457200">
+              <a:tr h="466344">
                 <a:tc>
                   <a:txBody>
                     <a:bodyPr/>
@@ -4447,7 +6858,7 @@
                   </a:tcPr>
                 </a:tc>
               </a:tr>
-              <a:tr h="457200">
+              <a:tr h="466344">
                 <a:tc>
                   <a:txBody>
                     <a:bodyPr/>
@@ -4709,7 +7120,7 @@
                   </a:tcPr>
                 </a:tc>
               </a:tr>
-              <a:tr h="457200">
+              <a:tr h="466344">
                 <a:tc>
                   <a:txBody>
                     <a:bodyPr/>
@@ -4971,7 +7382,7 @@
                   </a:tcPr>
                 </a:tc>
               </a:tr>
-              <a:tr h="457200">
+              <a:tr h="466344">
                 <a:tc>
                   <a:txBody>
                     <a:bodyPr/>
@@ -5233,7 +7644,7 @@
                   </a:tcPr>
                 </a:tc>
               </a:tr>
-              <a:tr h="457200">
+              <a:tr h="466344">
                 <a:tc>
                   <a:txBody>
                     <a:bodyPr/>
@@ -5495,7 +7906,7 @@
                   </a:tcPr>
                 </a:tc>
               </a:tr>
-              <a:tr h="457200">
+              <a:tr h="466344">
                 <a:tc>
                   <a:txBody>
                     <a:bodyPr/>
@@ -5708,7 +8119,7 @@
                           <a:ea typeface="Calibri" pitchFamily="34" charset="-122"/>
                           <a:cs typeface="Calibri" pitchFamily="34" charset="-120"/>
                         </a:rPr>
-                        <a:t>Финальный отчёт, статус по каждому пункту</a:t>
+                        <a:t>Финальный отчёт → точка перехода в Кейс 2</a:t>
                       </a:r>
                       <a:endParaRPr lang="en-US" sz="1150" dirty="0">
                         <a:latin typeface="Calibri" charset="0"/>
@@ -5763,7 +8174,7 @@
       </p:graphicFrame>
       <p:sp>
         <p:nvSpPr>
-          <p:cNvPr id="6" name="Text 3"/>
+          <p:cNvPr id="5" name="Text 2"/>
           <p:cNvSpPr txBox="1"/>
           <p:nvPr/>
         </p:nvSpPr>
@@ -5794,204 +8205,7 @@
                 <a:ea typeface="Calibri" pitchFamily="34" charset="-122"/>
                 <a:cs typeface="Calibri" pitchFamily="34" charset="-120"/>
               </a:rPr>
-              <a:t>2 / 6</a:t>
-            </a:r>
-            <a:endParaRPr lang="en-US" sz="1050" dirty="0"/>
-          </a:p>
-        </p:txBody>
-      </p:sp>
-    </p:spTree>
-  </p:cSld>
-  <p:clrMapOvr>
-    <a:masterClrMapping/>
-  </p:clrMapOvr>
-</p:sld>
-</file>
-
-<file path=ppt/slides/slide3.xml><?xml version="1.0" encoding="utf-8"?>
-<p:sld xmlns:a="http://schemas.openxmlformats.org/drawingml/2006/main" xmlns:r="http://schemas.openxmlformats.org/officeDocument/2006/relationships" xmlns:p="http://schemas.openxmlformats.org/presentationml/2006/main">
-  <p:cSld name="Slide 3">
-    <p:spTree>
-      <p:nvGrpSpPr>
-        <p:cNvPr id="1" name=""/>
-        <p:cNvGrpSpPr/>
-        <p:nvPr/>
-      </p:nvGrpSpPr>
-      <p:grpSpPr>
-        <a:xfrm>
-          <a:off x="0" y="0"/>
-          <a:ext cx="0" cy="0"/>
-          <a:chOff x="0" y="0"/>
-          <a:chExt cx="0" cy="0"/>
-        </a:xfrm>
-      </p:grpSpPr>
-      <p:sp>
-        <p:nvSpPr>
-          <p:cNvPr id="2" name="Text 0"/>
-          <p:cNvSpPr txBox="1"/>
-          <p:nvPr/>
-        </p:nvSpPr>
-        <p:spPr>
-          <a:xfrm>
-            <a:off x="502920" y="320040"/>
-            <a:ext cx="11155680" cy="274320"/>
-          </a:xfrm>
-          <a:prstGeom prst="rect">
-            <a:avLst/>
-          </a:prstGeom>
-          <a:noFill/>
-          <a:ln/>
-        </p:spPr>
-        <p:txBody>
-          <a:bodyPr wrap="square" lIns="0" tIns="0" rIns="0" bIns="0" rtlCol="0" anchor="ctr"/>
-          <a:lstStyle/>
-          <a:p>
-            <a:pPr indent="0" marL="0">
-              <a:buNone/>
-            </a:pPr>
-            <a:r>
-              <a:rPr lang="en-US" sz="1100" b="1" spc="120" kern="0" dirty="0">
-                <a:solidFill>
-                  <a:srgbClr val="0E7C86"/>
-                </a:solidFill>
-                <a:latin typeface="Calibri" pitchFamily="34" charset="0"/>
-                <a:ea typeface="Calibri" pitchFamily="34" charset="-122"/>
-                <a:cs typeface="Calibri" pitchFamily="34" charset="-120"/>
-              </a:rPr>
-              <a:t>§2 — КАЛЕНДАРЬ</a:t>
-            </a:r>
-            <a:endParaRPr lang="en-US" sz="1100" dirty="0"/>
-          </a:p>
-        </p:txBody>
-      </p:sp>
-      <p:sp>
-        <p:nvSpPr>
-          <p:cNvPr id="3" name="Text 1"/>
-          <p:cNvSpPr txBox="1"/>
-          <p:nvPr/>
-        </p:nvSpPr>
-        <p:spPr>
-          <a:xfrm>
-            <a:off x="502920" y="621792"/>
-            <a:ext cx="11155680" cy="566928"/>
-          </a:xfrm>
-          <a:prstGeom prst="rect">
-            <a:avLst/>
-          </a:prstGeom>
-          <a:noFill/>
-          <a:ln/>
-        </p:spPr>
-        <p:txBody>
-          <a:bodyPr wrap="square" lIns="0" tIns="0" rIns="0" bIns="0" rtlCol="0" anchor="ctr"/>
-          <a:lstStyle/>
-          <a:p>
-            <a:pPr indent="0" marL="0">
-              <a:buNone/>
-            </a:pPr>
-            <a:r>
-              <a:rPr lang="en-US" sz="3000" b="1" dirty="0">
-                <a:solidFill>
-                  <a:srgbClr val="1A2733"/>
-                </a:solidFill>
-                <a:latin typeface="Cambria" pitchFamily="34" charset="0"/>
-                <a:ea typeface="Cambria" pitchFamily="34" charset="-122"/>
-                <a:cs typeface="Cambria" pitchFamily="34" charset="-120"/>
-              </a:rPr>
-              <a:t>Диаграмма Ганта: 9 этапов на 8 неделях</a:t>
-            </a:r>
-            <a:endParaRPr lang="en-US" sz="3000" dirty="0"/>
-          </a:p>
-        </p:txBody>
-      </p:sp>
-      <p:sp>
-        <p:nvSpPr>
-          <p:cNvPr id="4" name="Text 2"/>
-          <p:cNvSpPr txBox="1"/>
-          <p:nvPr/>
-        </p:nvSpPr>
-        <p:spPr>
-          <a:xfrm>
-            <a:off x="502920" y="1207008"/>
-            <a:ext cx="11155680" cy="365760"/>
-          </a:xfrm>
-          <a:prstGeom prst="rect">
-            <a:avLst/>
-          </a:prstGeom>
-          <a:noFill/>
-          <a:ln/>
-        </p:spPr>
-        <p:txBody>
-          <a:bodyPr wrap="square" lIns="0" tIns="0" rIns="0" bIns="0" rtlCol="0" anchor="ctr"/>
-          <a:lstStyle/>
-          <a:p>
-            <a:pPr indent="0" marL="0">
-              <a:buNone/>
-            </a:pPr>
-            <a:r>
-              <a:rPr lang="en-US" sz="1400" dirty="0">
-                <a:solidFill>
-                  <a:srgbClr val="5B6B7A"/>
-                </a:solidFill>
-                <a:latin typeface="Calibri" pitchFamily="34" charset="0"/>
-                <a:ea typeface="Calibri" pitchFamily="34" charset="-122"/>
-                <a:cs typeface="Calibri" pitchFamily="34" charset="-120"/>
-              </a:rPr>
-              <a:t>Этапы 2–3 и 4–7 идут параллельно/итеративно, не строго друг за другом</a:t>
-            </a:r>
-            <a:endParaRPr lang="en-US" sz="1400" dirty="0"/>
-          </a:p>
-        </p:txBody>
-      </p:sp>
-      <p:graphicFrame>
-        <p:nvGraphicFramePr>
-          <p:cNvPr id="5" name="Chart 0" descr=""/>
-          <p:cNvGraphicFramePr/>
-          <p:nvPr/>
-        </p:nvGraphicFramePr>
-        <p:xfrm>
-          <a:off x="502920" y="1600200"/>
-          <a:ext cx="11155680" cy="4663440"/>
-        </p:xfrm>
-        <a:graphic xmlns:a="http://schemas.openxmlformats.org/drawingml/2006/main">
-          <a:graphicData uri="http://schemas.openxmlformats.org/drawingml/2006/chart">
-            <c:chart xmlns:c="http://schemas.openxmlformats.org/drawingml/2006/chart" r:id="rId1"/>
-          </a:graphicData>
-        </a:graphic>
-      </p:graphicFrame>
-      <p:sp>
-        <p:nvSpPr>
-          <p:cNvPr id="6" name="Text 3"/>
-          <p:cNvSpPr txBox="1"/>
-          <p:nvPr/>
-        </p:nvSpPr>
-        <p:spPr>
-          <a:xfrm>
-            <a:off x="10881360" y="6473952"/>
-            <a:ext cx="822960" cy="274320"/>
-          </a:xfrm>
-          <a:prstGeom prst="rect">
-            <a:avLst/>
-          </a:prstGeom>
-          <a:noFill/>
-          <a:ln/>
-        </p:spPr>
-        <p:txBody>
-          <a:bodyPr wrap="square" lIns="0" tIns="0" rIns="0" bIns="0" rtlCol="0" anchor="ctr"/>
-          <a:lstStyle/>
-          <a:p>
-            <a:pPr algn="r" indent="0" marL="0">
-              <a:buNone/>
-            </a:pPr>
-            <a:r>
-              <a:rPr lang="en-US" sz="1050" dirty="0">
-                <a:solidFill>
-                  <a:srgbClr val="8C99A6"/>
-                </a:solidFill>
-                <a:latin typeface="Calibri" pitchFamily="34" charset="0"/>
-                <a:ea typeface="Calibri" pitchFamily="34" charset="-122"/>
-                <a:cs typeface="Calibri" pitchFamily="34" charset="-120"/>
-              </a:rPr>
-              <a:t>3 / 6</a:t>
+              <a:t>3 / 8</a:t>
             </a:r>
             <a:endParaRPr lang="en-US" sz="1050" dirty="0"/>
           </a:p>
@@ -6055,7 +8269,7 @@
                 <a:ea typeface="Calibri" pitchFamily="34" charset="-122"/>
                 <a:cs typeface="Calibri" pitchFamily="34" charset="-120"/>
               </a:rPr>
-              <a:t>§3 — ЗАГРУЗКА КОМАНДЫ</a:t>
+              <a:t>КЕЙС 2 — ПРОЕКТ</a:t>
             </a:r>
             <a:endParaRPr lang="en-US" sz="1100" dirty="0"/>
           </a:p>
@@ -6069,7 +8283,7 @@
         </p:nvSpPr>
         <p:spPr>
           <a:xfrm>
-            <a:off x="502920" y="621792"/>
+            <a:off x="502920" y="658368"/>
             <a:ext cx="11155680" cy="566928"/>
           </a:xfrm>
           <a:prstGeom prst="rect">
@@ -6086,7 +8300,7 @@
               <a:buNone/>
             </a:pPr>
             <a:r>
-              <a:rPr lang="en-US" sz="3000" b="1" dirty="0">
+              <a:rPr lang="en-US" sz="2800" b="1" dirty="0">
                 <a:solidFill>
                   <a:srgbClr val="1A2733"/>
                 </a:solidFill>
@@ -6094,9 +8308,9 @@
                 <a:ea typeface="Cambria" pitchFamily="34" charset="-122"/>
                 <a:cs typeface="Cambria" pitchFamily="34" charset="-120"/>
               </a:rPr>
-              <a:t>Пиковые загрузки по неделям</a:t>
+              <a:t>Масштабирование после пилота: 5 фаз</a:t>
             </a:r>
-            <a:endParaRPr lang="en-US" sz="3000" dirty="0"/>
+            <a:endParaRPr lang="en-US" sz="2800" dirty="0"/>
           </a:p>
         </p:txBody>
       </p:sp>
@@ -6108,7 +8322,7 @@
         </p:nvSpPr>
         <p:spPr>
           <a:xfrm>
-            <a:off x="502920" y="1207008"/>
+            <a:off x="502920" y="1225296"/>
             <a:ext cx="11155680" cy="365760"/>
           </a:xfrm>
           <a:prstGeom prst="rect">
@@ -6125,7 +8339,7 @@
               <a:buNone/>
             </a:pPr>
             <a:r>
-              <a:rPr lang="en-US" sz="1400" dirty="0">
+              <a:rPr lang="en-US" sz="1350" dirty="0">
                 <a:solidFill>
                   <a:srgbClr val="5B6B7A"/>
                 </a:solidFill>
@@ -6133,38 +8347,69 @@
                 <a:ea typeface="Calibri" pitchFamily="34" charset="-122"/>
                 <a:cs typeface="Calibri" pitchFamily="34" charset="-120"/>
               </a:rPr>
-              <a:t>Чел.-дн. в неделю на роль · пунктир — потолок 1 ФТЕ (5 дн./нед.)</a:t>
+              <a:t>Переход не автоматический — решение принимается на этапе 8 Кейса 1, по факту приёмки, не по 100% pass</a:t>
             </a:r>
-            <a:endParaRPr lang="en-US" sz="1400" dirty="0"/>
+            <a:endParaRPr lang="en-US" sz="1350" dirty="0"/>
           </a:p>
         </p:txBody>
       </p:sp>
-      <p:graphicFrame>
-        <p:nvGraphicFramePr>
-          <p:cNvPr id="5" name="Chart 0" descr=""/>
-          <p:cNvGraphicFramePr/>
-          <p:nvPr/>
-        </p:nvGraphicFramePr>
-        <p:xfrm>
-          <a:off x="502920" y="1600200"/>
-          <a:ext cx="11155680" cy="4297680"/>
-        </p:xfrm>
-        <a:graphic xmlns:a="http://schemas.openxmlformats.org/drawingml/2006/main">
-          <a:graphicData uri="http://schemas.openxmlformats.org/drawingml/2006/chart">
-            <c:chart xmlns:c="http://schemas.openxmlformats.org/drawingml/2006/chart" r:id="rId1"/>
-          </a:graphicData>
-        </a:graphic>
-      </p:graphicFrame>
-      <p:sp>
-        <p:nvSpPr>
-          <p:cNvPr id="6" name="Text 3"/>
+      <p:sp>
+        <p:nvSpPr>
+          <p:cNvPr id="5" name="Shape 3"/>
+          <p:cNvSpPr/>
+          <p:nvPr/>
+        </p:nvSpPr>
+        <p:spPr>
+          <a:xfrm>
+            <a:off x="502920" y="1920240"/>
+            <a:ext cx="1965960" cy="1691640"/>
+          </a:xfrm>
+          <a:prstGeom prst="roundRect">
+            <a:avLst>
+              <a:gd name="adj" fmla="val 4324"/>
+            </a:avLst>
+          </a:prstGeom>
+          <a:solidFill>
+            <a:srgbClr val="F4F6F7"/>
+          </a:solidFill>
+          <a:ln w="19050">
+            <a:solidFill>
+              <a:srgbClr val="5B6B7A"/>
+            </a:solidFill>
+            <a:prstDash val="solid"/>
+          </a:ln>
+        </p:spPr>
+      </p:sp>
+      <p:sp>
+        <p:nvSpPr>
+          <p:cNvPr id="6" name="Shape 4"/>
+          <p:cNvSpPr/>
+          <p:nvPr/>
+        </p:nvSpPr>
+        <p:spPr>
+          <a:xfrm>
+            <a:off x="1229868" y="2103120"/>
+            <a:ext cx="512064" cy="512064"/>
+          </a:xfrm>
+          <a:prstGeom prst="ellipse">
+            <a:avLst/>
+          </a:prstGeom>
+          <a:solidFill>
+            <a:srgbClr val="5B6B7A"/>
+          </a:solidFill>
+          <a:ln/>
+        </p:spPr>
+      </p:sp>
+      <p:sp>
+        <p:nvSpPr>
+          <p:cNvPr id="7" name="Text 5"/>
           <p:cNvSpPr txBox="1"/>
           <p:nvPr/>
         </p:nvSpPr>
         <p:spPr>
           <a:xfrm>
-            <a:off x="502920" y="5989320"/>
-            <a:ext cx="11155680" cy="502920"/>
+            <a:off x="1229868" y="2103120"/>
+            <a:ext cx="512064" cy="512064"/>
           </a:xfrm>
           <a:prstGeom prst="rect">
             <a:avLst/>
@@ -6176,10 +8421,995 @@
           <a:bodyPr wrap="square" lIns="0" tIns="0" rIns="0" bIns="0" rtlCol="0" anchor="ctr"/>
           <a:lstStyle/>
           <a:p>
+            <a:pPr algn="ctr" indent="0" marL="0">
+              <a:buNone/>
+            </a:pPr>
+            <a:r>
+              <a:rPr lang="en-US" sz="1700" b="1" dirty="0">
+                <a:solidFill>
+                  <a:srgbClr val="FFFFFF"/>
+                </a:solidFill>
+                <a:latin typeface="Cambria" pitchFamily="34" charset="0"/>
+                <a:ea typeface="Cambria" pitchFamily="34" charset="-122"/>
+                <a:cs typeface="Cambria" pitchFamily="34" charset="-120"/>
+              </a:rPr>
+              <a:t>П1</a:t>
+            </a:r>
+            <a:endParaRPr lang="en-US" sz="1700" dirty="0"/>
+          </a:p>
+        </p:txBody>
+      </p:sp>
+      <p:sp>
+        <p:nvSpPr>
+          <p:cNvPr id="8" name="Text 6"/>
+          <p:cNvSpPr txBox="1"/>
+          <p:nvPr/>
+        </p:nvSpPr>
+        <p:spPr>
+          <a:xfrm>
+            <a:off x="594360" y="2706624"/>
+            <a:ext cx="1783080" cy="594360"/>
+          </a:xfrm>
+          <a:prstGeom prst="rect">
+            <a:avLst/>
+          </a:prstGeom>
+          <a:noFill/>
+          <a:ln/>
+        </p:spPr>
+        <p:txBody>
+          <a:bodyPr wrap="square" lIns="0" tIns="0" rIns="0" bIns="0" rtlCol="0" anchor="ctr"/>
+          <a:lstStyle/>
+          <a:p>
+            <a:pPr algn="ctr" indent="0" marL="0">
+              <a:lnSpc>
+                <a:spcPct val="105000"/>
+              </a:lnSpc>
+              <a:buNone/>
+            </a:pPr>
+            <a:r>
+              <a:rPr lang="en-US" sz="1250" b="1" dirty="0">
+                <a:solidFill>
+                  <a:srgbClr val="1A2733"/>
+                </a:solidFill>
+                <a:latin typeface="Calibri" pitchFamily="34" charset="0"/>
+                <a:ea typeface="Calibri" pitchFamily="34" charset="-122"/>
+                <a:cs typeface="Calibri" pitchFamily="34" charset="-120"/>
+              </a:rPr>
+              <a:t>Бизнес-кейс</a:t>
+            </a:r>
+            <a:endParaRPr lang="en-US" sz="1250" dirty="0"/>
+          </a:p>
+          <a:p>
+            <a:pPr algn="ctr" indent="0" marL="0">
+              <a:lnSpc>
+                <a:spcPct val="105000"/>
+              </a:lnSpc>
+              <a:buNone/>
+            </a:pPr>
+            <a:r>
+              <a:rPr lang="en-US" sz="1250" b="1" dirty="0">
+                <a:solidFill>
+                  <a:srgbClr val="1A2733"/>
+                </a:solidFill>
+                <a:latin typeface="Calibri" pitchFamily="34" charset="0"/>
+                <a:ea typeface="Calibri" pitchFamily="34" charset="-122"/>
+                <a:cs typeface="Calibri" pitchFamily="34" charset="-120"/>
+              </a:rPr>
+              <a:t>пилота</a:t>
+            </a:r>
+            <a:endParaRPr lang="en-US" sz="1250" dirty="0"/>
+          </a:p>
+        </p:txBody>
+      </p:sp>
+      <p:sp>
+        <p:nvSpPr>
+          <p:cNvPr id="9" name="Text 7"/>
+          <p:cNvSpPr txBox="1"/>
+          <p:nvPr/>
+        </p:nvSpPr>
+        <p:spPr>
+          <a:xfrm>
+            <a:off x="594360" y="3300984"/>
+            <a:ext cx="1783080" cy="256032"/>
+          </a:xfrm>
+          <a:prstGeom prst="rect">
+            <a:avLst/>
+          </a:prstGeom>
+          <a:noFill/>
+          <a:ln/>
+        </p:spPr>
+        <p:txBody>
+          <a:bodyPr wrap="square" lIns="0" tIns="0" rIns="0" bIns="0" rtlCol="0" anchor="ctr"/>
+          <a:lstStyle/>
+          <a:p>
+            <a:pPr algn="ctr" indent="0" marL="0">
+              <a:buNone/>
+            </a:pPr>
+            <a:r>
+              <a:rPr lang="en-US" sz="1000" b="1" dirty="0">
+                <a:solidFill>
+                  <a:srgbClr val="5B6B7A"/>
+                </a:solidFill>
+                <a:latin typeface="Calibri" pitchFamily="34" charset="0"/>
+                <a:ea typeface="Calibri" pitchFamily="34" charset="-122"/>
+                <a:cs typeface="Calibri" pitchFamily="34" charset="-120"/>
+              </a:rPr>
+              <a:t>Аналитик + Разработчик</a:t>
+            </a:r>
+            <a:endParaRPr lang="en-US" sz="1000" dirty="0"/>
+          </a:p>
+        </p:txBody>
+      </p:sp>
+      <p:sp>
+        <p:nvSpPr>
+          <p:cNvPr id="10" name="Shape 8"/>
+          <p:cNvSpPr/>
+          <p:nvPr/>
+        </p:nvSpPr>
+        <p:spPr>
+          <a:xfrm>
+            <a:off x="2478024" y="2674620"/>
+            <a:ext cx="164592" cy="182880"/>
+          </a:xfrm>
+          <a:prstGeom prst="chevron">
+            <a:avLst/>
+          </a:prstGeom>
+          <a:solidFill>
+            <a:srgbClr val="8C99A6"/>
+          </a:solidFill>
+          <a:ln/>
+        </p:spPr>
+      </p:sp>
+      <p:sp>
+        <p:nvSpPr>
+          <p:cNvPr id="11" name="Shape 9"/>
+          <p:cNvSpPr/>
+          <p:nvPr/>
+        </p:nvSpPr>
+        <p:spPr>
+          <a:xfrm>
+            <a:off x="2651760" y="1920240"/>
+            <a:ext cx="1965960" cy="1691640"/>
+          </a:xfrm>
+          <a:prstGeom prst="roundRect">
+            <a:avLst>
+              <a:gd name="adj" fmla="val 4324"/>
+            </a:avLst>
+          </a:prstGeom>
+          <a:solidFill>
+            <a:srgbClr val="F4F6F7"/>
+          </a:solidFill>
+          <a:ln w="19050">
+            <a:solidFill>
+              <a:srgbClr val="C97A1A"/>
+            </a:solidFill>
+            <a:prstDash val="solid"/>
+          </a:ln>
+        </p:spPr>
+      </p:sp>
+      <p:sp>
+        <p:nvSpPr>
+          <p:cNvPr id="12" name="Shape 10"/>
+          <p:cNvSpPr/>
+          <p:nvPr/>
+        </p:nvSpPr>
+        <p:spPr>
+          <a:xfrm>
+            <a:off x="3378708" y="2103120"/>
+            <a:ext cx="512064" cy="512064"/>
+          </a:xfrm>
+          <a:prstGeom prst="ellipse">
+            <a:avLst/>
+          </a:prstGeom>
+          <a:solidFill>
+            <a:srgbClr val="C97A1A"/>
+          </a:solidFill>
+          <a:ln/>
+        </p:spPr>
+      </p:sp>
+      <p:sp>
+        <p:nvSpPr>
+          <p:cNvPr id="13" name="Text 11"/>
+          <p:cNvSpPr txBox="1"/>
+          <p:nvPr/>
+        </p:nvSpPr>
+        <p:spPr>
+          <a:xfrm>
+            <a:off x="3378708" y="2103120"/>
+            <a:ext cx="512064" cy="512064"/>
+          </a:xfrm>
+          <a:prstGeom prst="rect">
+            <a:avLst/>
+          </a:prstGeom>
+          <a:noFill/>
+          <a:ln/>
+        </p:spPr>
+        <p:txBody>
+          <a:bodyPr wrap="square" lIns="0" tIns="0" rIns="0" bIns="0" rtlCol="0" anchor="ctr"/>
+          <a:lstStyle/>
+          <a:p>
+            <a:pPr algn="ctr" indent="0" marL="0">
+              <a:buNone/>
+            </a:pPr>
+            <a:r>
+              <a:rPr lang="en-US" sz="1700" b="1" dirty="0">
+                <a:solidFill>
+                  <a:srgbClr val="FFFFFF"/>
+                </a:solidFill>
+                <a:latin typeface="Cambria" pitchFamily="34" charset="0"/>
+                <a:ea typeface="Cambria" pitchFamily="34" charset="-122"/>
+                <a:cs typeface="Cambria" pitchFamily="34" charset="-120"/>
+              </a:rPr>
+              <a:t>П2</a:t>
+            </a:r>
+            <a:endParaRPr lang="en-US" sz="1700" dirty="0"/>
+          </a:p>
+        </p:txBody>
+      </p:sp>
+      <p:sp>
+        <p:nvSpPr>
+          <p:cNvPr id="14" name="Text 12"/>
+          <p:cNvSpPr txBox="1"/>
+          <p:nvPr/>
+        </p:nvSpPr>
+        <p:spPr>
+          <a:xfrm>
+            <a:off x="2743200" y="2706624"/>
+            <a:ext cx="1783080" cy="594360"/>
+          </a:xfrm>
+          <a:prstGeom prst="rect">
+            <a:avLst/>
+          </a:prstGeom>
+          <a:noFill/>
+          <a:ln/>
+        </p:spPr>
+        <p:txBody>
+          <a:bodyPr wrap="square" lIns="0" tIns="0" rIns="0" bIns="0" rtlCol="0" anchor="ctr"/>
+          <a:lstStyle/>
+          <a:p>
+            <a:pPr algn="ctr" indent="0" marL="0">
+              <a:lnSpc>
+                <a:spcPct val="105000"/>
+              </a:lnSpc>
+              <a:buNone/>
+            </a:pPr>
+            <a:r>
+              <a:rPr lang="en-US" sz="1250" b="1" dirty="0">
+                <a:solidFill>
+                  <a:srgbClr val="1A2733"/>
+                </a:solidFill>
+                <a:latin typeface="Calibri" pitchFamily="34" charset="0"/>
+                <a:ea typeface="Calibri" pitchFamily="34" charset="-122"/>
+                <a:cs typeface="Calibri" pitchFamily="34" charset="-120"/>
+              </a:rPr>
+              <a:t>Целевая</a:t>
+            </a:r>
+            <a:endParaRPr lang="en-US" sz="1250" dirty="0"/>
+          </a:p>
+          <a:p>
+            <a:pPr algn="ctr" indent="0" marL="0">
+              <a:lnSpc>
+                <a:spcPct val="105000"/>
+              </a:lnSpc>
+              <a:buNone/>
+            </a:pPr>
+            <a:r>
+              <a:rPr lang="en-US" sz="1250" b="1" dirty="0">
+                <a:solidFill>
+                  <a:srgbClr val="1A2733"/>
+                </a:solidFill>
+                <a:latin typeface="Calibri" pitchFamily="34" charset="0"/>
+                <a:ea typeface="Calibri" pitchFamily="34" charset="-122"/>
+                <a:cs typeface="Calibri" pitchFamily="34" charset="-120"/>
+              </a:rPr>
+              <a:t>архитектура</a:t>
+            </a:r>
+            <a:endParaRPr lang="en-US" sz="1250" dirty="0"/>
+          </a:p>
+          <a:p>
+            <a:pPr algn="ctr" indent="0" marL="0">
+              <a:lnSpc>
+                <a:spcPct val="105000"/>
+              </a:lnSpc>
+              <a:buNone/>
+            </a:pPr>
+            <a:r>
+              <a:rPr lang="en-US" sz="1250" b="1" dirty="0">
+                <a:solidFill>
+                  <a:srgbClr val="1A2733"/>
+                </a:solidFill>
+                <a:latin typeface="Calibri" pitchFamily="34" charset="0"/>
+                <a:ea typeface="Calibri" pitchFamily="34" charset="-122"/>
+                <a:cs typeface="Calibri" pitchFamily="34" charset="-120"/>
+              </a:rPr>
+              <a:t>и волны</a:t>
+            </a:r>
+            <a:endParaRPr lang="en-US" sz="1250" dirty="0"/>
+          </a:p>
+        </p:txBody>
+      </p:sp>
+      <p:sp>
+        <p:nvSpPr>
+          <p:cNvPr id="15" name="Text 13"/>
+          <p:cNvSpPr txBox="1"/>
+          <p:nvPr/>
+        </p:nvSpPr>
+        <p:spPr>
+          <a:xfrm>
+            <a:off x="2743200" y="3300984"/>
+            <a:ext cx="1783080" cy="256032"/>
+          </a:xfrm>
+          <a:prstGeom prst="rect">
+            <a:avLst/>
+          </a:prstGeom>
+          <a:noFill/>
+          <a:ln/>
+        </p:spPr>
+        <p:txBody>
+          <a:bodyPr wrap="square" lIns="0" tIns="0" rIns="0" bIns="0" rtlCol="0" anchor="ctr"/>
+          <a:lstStyle/>
+          <a:p>
+            <a:pPr algn="ctr" indent="0" marL="0">
+              <a:buNone/>
+            </a:pPr>
+            <a:r>
+              <a:rPr lang="en-US" sz="1000" b="1" dirty="0">
+                <a:solidFill>
+                  <a:srgbClr val="C97A1A"/>
+                </a:solidFill>
+                <a:latin typeface="Calibri" pitchFamily="34" charset="0"/>
+                <a:ea typeface="Calibri" pitchFamily="34" charset="-122"/>
+                <a:cs typeface="Calibri" pitchFamily="34" charset="-120"/>
+              </a:rPr>
+              <a:t>Разработчик</a:t>
+            </a:r>
+            <a:endParaRPr lang="en-US" sz="1000" dirty="0"/>
+          </a:p>
+        </p:txBody>
+      </p:sp>
+      <p:sp>
+        <p:nvSpPr>
+          <p:cNvPr id="16" name="Shape 14"/>
+          <p:cNvSpPr/>
+          <p:nvPr/>
+        </p:nvSpPr>
+        <p:spPr>
+          <a:xfrm>
+            <a:off x="4626864" y="2674620"/>
+            <a:ext cx="164592" cy="182880"/>
+          </a:xfrm>
+          <a:prstGeom prst="chevron">
+            <a:avLst/>
+          </a:prstGeom>
+          <a:solidFill>
+            <a:srgbClr val="8C99A6"/>
+          </a:solidFill>
+          <a:ln/>
+        </p:spPr>
+      </p:sp>
+      <p:sp>
+        <p:nvSpPr>
+          <p:cNvPr id="17" name="Shape 15"/>
+          <p:cNvSpPr/>
+          <p:nvPr/>
+        </p:nvSpPr>
+        <p:spPr>
+          <a:xfrm>
+            <a:off x="4800600" y="1920240"/>
+            <a:ext cx="1965960" cy="1691640"/>
+          </a:xfrm>
+          <a:prstGeom prst="roundRect">
+            <a:avLst>
+              <a:gd name="adj" fmla="val 4324"/>
+            </a:avLst>
+          </a:prstGeom>
+          <a:solidFill>
+            <a:srgbClr val="F4F6F7"/>
+          </a:solidFill>
+          <a:ln w="19050">
+            <a:solidFill>
+              <a:srgbClr val="5B6B7A"/>
+            </a:solidFill>
+            <a:prstDash val="solid"/>
+          </a:ln>
+        </p:spPr>
+      </p:sp>
+      <p:sp>
+        <p:nvSpPr>
+          <p:cNvPr id="18" name="Shape 16"/>
+          <p:cNvSpPr/>
+          <p:nvPr/>
+        </p:nvSpPr>
+        <p:spPr>
+          <a:xfrm>
+            <a:off x="5527548" y="2103120"/>
+            <a:ext cx="512064" cy="512064"/>
+          </a:xfrm>
+          <a:prstGeom prst="ellipse">
+            <a:avLst/>
+          </a:prstGeom>
+          <a:solidFill>
+            <a:srgbClr val="5B6B7A"/>
+          </a:solidFill>
+          <a:ln/>
+        </p:spPr>
+      </p:sp>
+      <p:sp>
+        <p:nvSpPr>
+          <p:cNvPr id="19" name="Text 17"/>
+          <p:cNvSpPr txBox="1"/>
+          <p:nvPr/>
+        </p:nvSpPr>
+        <p:spPr>
+          <a:xfrm>
+            <a:off x="5527548" y="2103120"/>
+            <a:ext cx="512064" cy="512064"/>
+          </a:xfrm>
+          <a:prstGeom prst="rect">
+            <a:avLst/>
+          </a:prstGeom>
+          <a:noFill/>
+          <a:ln/>
+        </p:spPr>
+        <p:txBody>
+          <a:bodyPr wrap="square" lIns="0" tIns="0" rIns="0" bIns="0" rtlCol="0" anchor="ctr"/>
+          <a:lstStyle/>
+          <a:p>
+            <a:pPr algn="ctr" indent="0" marL="0">
+              <a:buNone/>
+            </a:pPr>
+            <a:r>
+              <a:rPr lang="en-US" sz="1700" b="1" dirty="0">
+                <a:solidFill>
+                  <a:srgbClr val="FFFFFF"/>
+                </a:solidFill>
+                <a:latin typeface="Cambria" pitchFamily="34" charset="0"/>
+                <a:ea typeface="Cambria" pitchFamily="34" charset="-122"/>
+                <a:cs typeface="Cambria" pitchFamily="34" charset="-120"/>
+              </a:rPr>
+              <a:t>П3</a:t>
+            </a:r>
+            <a:endParaRPr lang="en-US" sz="1700" dirty="0"/>
+          </a:p>
+        </p:txBody>
+      </p:sp>
+      <p:sp>
+        <p:nvSpPr>
+          <p:cNvPr id="20" name="Text 18"/>
+          <p:cNvSpPr txBox="1"/>
+          <p:nvPr/>
+        </p:nvSpPr>
+        <p:spPr>
+          <a:xfrm>
+            <a:off x="4892040" y="2706624"/>
+            <a:ext cx="1783080" cy="594360"/>
+          </a:xfrm>
+          <a:prstGeom prst="rect">
+            <a:avLst/>
+          </a:prstGeom>
+          <a:noFill/>
+          <a:ln/>
+        </p:spPr>
+        <p:txBody>
+          <a:bodyPr wrap="square" lIns="0" tIns="0" rIns="0" bIns="0" rtlCol="0" anchor="ctr"/>
+          <a:lstStyle/>
+          <a:p>
+            <a:pPr algn="ctr" indent="0" marL="0">
+              <a:lnSpc>
+                <a:spcPct val="105000"/>
+              </a:lnSpc>
+              <a:buNone/>
+            </a:pPr>
+            <a:r>
+              <a:rPr lang="en-US" sz="1250" b="1" dirty="0">
+                <a:solidFill>
+                  <a:srgbClr val="1A2733"/>
+                </a:solidFill>
+                <a:latin typeface="Calibri" pitchFamily="34" charset="0"/>
+                <a:ea typeface="Calibri" pitchFamily="34" charset="-122"/>
+                <a:cs typeface="Calibri" pitchFamily="34" charset="-120"/>
+              </a:rPr>
+              <a:t>Роллаут</a:t>
+            </a:r>
+            <a:endParaRPr lang="en-US" sz="1250" dirty="0"/>
+          </a:p>
+          <a:p>
+            <a:pPr algn="ctr" indent="0" marL="0">
+              <a:lnSpc>
+                <a:spcPct val="105000"/>
+              </a:lnSpc>
+              <a:buNone/>
+            </a:pPr>
+            <a:r>
+              <a:rPr lang="en-US" sz="1250" b="1" dirty="0">
+                <a:solidFill>
+                  <a:srgbClr val="1A2733"/>
+                </a:solidFill>
+                <a:latin typeface="Calibri" pitchFamily="34" charset="0"/>
+                <a:ea typeface="Calibri" pitchFamily="34" charset="-122"/>
+                <a:cs typeface="Calibri" pitchFamily="34" charset="-120"/>
+              </a:rPr>
+              <a:t>по волнам</a:t>
+            </a:r>
+            <a:endParaRPr lang="en-US" sz="1250" dirty="0"/>
+          </a:p>
+        </p:txBody>
+      </p:sp>
+      <p:sp>
+        <p:nvSpPr>
+          <p:cNvPr id="21" name="Text 19"/>
+          <p:cNvSpPr txBox="1"/>
+          <p:nvPr/>
+        </p:nvSpPr>
+        <p:spPr>
+          <a:xfrm>
+            <a:off x="4892040" y="3300984"/>
+            <a:ext cx="1783080" cy="256032"/>
+          </a:xfrm>
+          <a:prstGeom prst="rect">
+            <a:avLst/>
+          </a:prstGeom>
+          <a:noFill/>
+          <a:ln/>
+        </p:spPr>
+        <p:txBody>
+          <a:bodyPr wrap="square" lIns="0" tIns="0" rIns="0" bIns="0" rtlCol="0" anchor="ctr"/>
+          <a:lstStyle/>
+          <a:p>
+            <a:pPr algn="ctr" indent="0" marL="0">
+              <a:buNone/>
+            </a:pPr>
+            <a:r>
+              <a:rPr lang="en-US" sz="1000" b="1" dirty="0">
+                <a:solidFill>
+                  <a:srgbClr val="5B6B7A"/>
+                </a:solidFill>
+                <a:latin typeface="Calibri" pitchFamily="34" charset="0"/>
+                <a:ea typeface="Calibri" pitchFamily="34" charset="-122"/>
+                <a:cs typeface="Calibri" pitchFamily="34" charset="-120"/>
+              </a:rPr>
+              <a:t>Аналитик + Разработчик</a:t>
+            </a:r>
+            <a:endParaRPr lang="en-US" sz="1000" dirty="0"/>
+          </a:p>
+        </p:txBody>
+      </p:sp>
+      <p:sp>
+        <p:nvSpPr>
+          <p:cNvPr id="22" name="Shape 20"/>
+          <p:cNvSpPr/>
+          <p:nvPr/>
+        </p:nvSpPr>
+        <p:spPr>
+          <a:xfrm>
+            <a:off x="6775704" y="2674620"/>
+            <a:ext cx="164592" cy="182880"/>
+          </a:xfrm>
+          <a:prstGeom prst="chevron">
+            <a:avLst/>
+          </a:prstGeom>
+          <a:solidFill>
+            <a:srgbClr val="8C99A6"/>
+          </a:solidFill>
+          <a:ln/>
+        </p:spPr>
+      </p:sp>
+      <p:sp>
+        <p:nvSpPr>
+          <p:cNvPr id="23" name="Shape 21"/>
+          <p:cNvSpPr/>
+          <p:nvPr/>
+        </p:nvSpPr>
+        <p:spPr>
+          <a:xfrm>
+            <a:off x="6949440" y="1920240"/>
+            <a:ext cx="1965960" cy="1691640"/>
+          </a:xfrm>
+          <a:prstGeom prst="roundRect">
+            <a:avLst>
+              <a:gd name="adj" fmla="val 4324"/>
+            </a:avLst>
+          </a:prstGeom>
+          <a:solidFill>
+            <a:srgbClr val="F4F6F7"/>
+          </a:solidFill>
+          <a:ln w="19050">
+            <a:solidFill>
+              <a:srgbClr val="1A2733"/>
+            </a:solidFill>
+            <a:prstDash val="solid"/>
+          </a:ln>
+        </p:spPr>
+      </p:sp>
+      <p:sp>
+        <p:nvSpPr>
+          <p:cNvPr id="24" name="Shape 22"/>
+          <p:cNvSpPr/>
+          <p:nvPr/>
+        </p:nvSpPr>
+        <p:spPr>
+          <a:xfrm>
+            <a:off x="7676388" y="2103120"/>
+            <a:ext cx="512064" cy="512064"/>
+          </a:xfrm>
+          <a:prstGeom prst="ellipse">
+            <a:avLst/>
+          </a:prstGeom>
+          <a:solidFill>
+            <a:srgbClr val="1A2733"/>
+          </a:solidFill>
+          <a:ln/>
+        </p:spPr>
+      </p:sp>
+      <p:sp>
+        <p:nvSpPr>
+          <p:cNvPr id="25" name="Text 23"/>
+          <p:cNvSpPr txBox="1"/>
+          <p:nvPr/>
+        </p:nvSpPr>
+        <p:spPr>
+          <a:xfrm>
+            <a:off x="7676388" y="2103120"/>
+            <a:ext cx="512064" cy="512064"/>
+          </a:xfrm>
+          <a:prstGeom prst="rect">
+            <a:avLst/>
+          </a:prstGeom>
+          <a:noFill/>
+          <a:ln/>
+        </p:spPr>
+        <p:txBody>
+          <a:bodyPr wrap="square" lIns="0" tIns="0" rIns="0" bIns="0" rtlCol="0" anchor="ctr"/>
+          <a:lstStyle/>
+          <a:p>
+            <a:pPr algn="ctr" indent="0" marL="0">
+              <a:buNone/>
+            </a:pPr>
+            <a:r>
+              <a:rPr lang="en-US" sz="1700" b="1" dirty="0">
+                <a:solidFill>
+                  <a:srgbClr val="FFFFFF"/>
+                </a:solidFill>
+                <a:latin typeface="Cambria" pitchFamily="34" charset="0"/>
+                <a:ea typeface="Cambria" pitchFamily="34" charset="-122"/>
+                <a:cs typeface="Cambria" pitchFamily="34" charset="-120"/>
+              </a:rPr>
+              <a:t>П4</a:t>
+            </a:r>
+            <a:endParaRPr lang="en-US" sz="1700" dirty="0"/>
+          </a:p>
+        </p:txBody>
+      </p:sp>
+      <p:sp>
+        <p:nvSpPr>
+          <p:cNvPr id="26" name="Text 24"/>
+          <p:cNvSpPr txBox="1"/>
+          <p:nvPr/>
+        </p:nvSpPr>
+        <p:spPr>
+          <a:xfrm>
+            <a:off x="7040880" y="2706624"/>
+            <a:ext cx="1783080" cy="594360"/>
+          </a:xfrm>
+          <a:prstGeom prst="rect">
+            <a:avLst/>
+          </a:prstGeom>
+          <a:noFill/>
+          <a:ln/>
+        </p:spPr>
+        <p:txBody>
+          <a:bodyPr wrap="square" lIns="0" tIns="0" rIns="0" bIns="0" rtlCol="0" anchor="ctr"/>
+          <a:lstStyle/>
+          <a:p>
+            <a:pPr algn="ctr" indent="0" marL="0">
+              <a:lnSpc>
+                <a:spcPct val="105000"/>
+              </a:lnSpc>
+              <a:buNone/>
+            </a:pPr>
+            <a:r>
+              <a:rPr lang="en-US" sz="1250" b="1" dirty="0">
+                <a:solidFill>
+                  <a:srgbClr val="1A2733"/>
+                </a:solidFill>
+                <a:latin typeface="Calibri" pitchFamily="34" charset="0"/>
+                <a:ea typeface="Calibri" pitchFamily="34" charset="-122"/>
+                <a:cs typeface="Calibri" pitchFamily="34" charset="-120"/>
+              </a:rPr>
+              <a:t>Промышленная</a:t>
+            </a:r>
+            <a:endParaRPr lang="en-US" sz="1250" dirty="0"/>
+          </a:p>
+          <a:p>
+            <a:pPr algn="ctr" indent="0" marL="0">
+              <a:lnSpc>
+                <a:spcPct val="105000"/>
+              </a:lnSpc>
+              <a:buNone/>
+            </a:pPr>
+            <a:r>
+              <a:rPr lang="en-US" sz="1250" b="1" dirty="0">
+                <a:solidFill>
+                  <a:srgbClr val="1A2733"/>
+                </a:solidFill>
+                <a:latin typeface="Calibri" pitchFamily="34" charset="0"/>
+                <a:ea typeface="Calibri" pitchFamily="34" charset="-122"/>
+                <a:cs typeface="Calibri" pitchFamily="34" charset="-120"/>
+              </a:rPr>
+              <a:t>эксплуатация</a:t>
+            </a:r>
+            <a:endParaRPr lang="en-US" sz="1250" dirty="0"/>
+          </a:p>
+        </p:txBody>
+      </p:sp>
+      <p:sp>
+        <p:nvSpPr>
+          <p:cNvPr id="27" name="Text 25"/>
+          <p:cNvSpPr txBox="1"/>
+          <p:nvPr/>
+        </p:nvSpPr>
+        <p:spPr>
+          <a:xfrm>
+            <a:off x="7040880" y="3300984"/>
+            <a:ext cx="1783080" cy="256032"/>
+          </a:xfrm>
+          <a:prstGeom prst="rect">
+            <a:avLst/>
+          </a:prstGeom>
+          <a:noFill/>
+          <a:ln/>
+        </p:spPr>
+        <p:txBody>
+          <a:bodyPr wrap="square" lIns="0" tIns="0" rIns="0" bIns="0" rtlCol="0" anchor="ctr"/>
+          <a:lstStyle/>
+          <a:p>
+            <a:pPr algn="ctr" indent="0" marL="0">
+              <a:buNone/>
+            </a:pPr>
+            <a:r>
+              <a:rPr lang="en-US" sz="1000" b="1" dirty="0">
+                <a:solidFill>
+                  <a:srgbClr val="1A2733"/>
+                </a:solidFill>
+                <a:latin typeface="Calibri" pitchFamily="34" charset="0"/>
+                <a:ea typeface="Calibri" pitchFamily="34" charset="-122"/>
+                <a:cs typeface="Calibri" pitchFamily="34" charset="-120"/>
+              </a:rPr>
+              <a:t>Эксплуатация</a:t>
+            </a:r>
+            <a:endParaRPr lang="en-US" sz="1000" dirty="0"/>
+          </a:p>
+        </p:txBody>
+      </p:sp>
+      <p:sp>
+        <p:nvSpPr>
+          <p:cNvPr id="28" name="Shape 26"/>
+          <p:cNvSpPr/>
+          <p:nvPr/>
+        </p:nvSpPr>
+        <p:spPr>
+          <a:xfrm>
+            <a:off x="8924544" y="2674620"/>
+            <a:ext cx="164592" cy="182880"/>
+          </a:xfrm>
+          <a:prstGeom prst="chevron">
+            <a:avLst/>
+          </a:prstGeom>
+          <a:solidFill>
+            <a:srgbClr val="8C99A6"/>
+          </a:solidFill>
+          <a:ln/>
+        </p:spPr>
+      </p:sp>
+      <p:sp>
+        <p:nvSpPr>
+          <p:cNvPr id="29" name="Shape 27"/>
+          <p:cNvSpPr/>
+          <p:nvPr/>
+        </p:nvSpPr>
+        <p:spPr>
+          <a:xfrm>
+            <a:off x="9098280" y="1920240"/>
+            <a:ext cx="1965960" cy="1691640"/>
+          </a:xfrm>
+          <a:prstGeom prst="roundRect">
+            <a:avLst>
+              <a:gd name="adj" fmla="val 4324"/>
+            </a:avLst>
+          </a:prstGeom>
+          <a:solidFill>
+            <a:srgbClr val="F4F6F7"/>
+          </a:solidFill>
+          <a:ln w="19050">
+            <a:solidFill>
+              <a:srgbClr val="5B6B7A"/>
+            </a:solidFill>
+            <a:prstDash val="solid"/>
+          </a:ln>
+        </p:spPr>
+      </p:sp>
+      <p:sp>
+        <p:nvSpPr>
+          <p:cNvPr id="30" name="Shape 28"/>
+          <p:cNvSpPr/>
+          <p:nvPr/>
+        </p:nvSpPr>
+        <p:spPr>
+          <a:xfrm>
+            <a:off x="9825228" y="2103120"/>
+            <a:ext cx="512064" cy="512064"/>
+          </a:xfrm>
+          <a:prstGeom prst="ellipse">
+            <a:avLst/>
+          </a:prstGeom>
+          <a:solidFill>
+            <a:srgbClr val="5B6B7A"/>
+          </a:solidFill>
+          <a:ln/>
+        </p:spPr>
+      </p:sp>
+      <p:sp>
+        <p:nvSpPr>
+          <p:cNvPr id="31" name="Text 29"/>
+          <p:cNvSpPr txBox="1"/>
+          <p:nvPr/>
+        </p:nvSpPr>
+        <p:spPr>
+          <a:xfrm>
+            <a:off x="9825228" y="2103120"/>
+            <a:ext cx="512064" cy="512064"/>
+          </a:xfrm>
+          <a:prstGeom prst="rect">
+            <a:avLst/>
+          </a:prstGeom>
+          <a:noFill/>
+          <a:ln/>
+        </p:spPr>
+        <p:txBody>
+          <a:bodyPr wrap="square" lIns="0" tIns="0" rIns="0" bIns="0" rtlCol="0" anchor="ctr"/>
+          <a:lstStyle/>
+          <a:p>
+            <a:pPr algn="ctr" indent="0" marL="0">
+              <a:buNone/>
+            </a:pPr>
+            <a:r>
+              <a:rPr lang="en-US" sz="1700" b="1" dirty="0">
+                <a:solidFill>
+                  <a:srgbClr val="FFFFFF"/>
+                </a:solidFill>
+                <a:latin typeface="Cambria" pitchFamily="34" charset="0"/>
+                <a:ea typeface="Cambria" pitchFamily="34" charset="-122"/>
+                <a:cs typeface="Cambria" pitchFamily="34" charset="-120"/>
+              </a:rPr>
+              <a:t>П5</a:t>
+            </a:r>
+            <a:endParaRPr lang="en-US" sz="1700" dirty="0"/>
+          </a:p>
+        </p:txBody>
+      </p:sp>
+      <p:sp>
+        <p:nvSpPr>
+          <p:cNvPr id="32" name="Text 30"/>
+          <p:cNvSpPr txBox="1"/>
+          <p:nvPr/>
+        </p:nvSpPr>
+        <p:spPr>
+          <a:xfrm>
+            <a:off x="9189720" y="2706624"/>
+            <a:ext cx="1783080" cy="594360"/>
+          </a:xfrm>
+          <a:prstGeom prst="rect">
+            <a:avLst/>
+          </a:prstGeom>
+          <a:noFill/>
+          <a:ln/>
+        </p:spPr>
+        <p:txBody>
+          <a:bodyPr wrap="square" lIns="0" tIns="0" rIns="0" bIns="0" rtlCol="0" anchor="ctr"/>
+          <a:lstStyle/>
+          <a:p>
+            <a:pPr algn="ctr" indent="0" marL="0">
+              <a:lnSpc>
+                <a:spcPct val="105000"/>
+              </a:lnSpc>
+              <a:buNone/>
+            </a:pPr>
+            <a:r>
+              <a:rPr lang="en-US" sz="1250" b="1" dirty="0">
+                <a:solidFill>
+                  <a:srgbClr val="1A2733"/>
+                </a:solidFill>
+                <a:latin typeface="Calibri" pitchFamily="34" charset="0"/>
+                <a:ea typeface="Calibri" pitchFamily="34" charset="-122"/>
+                <a:cs typeface="Calibri" pitchFamily="34" charset="-120"/>
+              </a:rPr>
+              <a:t>Постоянные</a:t>
+            </a:r>
+            <a:endParaRPr lang="en-US" sz="1250" dirty="0"/>
+          </a:p>
+          <a:p>
+            <a:pPr algn="ctr" indent="0" marL="0">
+              <a:lnSpc>
+                <a:spcPct val="105000"/>
+              </a:lnSpc>
+              <a:buNone/>
+            </a:pPr>
+            <a:r>
+              <a:rPr lang="en-US" sz="1250" b="1" dirty="0">
+                <a:solidFill>
+                  <a:srgbClr val="1A2733"/>
+                </a:solidFill>
+                <a:latin typeface="Calibri" pitchFamily="34" charset="0"/>
+                <a:ea typeface="Calibri" pitchFamily="34" charset="-122"/>
+                <a:cs typeface="Calibri" pitchFamily="34" charset="-120"/>
+              </a:rPr>
+              <a:t>улучшения</a:t>
+            </a:r>
+            <a:endParaRPr lang="en-US" sz="1250" dirty="0"/>
+          </a:p>
+        </p:txBody>
+      </p:sp>
+      <p:sp>
+        <p:nvSpPr>
+          <p:cNvPr id="33" name="Text 31"/>
+          <p:cNvSpPr txBox="1"/>
+          <p:nvPr/>
+        </p:nvSpPr>
+        <p:spPr>
+          <a:xfrm>
+            <a:off x="9189720" y="3300984"/>
+            <a:ext cx="1783080" cy="256032"/>
+          </a:xfrm>
+          <a:prstGeom prst="rect">
+            <a:avLst/>
+          </a:prstGeom>
+          <a:noFill/>
+          <a:ln/>
+        </p:spPr>
+        <p:txBody>
+          <a:bodyPr wrap="square" lIns="0" tIns="0" rIns="0" bIns="0" rtlCol="0" anchor="ctr"/>
+          <a:lstStyle/>
+          <a:p>
+            <a:pPr algn="ctr" indent="0" marL="0">
+              <a:buNone/>
+            </a:pPr>
+            <a:r>
+              <a:rPr lang="en-US" sz="1000" b="1" dirty="0">
+                <a:solidFill>
+                  <a:srgbClr val="5B6B7A"/>
+                </a:solidFill>
+                <a:latin typeface="Calibri" pitchFamily="34" charset="0"/>
+                <a:ea typeface="Calibri" pitchFamily="34" charset="-122"/>
+                <a:cs typeface="Calibri" pitchFamily="34" charset="-120"/>
+              </a:rPr>
+              <a:t>Аналитик + Разработчик</a:t>
+            </a:r>
+            <a:endParaRPr lang="en-US" sz="1000" dirty="0"/>
+          </a:p>
+        </p:txBody>
+      </p:sp>
+      <p:sp>
+        <p:nvSpPr>
+          <p:cNvPr id="34" name="Text 32"/>
+          <p:cNvSpPr txBox="1"/>
+          <p:nvPr/>
+        </p:nvSpPr>
+        <p:spPr>
+          <a:xfrm>
+            <a:off x="502920" y="3977640"/>
+            <a:ext cx="10607040" cy="320040"/>
+          </a:xfrm>
+          <a:prstGeom prst="rect">
+            <a:avLst/>
+          </a:prstGeom>
+          <a:noFill/>
+          <a:ln/>
+        </p:spPr>
+        <p:txBody>
+          <a:bodyPr wrap="square" lIns="0" tIns="0" rIns="0" bIns="0" rtlCol="0" anchor="ctr"/>
+          <a:lstStyle/>
+          <a:p>
             <a:pPr indent="0" marL="0">
-              <a:lnSpc>
-                <a:spcPct val="120000"/>
-              </a:lnSpc>
               <a:buNone/>
             </a:pPr>
             <a:r>
@@ -6191,7 +9421,7 @@
                 <a:ea typeface="Calibri" pitchFamily="34" charset="-122"/>
                 <a:cs typeface="Calibri" pitchFamily="34" charset="-120"/>
               </a:rPr>
-              <a:t>Пик аналитика — недели 6–7 (до 8,1 чел.-дн./нед., ~1,6 ФТЕ): пересечение фазы 6 «Цикл проверки фиксов» и фазы 7 «Оценка приёмки». Разработчик остаётся в пределах 1 ФТЕ весь пилот — пик на неделях 2–4 (интеграция), но не критичный.</a:t>
+              <a:t>П4 вводит новую роль — Эксплуатация/поддержка (SLA на инциденты), отдельную от А/Р пилота.</a:t>
             </a:r>
             <a:endParaRPr lang="en-US" sz="1200" dirty="0"/>
           </a:p>
@@ -6199,7 +9429,115 @@
       </p:sp>
       <p:sp>
         <p:nvSpPr>
-          <p:cNvPr id="7" name="Text 4"/>
+          <p:cNvPr id="35" name="Shape 33"/>
+          <p:cNvSpPr/>
+          <p:nvPr/>
+        </p:nvSpPr>
+        <p:spPr>
+          <a:xfrm>
+            <a:off x="502920" y="4526280"/>
+            <a:ext cx="10607040" cy="1371600"/>
+          </a:xfrm>
+          <a:prstGeom prst="roundRect">
+            <a:avLst>
+              <a:gd name="adj" fmla="val 5333"/>
+            </a:avLst>
+          </a:prstGeom>
+          <a:solidFill>
+            <a:srgbClr val="FBF3E7"/>
+          </a:solidFill>
+          <a:ln w="12700">
+            <a:solidFill>
+              <a:srgbClr val="C97A1A"/>
+            </a:solidFill>
+            <a:prstDash val="solid"/>
+          </a:ln>
+        </p:spPr>
+      </p:sp>
+      <p:sp>
+        <p:nvSpPr>
+          <p:cNvPr id="36" name="Text 34"/>
+          <p:cNvSpPr txBox="1"/>
+          <p:nvPr/>
+        </p:nvSpPr>
+        <p:spPr>
+          <a:xfrm>
+            <a:off x="777240" y="4709160"/>
+            <a:ext cx="10058400" cy="274320"/>
+          </a:xfrm>
+          <a:prstGeom prst="rect">
+            <a:avLst/>
+          </a:prstGeom>
+          <a:noFill/>
+          <a:ln/>
+        </p:spPr>
+        <p:txBody>
+          <a:bodyPr wrap="square" lIns="0" tIns="0" rIns="0" bIns="0" rtlCol="0" anchor="ctr"/>
+          <a:lstStyle/>
+          <a:p>
+            <a:pPr indent="0" marL="0">
+              <a:buNone/>
+            </a:pPr>
+            <a:r>
+              <a:rPr lang="en-US" sz="1100" b="1" spc="100" kern="0" dirty="0">
+                <a:solidFill>
+                  <a:srgbClr val="C97A1A"/>
+                </a:solidFill>
+                <a:latin typeface="Calibri" pitchFamily="34" charset="0"/>
+                <a:ea typeface="Calibri" pitchFamily="34" charset="-122"/>
+                <a:cs typeface="Calibri" pitchFamily="34" charset="-120"/>
+              </a:rPr>
+              <a:t>Честная оговорка</a:t>
+            </a:r>
+            <a:endParaRPr lang="en-US" sz="1100" dirty="0"/>
+          </a:p>
+        </p:txBody>
+      </p:sp>
+      <p:sp>
+        <p:nvSpPr>
+          <p:cNvPr id="37" name="Text 35"/>
+          <p:cNvSpPr txBox="1"/>
+          <p:nvPr/>
+        </p:nvSpPr>
+        <p:spPr>
+          <a:xfrm>
+            <a:off x="777240" y="5029200"/>
+            <a:ext cx="10058400" cy="777240"/>
+          </a:xfrm>
+          <a:prstGeom prst="rect">
+            <a:avLst/>
+          </a:prstGeom>
+          <a:noFill/>
+          <a:ln/>
+        </p:spPr>
+        <p:txBody>
+          <a:bodyPr wrap="square" lIns="0" tIns="0" rIns="0" bIns="0" rtlCol="0" anchor="ctr"/>
+          <a:lstStyle/>
+          <a:p>
+            <a:pPr indent="0" marL="0">
+              <a:lnSpc>
+                <a:spcPct val="125000"/>
+              </a:lnSpc>
+              <a:buNone/>
+            </a:pPr>
+            <a:r>
+              <a:rPr lang="en-US" sz="1200" dirty="0">
+                <a:solidFill>
+                  <a:srgbClr val="1A2733"/>
+                </a:solidFill>
+                <a:latin typeface="Calibri" pitchFamily="34" charset="0"/>
+                <a:ea typeface="Calibri" pitchFamily="34" charset="-122"/>
+                <a:cs typeface="Calibri" pitchFamily="34" charset="-120"/>
+              </a:rPr>
+              <a:t>Ни один заказчик в базе ещё не прошёл пилот до конца и не перешёл в проект — П1–П5 логически выведены из методики Кейса 1, а не реконструированы из факта. Поэтому здесь сознательно нет оценок трудоёмкости в чел.-днях.</a:t>
+            </a:r>
+            <a:endParaRPr lang="en-US" sz="1200" dirty="0"/>
+          </a:p>
+        </p:txBody>
+      </p:sp>
+      <p:sp>
+        <p:nvSpPr>
+          <p:cNvPr id="38" name="Text 36"/>
           <p:cNvSpPr txBox="1"/>
           <p:nvPr/>
         </p:nvSpPr>
@@ -6230,7 +9568,7 @@
                 <a:ea typeface="Calibri" pitchFamily="34" charset="-122"/>
                 <a:cs typeface="Calibri" pitchFamily="34" charset="-120"/>
               </a:rPr>
-              <a:t>4 / 6</a:t>
+              <a:t>4 / 8</a:t>
             </a:r>
             <a:endParaRPr lang="en-US" sz="1050" dirty="0"/>
           </a:p>
@@ -6294,7 +9632,7 @@
                 <a:ea typeface="Calibri" pitchFamily="34" charset="-122"/>
                 <a:cs typeface="Calibri" pitchFamily="34" charset="-120"/>
               </a:rPr>
-              <a:t>§4 — ВЫВОДЫ ПО ЗАГРУЗКЕ</a:t>
+              <a:t>КЕЙС 1 VS КЕЙС 2</a:t>
             </a:r>
             <a:endParaRPr lang="en-US" sz="1100" dirty="0"/>
           </a:p>
@@ -6308,7 +9646,7 @@
         </p:nvSpPr>
         <p:spPr>
           <a:xfrm>
-            <a:off x="502920" y="731520"/>
+            <a:off x="502920" y="658368"/>
             <a:ext cx="11155680" cy="566928"/>
           </a:xfrm>
           <a:prstGeom prst="rect">
@@ -6325,7 +9663,7 @@
               <a:buNone/>
             </a:pPr>
             <a:r>
-              <a:rPr lang="en-US" sz="3000" b="1" dirty="0">
+              <a:rPr lang="en-US" sz="2800" b="1" dirty="0">
                 <a:solidFill>
                   <a:srgbClr val="1A2733"/>
                 </a:solidFill>
@@ -6333,525 +9671,1434 @@
                 <a:ea typeface="Cambria" pitchFamily="34" charset="-122"/>
                 <a:cs typeface="Cambria" pitchFamily="34" charset="-120"/>
               </a:rPr>
-              <a:t>Что это значит для планирования следующего пилота</a:t>
+              <a:t>Чем проект отличается от пилота</a:t>
             </a:r>
-            <a:endParaRPr lang="en-US" sz="3000" dirty="0"/>
+            <a:endParaRPr lang="en-US" sz="2800" dirty="0"/>
           </a:p>
         </p:txBody>
       </p:sp>
-      <p:sp>
-        <p:nvSpPr>
-          <p:cNvPr id="4" name="Shape 2"/>
-          <p:cNvSpPr/>
-          <p:nvPr/>
-        </p:nvSpPr>
-        <p:spPr>
-          <a:xfrm>
-            <a:off x="502920" y="1783080"/>
-            <a:ext cx="3566160" cy="4206240"/>
-          </a:xfrm>
-          <a:prstGeom prst="roundRect">
-            <a:avLst>
-              <a:gd name="adj" fmla="val 2051"/>
-            </a:avLst>
-          </a:prstGeom>
-          <a:solidFill>
-            <a:srgbClr val="F4F6F7"/>
-          </a:solidFill>
-          <a:ln w="9525">
-            <a:solidFill>
-              <a:srgbClr val="D8DEE2"/>
-            </a:solidFill>
-            <a:prstDash val="solid"/>
-          </a:ln>
-        </p:spPr>
-      </p:sp>
-      <p:sp>
-        <p:nvSpPr>
-          <p:cNvPr id="5" name="Shape 3"/>
-          <p:cNvSpPr/>
-          <p:nvPr/>
-        </p:nvSpPr>
-        <p:spPr>
-          <a:xfrm>
-            <a:off x="777240" y="2057400"/>
-            <a:ext cx="548640" cy="548640"/>
-          </a:xfrm>
-          <a:prstGeom prst="ellipse">
-            <a:avLst/>
-          </a:prstGeom>
-          <a:solidFill>
-            <a:srgbClr val="0E7C86"/>
-          </a:solidFill>
-          <a:ln/>
-        </p:spPr>
-      </p:sp>
-      <p:sp>
-        <p:nvSpPr>
-          <p:cNvPr id="6" name="Text 4"/>
-          <p:cNvSpPr txBox="1"/>
-          <p:nvPr/>
-        </p:nvSpPr>
-        <p:spPr>
-          <a:xfrm>
-            <a:off x="777240" y="2057400"/>
-            <a:ext cx="548640" cy="548640"/>
-          </a:xfrm>
-          <a:prstGeom prst="rect">
-            <a:avLst/>
-          </a:prstGeom>
-          <a:noFill/>
-          <a:ln/>
-        </p:spPr>
-        <p:txBody>
-          <a:bodyPr wrap="square" lIns="0" tIns="0" rIns="0" bIns="0" rtlCol="0" anchor="ctr"/>
-          <a:lstStyle/>
-          <a:p>
-            <a:pPr algn="ctr" indent="0" marL="0">
-              <a:buNone/>
-            </a:pPr>
-            <a:r>
-              <a:rPr lang="en-US" sz="2000" b="1" dirty="0">
-                <a:solidFill>
-                  <a:srgbClr val="FFFFFF"/>
-                </a:solidFill>
-                <a:latin typeface="Cambria" pitchFamily="34" charset="0"/>
-                <a:ea typeface="Cambria" pitchFamily="34" charset="-122"/>
-                <a:cs typeface="Cambria" pitchFamily="34" charset="-120"/>
-              </a:rPr>
-              <a:t>1</a:t>
-            </a:r>
-            <a:endParaRPr lang="en-US" sz="2000" dirty="0"/>
-          </a:p>
-        </p:txBody>
-      </p:sp>
-      <p:sp>
-        <p:nvSpPr>
-          <p:cNvPr id="7" name="Text 5"/>
-          <p:cNvSpPr txBox="1"/>
-          <p:nvPr/>
-        </p:nvSpPr>
-        <p:spPr>
-          <a:xfrm>
-            <a:off x="777240" y="2834640"/>
-            <a:ext cx="3017520" cy="868680"/>
-          </a:xfrm>
-          <a:prstGeom prst="rect">
-            <a:avLst/>
-          </a:prstGeom>
-          <a:noFill/>
-          <a:ln/>
-        </p:spPr>
-        <p:txBody>
-          <a:bodyPr wrap="square" lIns="0" tIns="0" rIns="0" bIns="0" rtlCol="0" anchor="ctr"/>
-          <a:lstStyle/>
-          <a:p>
-            <a:pPr indent="0" marL="0">
-              <a:lnSpc>
-                <a:spcPct val="110000"/>
-              </a:lnSpc>
-              <a:buNone/>
-            </a:pPr>
-            <a:r>
-              <a:rPr lang="en-US" sz="1650" b="1" dirty="0">
-                <a:solidFill>
-                  <a:srgbClr val="1A2733"/>
-                </a:solidFill>
-                <a:latin typeface="Cambria" pitchFamily="34" charset="0"/>
-                <a:ea typeface="Cambria" pitchFamily="34" charset="-122"/>
-                <a:cs typeface="Cambria" pitchFamily="34" charset="-120"/>
-              </a:rPr>
-              <a:t>Аналитик — узкое место недель 6–7</a:t>
-            </a:r>
-            <a:endParaRPr lang="en-US" sz="1650" dirty="0"/>
-          </a:p>
-        </p:txBody>
-      </p:sp>
-      <p:sp>
-        <p:nvSpPr>
-          <p:cNvPr id="8" name="Text 6"/>
-          <p:cNvSpPr txBox="1"/>
-          <p:nvPr/>
-        </p:nvSpPr>
-        <p:spPr>
-          <a:xfrm>
-            <a:off x="777240" y="3749040"/>
-            <a:ext cx="3017520" cy="2011680"/>
-          </a:xfrm>
-          <a:prstGeom prst="rect">
-            <a:avLst/>
-          </a:prstGeom>
-          <a:noFill/>
-          <a:ln/>
-        </p:spPr>
-        <p:txBody>
-          <a:bodyPr wrap="square" lIns="0" tIns="0" rIns="0" bIns="0" rtlCol="0" anchor="ctr"/>
-          <a:lstStyle/>
-          <a:p>
-            <a:pPr indent="0" marL="0">
-              <a:lnSpc>
-                <a:spcPct val="125000"/>
-              </a:lnSpc>
-              <a:buNone/>
-            </a:pPr>
-            <a:r>
-              <a:rPr lang="en-US" sz="1200" dirty="0">
-                <a:solidFill>
-                  <a:srgbClr val="5B6B7A"/>
-                </a:solidFill>
-                <a:latin typeface="Calibri" pitchFamily="34" charset="0"/>
-                <a:ea typeface="Calibri" pitchFamily="34" charset="-122"/>
-                <a:cs typeface="Calibri" pitchFamily="34" charset="-120"/>
-              </a:rPr>
-              <a:t>Фазы 6 (перепроверка фиксов) и 7 (оценка приёмки) физически пересекаются по календарю — единственный аналитик не укладывается в 5-дневную неделю. Варианты: сдвинуть фазу 7 на неделю позже фазы 6, либо подключить второго аналитика на 1–2 недели точечно.</a:t>
-            </a:r>
-            <a:endParaRPr lang="en-US" sz="1200" dirty="0"/>
-          </a:p>
-        </p:txBody>
-      </p:sp>
-      <p:sp>
-        <p:nvSpPr>
-          <p:cNvPr id="9" name="Shape 7"/>
-          <p:cNvSpPr/>
-          <p:nvPr/>
-        </p:nvSpPr>
-        <p:spPr>
-          <a:xfrm>
-            <a:off x="4297680" y="1783080"/>
-            <a:ext cx="3566160" cy="4206240"/>
-          </a:xfrm>
-          <a:prstGeom prst="roundRect">
-            <a:avLst>
-              <a:gd name="adj" fmla="val 2051"/>
-            </a:avLst>
-          </a:prstGeom>
-          <a:solidFill>
-            <a:srgbClr val="F4F6F7"/>
-          </a:solidFill>
-          <a:ln w="9525">
-            <a:solidFill>
-              <a:srgbClr val="D8DEE2"/>
-            </a:solidFill>
-            <a:prstDash val="solid"/>
-          </a:ln>
-        </p:spPr>
-      </p:sp>
-      <p:sp>
-        <p:nvSpPr>
-          <p:cNvPr id="10" name="Shape 8"/>
-          <p:cNvSpPr/>
-          <p:nvPr/>
-        </p:nvSpPr>
-        <p:spPr>
-          <a:xfrm>
-            <a:off x="4572000" y="2057400"/>
-            <a:ext cx="548640" cy="548640"/>
-          </a:xfrm>
-          <a:prstGeom prst="ellipse">
-            <a:avLst/>
-          </a:prstGeom>
-          <a:solidFill>
-            <a:srgbClr val="0E7C86"/>
-          </a:solidFill>
-          <a:ln/>
-        </p:spPr>
-      </p:sp>
-      <p:sp>
-        <p:nvSpPr>
-          <p:cNvPr id="11" name="Text 9"/>
-          <p:cNvSpPr txBox="1"/>
-          <p:nvPr/>
-        </p:nvSpPr>
-        <p:spPr>
-          <a:xfrm>
-            <a:off x="4572000" y="2057400"/>
-            <a:ext cx="548640" cy="548640"/>
-          </a:xfrm>
-          <a:prstGeom prst="rect">
-            <a:avLst/>
-          </a:prstGeom>
-          <a:noFill/>
-          <a:ln/>
-        </p:spPr>
-        <p:txBody>
-          <a:bodyPr wrap="square" lIns="0" tIns="0" rIns="0" bIns="0" rtlCol="0" anchor="ctr"/>
-          <a:lstStyle/>
-          <a:p>
-            <a:pPr algn="ctr" indent="0" marL="0">
-              <a:buNone/>
-            </a:pPr>
-            <a:r>
-              <a:rPr lang="en-US" sz="2000" b="1" dirty="0">
-                <a:solidFill>
-                  <a:srgbClr val="FFFFFF"/>
-                </a:solidFill>
-                <a:latin typeface="Cambria" pitchFamily="34" charset="0"/>
-                <a:ea typeface="Cambria" pitchFamily="34" charset="-122"/>
-                <a:cs typeface="Cambria" pitchFamily="34" charset="-120"/>
-              </a:rPr>
-              <a:t>2</a:t>
-            </a:r>
-            <a:endParaRPr lang="en-US" sz="2000" dirty="0"/>
-          </a:p>
-        </p:txBody>
-      </p:sp>
-      <p:sp>
-        <p:nvSpPr>
-          <p:cNvPr id="12" name="Text 10"/>
-          <p:cNvSpPr txBox="1"/>
-          <p:nvPr/>
-        </p:nvSpPr>
-        <p:spPr>
-          <a:xfrm>
-            <a:off x="4572000" y="2834640"/>
-            <a:ext cx="3017520" cy="868680"/>
-          </a:xfrm>
-          <a:prstGeom prst="rect">
-            <a:avLst/>
-          </a:prstGeom>
-          <a:noFill/>
-          <a:ln/>
-        </p:spPr>
-        <p:txBody>
-          <a:bodyPr wrap="square" lIns="0" tIns="0" rIns="0" bIns="0" rtlCol="0" anchor="ctr"/>
-          <a:lstStyle/>
-          <a:p>
-            <a:pPr indent="0" marL="0">
-              <a:lnSpc>
-                <a:spcPct val="110000"/>
-              </a:lnSpc>
-              <a:buNone/>
-            </a:pPr>
-            <a:r>
-              <a:rPr lang="en-US" sz="1650" b="1" dirty="0">
-                <a:solidFill>
-                  <a:srgbClr val="1A2733"/>
-                </a:solidFill>
-                <a:latin typeface="Cambria" pitchFamily="34" charset="0"/>
-                <a:ea typeface="Cambria" pitchFamily="34" charset="-122"/>
-                <a:cs typeface="Cambria" pitchFamily="34" charset="-120"/>
-              </a:rPr>
-              <a:t>Разработчик не требует второй пары рук</a:t>
-            </a:r>
-            <a:endParaRPr lang="en-US" sz="1650" dirty="0"/>
-          </a:p>
-        </p:txBody>
-      </p:sp>
-      <p:sp>
-        <p:nvSpPr>
-          <p:cNvPr id="13" name="Text 11"/>
-          <p:cNvSpPr txBox="1"/>
-          <p:nvPr/>
-        </p:nvSpPr>
-        <p:spPr>
-          <a:xfrm>
-            <a:off x="4572000" y="3749040"/>
-            <a:ext cx="3017520" cy="2011680"/>
-          </a:xfrm>
-          <a:prstGeom prst="rect">
-            <a:avLst/>
-          </a:prstGeom>
-          <a:noFill/>
-          <a:ln/>
-        </p:spPr>
-        <p:txBody>
-          <a:bodyPr wrap="square" lIns="0" tIns="0" rIns="0" bIns="0" rtlCol="0" anchor="ctr"/>
-          <a:lstStyle/>
-          <a:p>
-            <a:pPr indent="0" marL="0">
-              <a:lnSpc>
-                <a:spcPct val="125000"/>
-              </a:lnSpc>
-              <a:buNone/>
-            </a:pPr>
-            <a:r>
-              <a:rPr lang="en-US" sz="1200" dirty="0">
-                <a:solidFill>
-                  <a:srgbClr val="5B6B7A"/>
-                </a:solidFill>
-                <a:latin typeface="Calibri" pitchFamily="34" charset="0"/>
-                <a:ea typeface="Calibri" pitchFamily="34" charset="-122"/>
-                <a:cs typeface="Calibri" pitchFamily="34" charset="-120"/>
-              </a:rPr>
-              <a:t>Даже на пике (недели 2–4, готовность интеграции) загрузка не превышает ~1 ФТЕ. Риск этой фазы — не в трудоёмкости, а в непредсказуемости срока (внешние блокеры на стороне заказчика), см. §2 методики.</a:t>
-            </a:r>
-            <a:endParaRPr lang="en-US" sz="1200" dirty="0"/>
-          </a:p>
-        </p:txBody>
-      </p:sp>
-      <p:sp>
-        <p:nvSpPr>
-          <p:cNvPr id="14" name="Shape 12"/>
-          <p:cNvSpPr/>
-          <p:nvPr/>
-        </p:nvSpPr>
-        <p:spPr>
-          <a:xfrm>
-            <a:off x="8092440" y="1783080"/>
-            <a:ext cx="3566160" cy="4206240"/>
-          </a:xfrm>
-          <a:prstGeom prst="roundRect">
-            <a:avLst>
-              <a:gd name="adj" fmla="val 2051"/>
-            </a:avLst>
-          </a:prstGeom>
-          <a:solidFill>
-            <a:srgbClr val="F4F6F7"/>
-          </a:solidFill>
-          <a:ln w="9525">
-            <a:solidFill>
-              <a:srgbClr val="D8DEE2"/>
-            </a:solidFill>
-            <a:prstDash val="solid"/>
-          </a:ln>
-        </p:spPr>
-      </p:sp>
-      <p:sp>
-        <p:nvSpPr>
-          <p:cNvPr id="15" name="Shape 13"/>
-          <p:cNvSpPr/>
-          <p:nvPr/>
-        </p:nvSpPr>
-        <p:spPr>
-          <a:xfrm>
-            <a:off x="8366760" y="2057400"/>
-            <a:ext cx="548640" cy="548640"/>
-          </a:xfrm>
-          <a:prstGeom prst="ellipse">
-            <a:avLst/>
-          </a:prstGeom>
-          <a:solidFill>
-            <a:srgbClr val="C97A1A"/>
-          </a:solidFill>
-          <a:ln/>
-        </p:spPr>
-      </p:sp>
-      <p:sp>
-        <p:nvSpPr>
-          <p:cNvPr id="16" name="Text 14"/>
-          <p:cNvSpPr txBox="1"/>
-          <p:nvPr/>
-        </p:nvSpPr>
-        <p:spPr>
-          <a:xfrm>
-            <a:off x="8366760" y="2057400"/>
-            <a:ext cx="548640" cy="548640"/>
-          </a:xfrm>
-          <a:prstGeom prst="rect">
-            <a:avLst/>
-          </a:prstGeom>
-          <a:noFill/>
-          <a:ln/>
-        </p:spPr>
-        <p:txBody>
-          <a:bodyPr wrap="square" lIns="0" tIns="0" rIns="0" bIns="0" rtlCol="0" anchor="ctr"/>
-          <a:lstStyle/>
-          <a:p>
-            <a:pPr algn="ctr" indent="0" marL="0">
-              <a:buNone/>
-            </a:pPr>
-            <a:r>
-              <a:rPr lang="en-US" sz="2000" b="1" dirty="0">
-                <a:solidFill>
-                  <a:srgbClr val="FFFFFF"/>
-                </a:solidFill>
-                <a:latin typeface="Cambria" pitchFamily="34" charset="0"/>
-                <a:ea typeface="Cambria" pitchFamily="34" charset="-122"/>
-                <a:cs typeface="Cambria" pitchFamily="34" charset="-120"/>
-              </a:rPr>
-              <a:t>3</a:t>
-            </a:r>
-            <a:endParaRPr lang="en-US" sz="2000" dirty="0"/>
-          </a:p>
-        </p:txBody>
-      </p:sp>
-      <p:sp>
-        <p:nvSpPr>
-          <p:cNvPr id="17" name="Text 15"/>
-          <p:cNvSpPr txBox="1"/>
-          <p:nvPr/>
-        </p:nvSpPr>
-        <p:spPr>
-          <a:xfrm>
-            <a:off x="8366760" y="2834640"/>
-            <a:ext cx="3017520" cy="868680"/>
-          </a:xfrm>
-          <a:prstGeom prst="rect">
-            <a:avLst/>
-          </a:prstGeom>
-          <a:noFill/>
-          <a:ln/>
-        </p:spPr>
-        <p:txBody>
-          <a:bodyPr wrap="square" lIns="0" tIns="0" rIns="0" bIns="0" rtlCol="0" anchor="ctr"/>
-          <a:lstStyle/>
-          <a:p>
-            <a:pPr indent="0" marL="0">
-              <a:lnSpc>
-                <a:spcPct val="110000"/>
-              </a:lnSpc>
-              <a:buNone/>
-            </a:pPr>
-            <a:r>
-              <a:rPr lang="en-US" sz="1650" b="1" dirty="0">
-                <a:solidFill>
-                  <a:srgbClr val="1A2733"/>
-                </a:solidFill>
-                <a:latin typeface="Cambria" pitchFamily="34" charset="0"/>
-                <a:ea typeface="Cambria" pitchFamily="34" charset="-122"/>
-                <a:cs typeface="Cambria" pitchFamily="34" charset="-120"/>
-              </a:rPr>
-              <a:t>Оценки — реконструкция, не факт</a:t>
-            </a:r>
-            <a:endParaRPr lang="en-US" sz="1650" dirty="0"/>
-          </a:p>
-        </p:txBody>
-      </p:sp>
-      <p:sp>
-        <p:nvSpPr>
-          <p:cNvPr id="18" name="Text 16"/>
-          <p:cNvSpPr txBox="1"/>
-          <p:nvPr/>
-        </p:nvSpPr>
-        <p:spPr>
-          <a:xfrm>
-            <a:off x="8366760" y="3749040"/>
-            <a:ext cx="3017520" cy="2011680"/>
-          </a:xfrm>
-          <a:prstGeom prst="rect">
-            <a:avLst/>
-          </a:prstGeom>
-          <a:noFill/>
-          <a:ln/>
-        </p:spPr>
-        <p:txBody>
-          <a:bodyPr wrap="square" lIns="0" tIns="0" rIns="0" bIns="0" rtlCol="0" anchor="ctr"/>
-          <a:lstStyle/>
-          <a:p>
-            <a:pPr indent="0" marL="0">
-              <a:lnSpc>
-                <a:spcPct val="125000"/>
-              </a:lnSpc>
-              <a:buNone/>
-            </a:pPr>
-            <a:r>
-              <a:rPr lang="en-US" sz="1200" dirty="0">
-                <a:solidFill>
-                  <a:srgbClr val="5B6B7A"/>
-                </a:solidFill>
-                <a:latin typeface="Calibri" pitchFamily="34" charset="0"/>
-                <a:ea typeface="Calibri" pitchFamily="34" charset="-122"/>
-                <a:cs typeface="Calibri" pitchFamily="34" charset="-120"/>
-              </a:rPr>
-              <a:t>Цифры выведены из хронологии файлов пилота Д8, не из прямого учёта часов. Первая проверка — сверить с фактическим временем на следующем клиенте и скорректировать веса по фазам.</a:t>
-            </a:r>
-            <a:endParaRPr lang="en-US" sz="1200" dirty="0"/>
-          </a:p>
-        </p:txBody>
-      </p:sp>
-      <p:sp>
-        <p:nvSpPr>
-          <p:cNvPr id="19" name="Text 17"/>
+      <p:graphicFrame>
+        <p:nvGraphicFramePr>
+          <p:cNvPr id="6" name="Table 0"/>
+          <p:cNvGraphicFramePr>
+            <a:graphicFrameLocks noGrp="1"/>
+          </p:cNvGraphicFramePr>
+          <p:nvPr>
+            <p:extLst>
+              <p:ext uri="{D42A27DB-BD31-4B8C-83A1-F6EECF244321}">
+                <p14:modId xmlns:p14="http://schemas.microsoft.com/office/powerpoint/2010/main" val="1579011935"/>
+              </p:ext>
+            </p:extLst>
+          </p:nvPr>
+        </p:nvGraphicFramePr>
+        <p:xfrm>
+          <a:off x="502920" y="1417320"/>
+          <a:ext cx="11155680" cy="4846320"/>
+        </p:xfrm>
+        <a:graphic>
+          <a:graphicData uri="http://schemas.openxmlformats.org/drawingml/2006/table">
+            <a:tbl>
+              <a:tblPr/>
+              <a:tblGrid>
+                <a:gridCol w="2377440"/>
+                <a:gridCol w="4389120"/>
+                <a:gridCol w="4389120"/>
+              </a:tblGrid>
+              <a:tr h="692331">
+                <a:tc>
+                  <a:txBody>
+                    <a:bodyPr/>
+                    <a:lstStyle/>
+                    <a:p>
+                      <a:pPr indent="0" marL="0">
+                        <a:buNone/>
+                      </a:pPr>
+                      <a:r>
+                        <a:rPr lang="en-US" sz="1200" b="1" dirty="0">
+                          <a:solidFill>
+                            <a:srgbClr val="FFFFFF"/>
+                          </a:solidFill>
+                          <a:latin typeface="Calibri" pitchFamily="34" charset="0"/>
+                          <a:ea typeface="Calibri" pitchFamily="34" charset="-122"/>
+                          <a:cs typeface="Calibri" pitchFamily="34" charset="-120"/>
+                        </a:rPr>
+                        <a:t>Параметр</a:t>
+                      </a:r>
+                      <a:endParaRPr lang="en-US" sz="1200" dirty="0">
+                        <a:latin typeface="Calibri" charset="0"/>
+                        <a:ea typeface="Calibri" charset="0"/>
+                        <a:cs typeface="Calibri" charset="0"/>
+                      </a:endParaRPr>
+                    </a:p>
+                  </a:txBody>
+                  <a:tcPr marL="127000" marR="127000" marT="76200" marB="76200" anchor="ctr">
+                    <a:lnL w="9525" cap="flat" cmpd="sng" algn="ctr">
+                      <a:solidFill>
+                        <a:srgbClr val="D8DEE2"/>
+                      </a:solidFill>
+                      <a:prstDash val="solid"/>
+                      <a:round/>
+                      <a:headEnd type="none" w="med" len="med"/>
+                      <a:tailEnd type="none" w="med" len="med"/>
+                    </a:lnL>
+                    <a:lnR w="9525" cap="flat" cmpd="sng" algn="ctr">
+                      <a:solidFill>
+                        <a:srgbClr val="D8DEE2"/>
+                      </a:solidFill>
+                      <a:prstDash val="solid"/>
+                      <a:round/>
+                      <a:headEnd type="none" w="med" len="med"/>
+                      <a:tailEnd type="none" w="med" len="med"/>
+                    </a:lnR>
+                    <a:lnT w="9525" cap="flat" cmpd="sng" algn="ctr">
+                      <a:solidFill>
+                        <a:srgbClr val="D8DEE2"/>
+                      </a:solidFill>
+                      <a:prstDash val="solid"/>
+                      <a:round/>
+                      <a:headEnd type="none" w="med" len="med"/>
+                      <a:tailEnd type="none" w="med" len="med"/>
+                    </a:lnT>
+                    <a:lnB w="9525" cap="flat" cmpd="sng" algn="ctr">
+                      <a:solidFill>
+                        <a:srgbClr val="D8DEE2"/>
+                      </a:solidFill>
+                      <a:prstDash val="solid"/>
+                      <a:round/>
+                      <a:headEnd type="none" w="med" len="med"/>
+                      <a:tailEnd type="none" w="med" len="med"/>
+                    </a:lnB>
+                    <a:solidFill>
+                      <a:srgbClr val="1A2733"/>
+                    </a:solidFill>
+                  </a:tcPr>
+                </a:tc>
+                <a:tc>
+                  <a:txBody>
+                    <a:bodyPr/>
+                    <a:lstStyle/>
+                    <a:p>
+                      <a:pPr indent="0" marL="0">
+                        <a:buNone/>
+                      </a:pPr>
+                      <a:r>
+                        <a:rPr lang="en-US" sz="1200" b="1" dirty="0">
+                          <a:solidFill>
+                            <a:srgbClr val="FFFFFF"/>
+                          </a:solidFill>
+                          <a:latin typeface="Calibri" pitchFamily="34" charset="0"/>
+                          <a:ea typeface="Calibri" pitchFamily="34" charset="-122"/>
+                          <a:cs typeface="Calibri" pitchFamily="34" charset="-120"/>
+                        </a:rPr>
+                        <a:t>Кейс 1 — Пилот</a:t>
+                      </a:r>
+                      <a:endParaRPr lang="en-US" sz="1200" dirty="0">
+                        <a:latin typeface="Calibri" charset="0"/>
+                        <a:ea typeface="Calibri" charset="0"/>
+                        <a:cs typeface="Calibri" charset="0"/>
+                      </a:endParaRPr>
+                    </a:p>
+                  </a:txBody>
+                  <a:tcPr marL="127000" marR="127000" marT="76200" marB="76200" anchor="ctr">
+                    <a:lnL w="9525" cap="flat" cmpd="sng" algn="ctr">
+                      <a:solidFill>
+                        <a:srgbClr val="D8DEE2"/>
+                      </a:solidFill>
+                      <a:prstDash val="solid"/>
+                      <a:round/>
+                      <a:headEnd type="none" w="med" len="med"/>
+                      <a:tailEnd type="none" w="med" len="med"/>
+                    </a:lnL>
+                    <a:lnR w="9525" cap="flat" cmpd="sng" algn="ctr">
+                      <a:solidFill>
+                        <a:srgbClr val="D8DEE2"/>
+                      </a:solidFill>
+                      <a:prstDash val="solid"/>
+                      <a:round/>
+                      <a:headEnd type="none" w="med" len="med"/>
+                      <a:tailEnd type="none" w="med" len="med"/>
+                    </a:lnR>
+                    <a:lnT w="9525" cap="flat" cmpd="sng" algn="ctr">
+                      <a:solidFill>
+                        <a:srgbClr val="D8DEE2"/>
+                      </a:solidFill>
+                      <a:prstDash val="solid"/>
+                      <a:round/>
+                      <a:headEnd type="none" w="med" len="med"/>
+                      <a:tailEnd type="none" w="med" len="med"/>
+                    </a:lnT>
+                    <a:lnB w="9525" cap="flat" cmpd="sng" algn="ctr">
+                      <a:solidFill>
+                        <a:srgbClr val="D8DEE2"/>
+                      </a:solidFill>
+                      <a:prstDash val="solid"/>
+                      <a:round/>
+                      <a:headEnd type="none" w="med" len="med"/>
+                      <a:tailEnd type="none" w="med" len="med"/>
+                    </a:lnB>
+                    <a:solidFill>
+                      <a:srgbClr val="0A5F67"/>
+                    </a:solidFill>
+                  </a:tcPr>
+                </a:tc>
+                <a:tc>
+                  <a:txBody>
+                    <a:bodyPr/>
+                    <a:lstStyle/>
+                    <a:p>
+                      <a:pPr indent="0" marL="0">
+                        <a:buNone/>
+                      </a:pPr>
+                      <a:r>
+                        <a:rPr lang="en-US" sz="1200" b="1" dirty="0">
+                          <a:solidFill>
+                            <a:srgbClr val="FFFFFF"/>
+                          </a:solidFill>
+                          <a:latin typeface="Calibri" pitchFamily="34" charset="0"/>
+                          <a:ea typeface="Calibri" pitchFamily="34" charset="-122"/>
+                          <a:cs typeface="Calibri" pitchFamily="34" charset="-120"/>
+                        </a:rPr>
+                        <a:t>Кейс 2 — Проект</a:t>
+                      </a:r>
+                      <a:endParaRPr lang="en-US" sz="1200" dirty="0">
+                        <a:latin typeface="Calibri" charset="0"/>
+                        <a:ea typeface="Calibri" charset="0"/>
+                        <a:cs typeface="Calibri" charset="0"/>
+                      </a:endParaRPr>
+                    </a:p>
+                  </a:txBody>
+                  <a:tcPr marL="127000" marR="127000" marT="76200" marB="76200" anchor="ctr">
+                    <a:lnL w="9525" cap="flat" cmpd="sng" algn="ctr">
+                      <a:solidFill>
+                        <a:srgbClr val="D8DEE2"/>
+                      </a:solidFill>
+                      <a:prstDash val="solid"/>
+                      <a:round/>
+                      <a:headEnd type="none" w="med" len="med"/>
+                      <a:tailEnd type="none" w="med" len="med"/>
+                    </a:lnL>
+                    <a:lnR w="9525" cap="flat" cmpd="sng" algn="ctr">
+                      <a:solidFill>
+                        <a:srgbClr val="D8DEE2"/>
+                      </a:solidFill>
+                      <a:prstDash val="solid"/>
+                      <a:round/>
+                      <a:headEnd type="none" w="med" len="med"/>
+                      <a:tailEnd type="none" w="med" len="med"/>
+                    </a:lnR>
+                    <a:lnT w="9525" cap="flat" cmpd="sng" algn="ctr">
+                      <a:solidFill>
+                        <a:srgbClr val="D8DEE2"/>
+                      </a:solidFill>
+                      <a:prstDash val="solid"/>
+                      <a:round/>
+                      <a:headEnd type="none" w="med" len="med"/>
+                      <a:tailEnd type="none" w="med" len="med"/>
+                    </a:lnT>
+                    <a:lnB w="9525" cap="flat" cmpd="sng" algn="ctr">
+                      <a:solidFill>
+                        <a:srgbClr val="D8DEE2"/>
+                      </a:solidFill>
+                      <a:prstDash val="solid"/>
+                      <a:round/>
+                      <a:headEnd type="none" w="med" len="med"/>
+                      <a:tailEnd type="none" w="med" len="med"/>
+                    </a:lnB>
+                    <a:solidFill>
+                      <a:srgbClr val="C97A1A"/>
+                    </a:solidFill>
+                  </a:tcPr>
+                </a:tc>
+              </a:tr>
+              <a:tr h="692331">
+                <a:tc>
+                  <a:txBody>
+                    <a:bodyPr/>
+                    <a:lstStyle/>
+                    <a:p>
+                      <a:pPr indent="0" marL="0">
+                        <a:buNone/>
+                      </a:pPr>
+                      <a:r>
+                        <a:rPr lang="en-US" sz="1200" b="1" dirty="0">
+                          <a:solidFill>
+                            <a:srgbClr val="1A2733"/>
+                          </a:solidFill>
+                          <a:latin typeface="Calibri" pitchFamily="34" charset="0"/>
+                          <a:ea typeface="Calibri" pitchFamily="34" charset="-122"/>
+                          <a:cs typeface="Calibri" pitchFamily="34" charset="-120"/>
+                        </a:rPr>
+                        <a:t>Скоуп</a:t>
+                      </a:r>
+                      <a:endParaRPr lang="en-US" sz="1200" dirty="0">
+                        <a:latin typeface="Calibri" charset="0"/>
+                        <a:ea typeface="Calibri" charset="0"/>
+                        <a:cs typeface="Calibri" charset="0"/>
+                      </a:endParaRPr>
+                    </a:p>
+                  </a:txBody>
+                  <a:tcPr marL="127000" marR="127000" marT="76200" marB="76200" anchor="ctr">
+                    <a:lnL w="9525" cap="flat" cmpd="sng" algn="ctr">
+                      <a:solidFill>
+                        <a:srgbClr val="D8DEE2"/>
+                      </a:solidFill>
+                      <a:prstDash val="solid"/>
+                      <a:round/>
+                      <a:headEnd type="none" w="med" len="med"/>
+                      <a:tailEnd type="none" w="med" len="med"/>
+                    </a:lnL>
+                    <a:lnR w="9525" cap="flat" cmpd="sng" algn="ctr">
+                      <a:solidFill>
+                        <a:srgbClr val="D8DEE2"/>
+                      </a:solidFill>
+                      <a:prstDash val="solid"/>
+                      <a:round/>
+                      <a:headEnd type="none" w="med" len="med"/>
+                      <a:tailEnd type="none" w="med" len="med"/>
+                    </a:lnR>
+                    <a:lnT w="9525" cap="flat" cmpd="sng" algn="ctr">
+                      <a:solidFill>
+                        <a:srgbClr val="D8DEE2"/>
+                      </a:solidFill>
+                      <a:prstDash val="solid"/>
+                      <a:round/>
+                      <a:headEnd type="none" w="med" len="med"/>
+                      <a:tailEnd type="none" w="med" len="med"/>
+                    </a:lnT>
+                    <a:lnB w="9525" cap="flat" cmpd="sng" algn="ctr">
+                      <a:solidFill>
+                        <a:srgbClr val="D8DEE2"/>
+                      </a:solidFill>
+                      <a:prstDash val="solid"/>
+                      <a:round/>
+                      <a:headEnd type="none" w="med" len="med"/>
+                      <a:tailEnd type="none" w="med" len="med"/>
+                    </a:lnB>
+                  </a:tcPr>
+                </a:tc>
+                <a:tc>
+                  <a:txBody>
+                    <a:bodyPr/>
+                    <a:lstStyle/>
+                    <a:p>
+                      <a:pPr indent="0" marL="0">
+                        <a:buNone/>
+                      </a:pPr>
+                      <a:r>
+                        <a:rPr lang="en-US" sz="1200" dirty="0">
+                          <a:solidFill>
+                            <a:srgbClr val="5B6B7A"/>
+                          </a:solidFill>
+                          <a:latin typeface="Calibri" pitchFamily="34" charset="0"/>
+                          <a:ea typeface="Calibri" pitchFamily="34" charset="-122"/>
+                          <a:cs typeface="Calibri" pitchFamily="34" charset="-120"/>
+                        </a:rPr>
+                        <a:t>Несколько источников, 2–5 ролей</a:t>
+                      </a:r>
+                      <a:endParaRPr lang="en-US" sz="1200" dirty="0">
+                        <a:latin typeface="Calibri" charset="0"/>
+                        <a:ea typeface="Calibri" charset="0"/>
+                        <a:cs typeface="Calibri" charset="0"/>
+                      </a:endParaRPr>
+                    </a:p>
+                  </a:txBody>
+                  <a:tcPr marL="127000" marR="127000" marT="76200" marB="76200" anchor="ctr">
+                    <a:lnL w="9525" cap="flat" cmpd="sng" algn="ctr">
+                      <a:solidFill>
+                        <a:srgbClr val="D8DEE2"/>
+                      </a:solidFill>
+                      <a:prstDash val="solid"/>
+                      <a:round/>
+                      <a:headEnd type="none" w="med" len="med"/>
+                      <a:tailEnd type="none" w="med" len="med"/>
+                    </a:lnL>
+                    <a:lnR w="9525" cap="flat" cmpd="sng" algn="ctr">
+                      <a:solidFill>
+                        <a:srgbClr val="D8DEE2"/>
+                      </a:solidFill>
+                      <a:prstDash val="solid"/>
+                      <a:round/>
+                      <a:headEnd type="none" w="med" len="med"/>
+                      <a:tailEnd type="none" w="med" len="med"/>
+                    </a:lnR>
+                    <a:lnT w="9525" cap="flat" cmpd="sng" algn="ctr">
+                      <a:solidFill>
+                        <a:srgbClr val="D8DEE2"/>
+                      </a:solidFill>
+                      <a:prstDash val="solid"/>
+                      <a:round/>
+                      <a:headEnd type="none" w="med" len="med"/>
+                      <a:tailEnd type="none" w="med" len="med"/>
+                    </a:lnT>
+                    <a:lnB w="9525" cap="flat" cmpd="sng" algn="ctr">
+                      <a:solidFill>
+                        <a:srgbClr val="D8DEE2"/>
+                      </a:solidFill>
+                      <a:prstDash val="solid"/>
+                      <a:round/>
+                      <a:headEnd type="none" w="med" len="med"/>
+                      <a:tailEnd type="none" w="med" len="med"/>
+                    </a:lnB>
+                  </a:tcPr>
+                </a:tc>
+                <a:tc>
+                  <a:txBody>
+                    <a:bodyPr/>
+                    <a:lstStyle/>
+                    <a:p>
+                      <a:pPr indent="0" marL="0">
+                        <a:buNone/>
+                      </a:pPr>
+                      <a:r>
+                        <a:rPr lang="en-US" sz="1200" dirty="0">
+                          <a:solidFill>
+                            <a:srgbClr val="5B6B7A"/>
+                          </a:solidFill>
+                          <a:latin typeface="Calibri" pitchFamily="34" charset="0"/>
+                          <a:ea typeface="Calibri" pitchFamily="34" charset="-122"/>
+                          <a:cs typeface="Calibri" pitchFamily="34" charset="-120"/>
+                        </a:rPr>
+                        <a:t>Все источники, все подразделения, все пользователи</a:t>
+                      </a:r>
+                      <a:endParaRPr lang="en-US" sz="1200" dirty="0">
+                        <a:latin typeface="Calibri" charset="0"/>
+                        <a:ea typeface="Calibri" charset="0"/>
+                        <a:cs typeface="Calibri" charset="0"/>
+                      </a:endParaRPr>
+                    </a:p>
+                  </a:txBody>
+                  <a:tcPr marL="127000" marR="127000" marT="76200" marB="76200" anchor="ctr">
+                    <a:lnL w="9525" cap="flat" cmpd="sng" algn="ctr">
+                      <a:solidFill>
+                        <a:srgbClr val="D8DEE2"/>
+                      </a:solidFill>
+                      <a:prstDash val="solid"/>
+                      <a:round/>
+                      <a:headEnd type="none" w="med" len="med"/>
+                      <a:tailEnd type="none" w="med" len="med"/>
+                    </a:lnL>
+                    <a:lnR w="9525" cap="flat" cmpd="sng" algn="ctr">
+                      <a:solidFill>
+                        <a:srgbClr val="D8DEE2"/>
+                      </a:solidFill>
+                      <a:prstDash val="solid"/>
+                      <a:round/>
+                      <a:headEnd type="none" w="med" len="med"/>
+                      <a:tailEnd type="none" w="med" len="med"/>
+                    </a:lnR>
+                    <a:lnT w="9525" cap="flat" cmpd="sng" algn="ctr">
+                      <a:solidFill>
+                        <a:srgbClr val="D8DEE2"/>
+                      </a:solidFill>
+                      <a:prstDash val="solid"/>
+                      <a:round/>
+                      <a:headEnd type="none" w="med" len="med"/>
+                      <a:tailEnd type="none" w="med" len="med"/>
+                    </a:lnT>
+                    <a:lnB w="9525" cap="flat" cmpd="sng" algn="ctr">
+                      <a:solidFill>
+                        <a:srgbClr val="D8DEE2"/>
+                      </a:solidFill>
+                      <a:prstDash val="solid"/>
+                      <a:round/>
+                      <a:headEnd type="none" w="med" len="med"/>
+                      <a:tailEnd type="none" w="med" len="med"/>
+                    </a:lnB>
+                  </a:tcPr>
+                </a:tc>
+              </a:tr>
+              <a:tr h="692331">
+                <a:tc>
+                  <a:txBody>
+                    <a:bodyPr/>
+                    <a:lstStyle/>
+                    <a:p>
+                      <a:pPr indent="0" marL="0">
+                        <a:buNone/>
+                      </a:pPr>
+                      <a:r>
+                        <a:rPr lang="en-US" sz="1200" b="1" dirty="0">
+                          <a:solidFill>
+                            <a:srgbClr val="1A2733"/>
+                          </a:solidFill>
+                          <a:latin typeface="Calibri" pitchFamily="34" charset="0"/>
+                          <a:ea typeface="Calibri" pitchFamily="34" charset="-122"/>
+                          <a:cs typeface="Calibri" pitchFamily="34" charset="-120"/>
+                        </a:rPr>
+                        <a:t>Команда</a:t>
+                      </a:r>
+                      <a:endParaRPr lang="en-US" sz="1200" dirty="0">
+                        <a:latin typeface="Calibri" charset="0"/>
+                        <a:ea typeface="Calibri" charset="0"/>
+                        <a:cs typeface="Calibri" charset="0"/>
+                      </a:endParaRPr>
+                    </a:p>
+                  </a:txBody>
+                  <a:tcPr marL="127000" marR="127000" marT="76200" marB="76200" anchor="ctr">
+                    <a:lnL w="9525" cap="flat" cmpd="sng" algn="ctr">
+                      <a:solidFill>
+                        <a:srgbClr val="D8DEE2"/>
+                      </a:solidFill>
+                      <a:prstDash val="solid"/>
+                      <a:round/>
+                      <a:headEnd type="none" w="med" len="med"/>
+                      <a:tailEnd type="none" w="med" len="med"/>
+                    </a:lnL>
+                    <a:lnR w="9525" cap="flat" cmpd="sng" algn="ctr">
+                      <a:solidFill>
+                        <a:srgbClr val="D8DEE2"/>
+                      </a:solidFill>
+                      <a:prstDash val="solid"/>
+                      <a:round/>
+                      <a:headEnd type="none" w="med" len="med"/>
+                      <a:tailEnd type="none" w="med" len="med"/>
+                    </a:lnR>
+                    <a:lnT w="9525" cap="flat" cmpd="sng" algn="ctr">
+                      <a:solidFill>
+                        <a:srgbClr val="D8DEE2"/>
+                      </a:solidFill>
+                      <a:prstDash val="solid"/>
+                      <a:round/>
+                      <a:headEnd type="none" w="med" len="med"/>
+                      <a:tailEnd type="none" w="med" len="med"/>
+                    </a:lnT>
+                    <a:lnB w="9525" cap="flat" cmpd="sng" algn="ctr">
+                      <a:solidFill>
+                        <a:srgbClr val="D8DEE2"/>
+                      </a:solidFill>
+                      <a:prstDash val="solid"/>
+                      <a:round/>
+                      <a:headEnd type="none" w="med" len="med"/>
+                      <a:tailEnd type="none" w="med" len="med"/>
+                    </a:lnB>
+                  </a:tcPr>
+                </a:tc>
+                <a:tc>
+                  <a:txBody>
+                    <a:bodyPr/>
+                    <a:lstStyle/>
+                    <a:p>
+                      <a:pPr indent="0" marL="0">
+                        <a:buNone/>
+                      </a:pPr>
+                      <a:r>
+                        <a:rPr lang="en-US" sz="1200" dirty="0">
+                          <a:solidFill>
+                            <a:srgbClr val="5B6B7A"/>
+                          </a:solidFill>
+                          <a:latin typeface="Calibri" pitchFamily="34" charset="0"/>
+                          <a:ea typeface="Calibri" pitchFamily="34" charset="-122"/>
+                          <a:cs typeface="Calibri" pitchFamily="34" charset="-120"/>
+                        </a:rPr>
+                        <a:t>1 аналитик + 1 разработчик, постоянно</a:t>
+                      </a:r>
+                      <a:endParaRPr lang="en-US" sz="1200" dirty="0">
+                        <a:latin typeface="Calibri" charset="0"/>
+                        <a:ea typeface="Calibri" charset="0"/>
+                        <a:cs typeface="Calibri" charset="0"/>
+                      </a:endParaRPr>
+                    </a:p>
+                  </a:txBody>
+                  <a:tcPr marL="127000" marR="127000" marT="76200" marB="76200" anchor="ctr">
+                    <a:lnL w="9525" cap="flat" cmpd="sng" algn="ctr">
+                      <a:solidFill>
+                        <a:srgbClr val="D8DEE2"/>
+                      </a:solidFill>
+                      <a:prstDash val="solid"/>
+                      <a:round/>
+                      <a:headEnd type="none" w="med" len="med"/>
+                      <a:tailEnd type="none" w="med" len="med"/>
+                    </a:lnL>
+                    <a:lnR w="9525" cap="flat" cmpd="sng" algn="ctr">
+                      <a:solidFill>
+                        <a:srgbClr val="D8DEE2"/>
+                      </a:solidFill>
+                      <a:prstDash val="solid"/>
+                      <a:round/>
+                      <a:headEnd type="none" w="med" len="med"/>
+                      <a:tailEnd type="none" w="med" len="med"/>
+                    </a:lnR>
+                    <a:lnT w="9525" cap="flat" cmpd="sng" algn="ctr">
+                      <a:solidFill>
+                        <a:srgbClr val="D8DEE2"/>
+                      </a:solidFill>
+                      <a:prstDash val="solid"/>
+                      <a:round/>
+                      <a:headEnd type="none" w="med" len="med"/>
+                      <a:tailEnd type="none" w="med" len="med"/>
+                    </a:lnT>
+                    <a:lnB w="9525" cap="flat" cmpd="sng" algn="ctr">
+                      <a:solidFill>
+                        <a:srgbClr val="D8DEE2"/>
+                      </a:solidFill>
+                      <a:prstDash val="solid"/>
+                      <a:round/>
+                      <a:headEnd type="none" w="med" len="med"/>
+                      <a:tailEnd type="none" w="med" len="med"/>
+                    </a:lnB>
+                  </a:tcPr>
+                </a:tc>
+                <a:tc>
+                  <a:txBody>
+                    <a:bodyPr/>
+                    <a:lstStyle/>
+                    <a:p>
+                      <a:pPr indent="0" marL="0">
+                        <a:buNone/>
+                      </a:pPr>
+                      <a:r>
+                        <a:rPr lang="en-US" sz="1200" dirty="0">
+                          <a:solidFill>
+                            <a:srgbClr val="5B6B7A"/>
+                          </a:solidFill>
+                          <a:latin typeface="Calibri" pitchFamily="34" charset="0"/>
+                          <a:ea typeface="Calibri" pitchFamily="34" charset="-122"/>
+                          <a:cs typeface="Calibri" pitchFamily="34" charset="-120"/>
+                        </a:rPr>
+                        <a:t>Растёт по волнам; часть делегируется заказчику; на П4 — выделенная эксплуатация</a:t>
+                      </a:r>
+                      <a:endParaRPr lang="en-US" sz="1200" dirty="0">
+                        <a:latin typeface="Calibri" charset="0"/>
+                        <a:ea typeface="Calibri" charset="0"/>
+                        <a:cs typeface="Calibri" charset="0"/>
+                      </a:endParaRPr>
+                    </a:p>
+                  </a:txBody>
+                  <a:tcPr marL="127000" marR="127000" marT="76200" marB="76200" anchor="ctr">
+                    <a:lnL w="9525" cap="flat" cmpd="sng" algn="ctr">
+                      <a:solidFill>
+                        <a:srgbClr val="D8DEE2"/>
+                      </a:solidFill>
+                      <a:prstDash val="solid"/>
+                      <a:round/>
+                      <a:headEnd type="none" w="med" len="med"/>
+                      <a:tailEnd type="none" w="med" len="med"/>
+                    </a:lnL>
+                    <a:lnR w="9525" cap="flat" cmpd="sng" algn="ctr">
+                      <a:solidFill>
+                        <a:srgbClr val="D8DEE2"/>
+                      </a:solidFill>
+                      <a:prstDash val="solid"/>
+                      <a:round/>
+                      <a:headEnd type="none" w="med" len="med"/>
+                      <a:tailEnd type="none" w="med" len="med"/>
+                    </a:lnR>
+                    <a:lnT w="9525" cap="flat" cmpd="sng" algn="ctr">
+                      <a:solidFill>
+                        <a:srgbClr val="D8DEE2"/>
+                      </a:solidFill>
+                      <a:prstDash val="solid"/>
+                      <a:round/>
+                      <a:headEnd type="none" w="med" len="med"/>
+                      <a:tailEnd type="none" w="med" len="med"/>
+                    </a:lnT>
+                    <a:lnB w="9525" cap="flat" cmpd="sng" algn="ctr">
+                      <a:solidFill>
+                        <a:srgbClr val="D8DEE2"/>
+                      </a:solidFill>
+                      <a:prstDash val="solid"/>
+                      <a:round/>
+                      <a:headEnd type="none" w="med" len="med"/>
+                      <a:tailEnd type="none" w="med" len="med"/>
+                    </a:lnB>
+                  </a:tcPr>
+                </a:tc>
+              </a:tr>
+              <a:tr h="692331">
+                <a:tc>
+                  <a:txBody>
+                    <a:bodyPr/>
+                    <a:lstStyle/>
+                    <a:p>
+                      <a:pPr indent="0" marL="0">
+                        <a:buNone/>
+                      </a:pPr>
+                      <a:r>
+                        <a:rPr lang="en-US" sz="1200" b="1" dirty="0">
+                          <a:solidFill>
+                            <a:srgbClr val="1A2733"/>
+                          </a:solidFill>
+                          <a:latin typeface="Calibri" pitchFamily="34" charset="0"/>
+                          <a:ea typeface="Calibri" pitchFamily="34" charset="-122"/>
+                          <a:cs typeface="Calibri" pitchFamily="34" charset="-120"/>
+                        </a:rPr>
+                        <a:t>Ритм</a:t>
+                      </a:r>
+                      <a:endParaRPr lang="en-US" sz="1200" dirty="0">
+                        <a:latin typeface="Calibri" charset="0"/>
+                        <a:ea typeface="Calibri" charset="0"/>
+                        <a:cs typeface="Calibri" charset="0"/>
+                      </a:endParaRPr>
+                    </a:p>
+                  </a:txBody>
+                  <a:tcPr marL="127000" marR="127000" marT="76200" marB="76200" anchor="ctr">
+                    <a:lnL w="9525" cap="flat" cmpd="sng" algn="ctr">
+                      <a:solidFill>
+                        <a:srgbClr val="D8DEE2"/>
+                      </a:solidFill>
+                      <a:prstDash val="solid"/>
+                      <a:round/>
+                      <a:headEnd type="none" w="med" len="med"/>
+                      <a:tailEnd type="none" w="med" len="med"/>
+                    </a:lnL>
+                    <a:lnR w="9525" cap="flat" cmpd="sng" algn="ctr">
+                      <a:solidFill>
+                        <a:srgbClr val="D8DEE2"/>
+                      </a:solidFill>
+                      <a:prstDash val="solid"/>
+                      <a:round/>
+                      <a:headEnd type="none" w="med" len="med"/>
+                      <a:tailEnd type="none" w="med" len="med"/>
+                    </a:lnR>
+                    <a:lnT w="9525" cap="flat" cmpd="sng" algn="ctr">
+                      <a:solidFill>
+                        <a:srgbClr val="D8DEE2"/>
+                      </a:solidFill>
+                      <a:prstDash val="solid"/>
+                      <a:round/>
+                      <a:headEnd type="none" w="med" len="med"/>
+                      <a:tailEnd type="none" w="med" len="med"/>
+                    </a:lnT>
+                    <a:lnB w="9525" cap="flat" cmpd="sng" algn="ctr">
+                      <a:solidFill>
+                        <a:srgbClr val="D8DEE2"/>
+                      </a:solidFill>
+                      <a:prstDash val="solid"/>
+                      <a:round/>
+                      <a:headEnd type="none" w="med" len="med"/>
+                      <a:tailEnd type="none" w="med" len="med"/>
+                    </a:lnB>
+                  </a:tcPr>
+                </a:tc>
+                <a:tc>
+                  <a:txBody>
+                    <a:bodyPr/>
+                    <a:lstStyle/>
+                    <a:p>
+                      <a:pPr indent="0" marL="0">
+                        <a:buNone/>
+                      </a:pPr>
+                      <a:r>
+                        <a:rPr lang="en-US" sz="1200" dirty="0">
+                          <a:solidFill>
+                            <a:srgbClr val="5B6B7A"/>
+                          </a:solidFill>
+                          <a:latin typeface="Calibri" pitchFamily="34" charset="0"/>
+                          <a:ea typeface="Calibri" pitchFamily="34" charset="-122"/>
+                          <a:cs typeface="Calibri" pitchFamily="34" charset="-120"/>
+                        </a:rPr>
+                        <a:t>Один цикл, ~6–8 недель</a:t>
+                      </a:r>
+                      <a:endParaRPr lang="en-US" sz="1200" dirty="0">
+                        <a:latin typeface="Calibri" charset="0"/>
+                        <a:ea typeface="Calibri" charset="0"/>
+                        <a:cs typeface="Calibri" charset="0"/>
+                      </a:endParaRPr>
+                    </a:p>
+                  </a:txBody>
+                  <a:tcPr marL="127000" marR="127000" marT="76200" marB="76200" anchor="ctr">
+                    <a:lnL w="9525" cap="flat" cmpd="sng" algn="ctr">
+                      <a:solidFill>
+                        <a:srgbClr val="D8DEE2"/>
+                      </a:solidFill>
+                      <a:prstDash val="solid"/>
+                      <a:round/>
+                      <a:headEnd type="none" w="med" len="med"/>
+                      <a:tailEnd type="none" w="med" len="med"/>
+                    </a:lnL>
+                    <a:lnR w="9525" cap="flat" cmpd="sng" algn="ctr">
+                      <a:solidFill>
+                        <a:srgbClr val="D8DEE2"/>
+                      </a:solidFill>
+                      <a:prstDash val="solid"/>
+                      <a:round/>
+                      <a:headEnd type="none" w="med" len="med"/>
+                      <a:tailEnd type="none" w="med" len="med"/>
+                    </a:lnR>
+                    <a:lnT w="9525" cap="flat" cmpd="sng" algn="ctr">
+                      <a:solidFill>
+                        <a:srgbClr val="D8DEE2"/>
+                      </a:solidFill>
+                      <a:prstDash val="solid"/>
+                      <a:round/>
+                      <a:headEnd type="none" w="med" len="med"/>
+                      <a:tailEnd type="none" w="med" len="med"/>
+                    </a:lnT>
+                    <a:lnB w="9525" cap="flat" cmpd="sng" algn="ctr">
+                      <a:solidFill>
+                        <a:srgbClr val="D8DEE2"/>
+                      </a:solidFill>
+                      <a:prstDash val="solid"/>
+                      <a:round/>
+                      <a:headEnd type="none" w="med" len="med"/>
+                      <a:tailEnd type="none" w="med" len="med"/>
+                    </a:lnB>
+                  </a:tcPr>
+                </a:tc>
+                <a:tc>
+                  <a:txBody>
+                    <a:bodyPr/>
+                    <a:lstStyle/>
+                    <a:p>
+                      <a:pPr indent="0" marL="0">
+                        <a:buNone/>
+                      </a:pPr>
+                      <a:r>
+                        <a:rPr lang="en-US" sz="1200" dirty="0">
+                          <a:solidFill>
+                            <a:srgbClr val="5B6B7A"/>
+                          </a:solidFill>
+                          <a:latin typeface="Calibri" pitchFamily="34" charset="0"/>
+                          <a:ea typeface="Calibri" pitchFamily="34" charset="-122"/>
+                          <a:cs typeface="Calibri" pitchFamily="34" charset="-120"/>
+                        </a:rPr>
+                        <a:t>Повторяющиеся волны + постоянный процесс без формального конца</a:t>
+                      </a:r>
+                      <a:endParaRPr lang="en-US" sz="1200" dirty="0">
+                        <a:latin typeface="Calibri" charset="0"/>
+                        <a:ea typeface="Calibri" charset="0"/>
+                        <a:cs typeface="Calibri" charset="0"/>
+                      </a:endParaRPr>
+                    </a:p>
+                  </a:txBody>
+                  <a:tcPr marL="127000" marR="127000" marT="76200" marB="76200" anchor="ctr">
+                    <a:lnL w="9525" cap="flat" cmpd="sng" algn="ctr">
+                      <a:solidFill>
+                        <a:srgbClr val="D8DEE2"/>
+                      </a:solidFill>
+                      <a:prstDash val="solid"/>
+                      <a:round/>
+                      <a:headEnd type="none" w="med" len="med"/>
+                      <a:tailEnd type="none" w="med" len="med"/>
+                    </a:lnL>
+                    <a:lnR w="9525" cap="flat" cmpd="sng" algn="ctr">
+                      <a:solidFill>
+                        <a:srgbClr val="D8DEE2"/>
+                      </a:solidFill>
+                      <a:prstDash val="solid"/>
+                      <a:round/>
+                      <a:headEnd type="none" w="med" len="med"/>
+                      <a:tailEnd type="none" w="med" len="med"/>
+                    </a:lnR>
+                    <a:lnT w="9525" cap="flat" cmpd="sng" algn="ctr">
+                      <a:solidFill>
+                        <a:srgbClr val="D8DEE2"/>
+                      </a:solidFill>
+                      <a:prstDash val="solid"/>
+                      <a:round/>
+                      <a:headEnd type="none" w="med" len="med"/>
+                      <a:tailEnd type="none" w="med" len="med"/>
+                    </a:lnT>
+                    <a:lnB w="9525" cap="flat" cmpd="sng" algn="ctr">
+                      <a:solidFill>
+                        <a:srgbClr val="D8DEE2"/>
+                      </a:solidFill>
+                      <a:prstDash val="solid"/>
+                      <a:round/>
+                      <a:headEnd type="none" w="med" len="med"/>
+                      <a:tailEnd type="none" w="med" len="med"/>
+                    </a:lnB>
+                  </a:tcPr>
+                </a:tc>
+              </a:tr>
+              <a:tr h="692331">
+                <a:tc>
+                  <a:txBody>
+                    <a:bodyPr/>
+                    <a:lstStyle/>
+                    <a:p>
+                      <a:pPr indent="0" marL="0">
+                        <a:buNone/>
+                      </a:pPr>
+                      <a:r>
+                        <a:rPr lang="en-US" sz="1200" b="1" dirty="0">
+                          <a:solidFill>
+                            <a:srgbClr val="1A2733"/>
+                          </a:solidFill>
+                          <a:latin typeface="Calibri" pitchFamily="34" charset="0"/>
+                          <a:ea typeface="Calibri" pitchFamily="34" charset="-122"/>
+                          <a:cs typeface="Calibri" pitchFamily="34" charset="-120"/>
+                        </a:rPr>
+                        <a:t>Критерий успеха</a:t>
+                      </a:r>
+                      <a:endParaRPr lang="en-US" sz="1200" dirty="0">
+                        <a:latin typeface="Calibri" charset="0"/>
+                        <a:ea typeface="Calibri" charset="0"/>
+                        <a:cs typeface="Calibri" charset="0"/>
+                      </a:endParaRPr>
+                    </a:p>
+                  </a:txBody>
+                  <a:tcPr marL="127000" marR="127000" marT="76200" marB="76200" anchor="ctr">
+                    <a:lnL w="9525" cap="flat" cmpd="sng" algn="ctr">
+                      <a:solidFill>
+                        <a:srgbClr val="D8DEE2"/>
+                      </a:solidFill>
+                      <a:prstDash val="solid"/>
+                      <a:round/>
+                      <a:headEnd type="none" w="med" len="med"/>
+                      <a:tailEnd type="none" w="med" len="med"/>
+                    </a:lnL>
+                    <a:lnR w="9525" cap="flat" cmpd="sng" algn="ctr">
+                      <a:solidFill>
+                        <a:srgbClr val="D8DEE2"/>
+                      </a:solidFill>
+                      <a:prstDash val="solid"/>
+                      <a:round/>
+                      <a:headEnd type="none" w="med" len="med"/>
+                      <a:tailEnd type="none" w="med" len="med"/>
+                    </a:lnR>
+                    <a:lnT w="9525" cap="flat" cmpd="sng" algn="ctr">
+                      <a:solidFill>
+                        <a:srgbClr val="D8DEE2"/>
+                      </a:solidFill>
+                      <a:prstDash val="solid"/>
+                      <a:round/>
+                      <a:headEnd type="none" w="med" len="med"/>
+                      <a:tailEnd type="none" w="med" len="med"/>
+                    </a:lnT>
+                    <a:lnB w="9525" cap="flat" cmpd="sng" algn="ctr">
+                      <a:solidFill>
+                        <a:srgbClr val="D8DEE2"/>
+                      </a:solidFill>
+                      <a:prstDash val="solid"/>
+                      <a:round/>
+                      <a:headEnd type="none" w="med" len="med"/>
+                      <a:tailEnd type="none" w="med" len="med"/>
+                    </a:lnB>
+                  </a:tcPr>
+                </a:tc>
+                <a:tc>
+                  <a:txBody>
+                    <a:bodyPr/>
+                    <a:lstStyle/>
+                    <a:p>
+                      <a:pPr indent="0" marL="0">
+                        <a:buNone/>
+                      </a:pPr>
+                      <a:r>
+                        <a:rPr lang="en-US" sz="1200" dirty="0">
+                          <a:solidFill>
+                            <a:srgbClr val="5B6B7A"/>
+                          </a:solidFill>
+                          <a:latin typeface="Calibri" pitchFamily="34" charset="0"/>
+                          <a:ea typeface="Calibri" pitchFamily="34" charset="-122"/>
+                          <a:cs typeface="Calibri" pitchFamily="34" charset="-120"/>
+                        </a:rPr>
+                        <a:t>pass/fail по пунктам ТЗ</a:t>
+                      </a:r>
+                      <a:endParaRPr lang="en-US" sz="1200" dirty="0">
+                        <a:latin typeface="Calibri" charset="0"/>
+                        <a:ea typeface="Calibri" charset="0"/>
+                        <a:cs typeface="Calibri" charset="0"/>
+                      </a:endParaRPr>
+                    </a:p>
+                  </a:txBody>
+                  <a:tcPr marL="127000" marR="127000" marT="76200" marB="76200" anchor="ctr">
+                    <a:lnL w="9525" cap="flat" cmpd="sng" algn="ctr">
+                      <a:solidFill>
+                        <a:srgbClr val="D8DEE2"/>
+                      </a:solidFill>
+                      <a:prstDash val="solid"/>
+                      <a:round/>
+                      <a:headEnd type="none" w="med" len="med"/>
+                      <a:tailEnd type="none" w="med" len="med"/>
+                    </a:lnL>
+                    <a:lnR w="9525" cap="flat" cmpd="sng" algn="ctr">
+                      <a:solidFill>
+                        <a:srgbClr val="D8DEE2"/>
+                      </a:solidFill>
+                      <a:prstDash val="solid"/>
+                      <a:round/>
+                      <a:headEnd type="none" w="med" len="med"/>
+                      <a:tailEnd type="none" w="med" len="med"/>
+                    </a:lnR>
+                    <a:lnT w="9525" cap="flat" cmpd="sng" algn="ctr">
+                      <a:solidFill>
+                        <a:srgbClr val="D8DEE2"/>
+                      </a:solidFill>
+                      <a:prstDash val="solid"/>
+                      <a:round/>
+                      <a:headEnd type="none" w="med" len="med"/>
+                      <a:tailEnd type="none" w="med" len="med"/>
+                    </a:lnT>
+                    <a:lnB w="9525" cap="flat" cmpd="sng" algn="ctr">
+                      <a:solidFill>
+                        <a:srgbClr val="D8DEE2"/>
+                      </a:solidFill>
+                      <a:prstDash val="solid"/>
+                      <a:round/>
+                      <a:headEnd type="none" w="med" len="med"/>
+                      <a:tailEnd type="none" w="med" len="med"/>
+                    </a:lnB>
+                  </a:tcPr>
+                </a:tc>
+                <a:tc>
+                  <a:txBody>
+                    <a:bodyPr/>
+                    <a:lstStyle/>
+                    <a:p>
+                      <a:pPr indent="0" marL="0">
+                        <a:buNone/>
+                      </a:pPr>
+                      <a:r>
+                        <a:rPr lang="en-US" sz="1200" dirty="0">
+                          <a:solidFill>
+                            <a:srgbClr val="5B6B7A"/>
+                          </a:solidFill>
+                          <a:latin typeface="Calibri" pitchFamily="34" charset="0"/>
+                          <a:ea typeface="Calibri" pitchFamily="34" charset="-122"/>
+                          <a:cs typeface="Calibri" pitchFamily="34" charset="-120"/>
+                        </a:rPr>
+                        <a:t>SLA и операционные метрики эксплуатации</a:t>
+                      </a:r>
+                      <a:endParaRPr lang="en-US" sz="1200" dirty="0">
+                        <a:latin typeface="Calibri" charset="0"/>
+                        <a:ea typeface="Calibri" charset="0"/>
+                        <a:cs typeface="Calibri" charset="0"/>
+                      </a:endParaRPr>
+                    </a:p>
+                  </a:txBody>
+                  <a:tcPr marL="127000" marR="127000" marT="76200" marB="76200" anchor="ctr">
+                    <a:lnL w="9525" cap="flat" cmpd="sng" algn="ctr">
+                      <a:solidFill>
+                        <a:srgbClr val="D8DEE2"/>
+                      </a:solidFill>
+                      <a:prstDash val="solid"/>
+                      <a:round/>
+                      <a:headEnd type="none" w="med" len="med"/>
+                      <a:tailEnd type="none" w="med" len="med"/>
+                    </a:lnL>
+                    <a:lnR w="9525" cap="flat" cmpd="sng" algn="ctr">
+                      <a:solidFill>
+                        <a:srgbClr val="D8DEE2"/>
+                      </a:solidFill>
+                      <a:prstDash val="solid"/>
+                      <a:round/>
+                      <a:headEnd type="none" w="med" len="med"/>
+                      <a:tailEnd type="none" w="med" len="med"/>
+                    </a:lnR>
+                    <a:lnT w="9525" cap="flat" cmpd="sng" algn="ctr">
+                      <a:solidFill>
+                        <a:srgbClr val="D8DEE2"/>
+                      </a:solidFill>
+                      <a:prstDash val="solid"/>
+                      <a:round/>
+                      <a:headEnd type="none" w="med" len="med"/>
+                      <a:tailEnd type="none" w="med" len="med"/>
+                    </a:lnT>
+                    <a:lnB w="9525" cap="flat" cmpd="sng" algn="ctr">
+                      <a:solidFill>
+                        <a:srgbClr val="D8DEE2"/>
+                      </a:solidFill>
+                      <a:prstDash val="solid"/>
+                      <a:round/>
+                      <a:headEnd type="none" w="med" len="med"/>
+                      <a:tailEnd type="none" w="med" len="med"/>
+                    </a:lnB>
+                  </a:tcPr>
+                </a:tc>
+              </a:tr>
+              <a:tr h="692331">
+                <a:tc>
+                  <a:txBody>
+                    <a:bodyPr/>
+                    <a:lstStyle/>
+                    <a:p>
+                      <a:pPr indent="0" marL="0">
+                        <a:buNone/>
+                      </a:pPr>
+                      <a:r>
+                        <a:rPr lang="en-US" sz="1200" b="1" dirty="0">
+                          <a:solidFill>
+                            <a:srgbClr val="1A2733"/>
+                          </a:solidFill>
+                          <a:latin typeface="Calibri" pitchFamily="34" charset="0"/>
+                          <a:ea typeface="Calibri" pitchFamily="34" charset="-122"/>
+                          <a:cs typeface="Calibri" pitchFamily="34" charset="-120"/>
+                        </a:rPr>
+                        <a:t>Ключевой артефакт</a:t>
+                      </a:r>
+                      <a:endParaRPr lang="en-US" sz="1200" dirty="0">
+                        <a:latin typeface="Calibri" charset="0"/>
+                        <a:ea typeface="Calibri" charset="0"/>
+                        <a:cs typeface="Calibri" charset="0"/>
+                      </a:endParaRPr>
+                    </a:p>
+                  </a:txBody>
+                  <a:tcPr marL="127000" marR="127000" marT="76200" marB="76200" anchor="ctr">
+                    <a:lnL w="9525" cap="flat" cmpd="sng" algn="ctr">
+                      <a:solidFill>
+                        <a:srgbClr val="D8DEE2"/>
+                      </a:solidFill>
+                      <a:prstDash val="solid"/>
+                      <a:round/>
+                      <a:headEnd type="none" w="med" len="med"/>
+                      <a:tailEnd type="none" w="med" len="med"/>
+                    </a:lnL>
+                    <a:lnR w="9525" cap="flat" cmpd="sng" algn="ctr">
+                      <a:solidFill>
+                        <a:srgbClr val="D8DEE2"/>
+                      </a:solidFill>
+                      <a:prstDash val="solid"/>
+                      <a:round/>
+                      <a:headEnd type="none" w="med" len="med"/>
+                      <a:tailEnd type="none" w="med" len="med"/>
+                    </a:lnR>
+                    <a:lnT w="9525" cap="flat" cmpd="sng" algn="ctr">
+                      <a:solidFill>
+                        <a:srgbClr val="D8DEE2"/>
+                      </a:solidFill>
+                      <a:prstDash val="solid"/>
+                      <a:round/>
+                      <a:headEnd type="none" w="med" len="med"/>
+                      <a:tailEnd type="none" w="med" len="med"/>
+                    </a:lnT>
+                    <a:lnB w="9525" cap="flat" cmpd="sng" algn="ctr">
+                      <a:solidFill>
+                        <a:srgbClr val="D8DEE2"/>
+                      </a:solidFill>
+                      <a:prstDash val="solid"/>
+                      <a:round/>
+                      <a:headEnd type="none" w="med" len="med"/>
+                      <a:tailEnd type="none" w="med" len="med"/>
+                    </a:lnB>
+                  </a:tcPr>
+                </a:tc>
+                <a:tc>
+                  <a:txBody>
+                    <a:bodyPr/>
+                    <a:lstStyle/>
+                    <a:p>
+                      <a:pPr indent="0" marL="0">
+                        <a:buNone/>
+                      </a:pPr>
+                      <a:r>
+                        <a:rPr lang="en-US" sz="1200" dirty="0">
+                          <a:solidFill>
+                            <a:srgbClr val="5B6B7A"/>
+                          </a:solidFill>
+                          <a:latin typeface="Calibri" pitchFamily="34" charset="0"/>
+                          <a:ea typeface="Calibri" pitchFamily="34" charset="-122"/>
+                          <a:cs typeface="Calibri" pitchFamily="34" charset="-120"/>
+                        </a:rPr>
+                        <a:t>Итоговый отчёт пилота (этап 8)</a:t>
+                      </a:r>
+                      <a:endParaRPr lang="en-US" sz="1200" dirty="0">
+                        <a:latin typeface="Calibri" charset="0"/>
+                        <a:ea typeface="Calibri" charset="0"/>
+                        <a:cs typeface="Calibri" charset="0"/>
+                      </a:endParaRPr>
+                    </a:p>
+                  </a:txBody>
+                  <a:tcPr marL="127000" marR="127000" marT="76200" marB="76200" anchor="ctr">
+                    <a:lnL w="9525" cap="flat" cmpd="sng" algn="ctr">
+                      <a:solidFill>
+                        <a:srgbClr val="D8DEE2"/>
+                      </a:solidFill>
+                      <a:prstDash val="solid"/>
+                      <a:round/>
+                      <a:headEnd type="none" w="med" len="med"/>
+                      <a:tailEnd type="none" w="med" len="med"/>
+                    </a:lnL>
+                    <a:lnR w="9525" cap="flat" cmpd="sng" algn="ctr">
+                      <a:solidFill>
+                        <a:srgbClr val="D8DEE2"/>
+                      </a:solidFill>
+                      <a:prstDash val="solid"/>
+                      <a:round/>
+                      <a:headEnd type="none" w="med" len="med"/>
+                      <a:tailEnd type="none" w="med" len="med"/>
+                    </a:lnR>
+                    <a:lnT w="9525" cap="flat" cmpd="sng" algn="ctr">
+                      <a:solidFill>
+                        <a:srgbClr val="D8DEE2"/>
+                      </a:solidFill>
+                      <a:prstDash val="solid"/>
+                      <a:round/>
+                      <a:headEnd type="none" w="med" len="med"/>
+                      <a:tailEnd type="none" w="med" len="med"/>
+                    </a:lnT>
+                    <a:lnB w="9525" cap="flat" cmpd="sng" algn="ctr">
+                      <a:solidFill>
+                        <a:srgbClr val="D8DEE2"/>
+                      </a:solidFill>
+                      <a:prstDash val="solid"/>
+                      <a:round/>
+                      <a:headEnd type="none" w="med" len="med"/>
+                      <a:tailEnd type="none" w="med" len="med"/>
+                    </a:lnB>
+                  </a:tcPr>
+                </a:tc>
+                <a:tc>
+                  <a:txBody>
+                    <a:bodyPr/>
+                    <a:lstStyle/>
+                    <a:p>
+                      <a:pPr indent="0" marL="0">
+                        <a:buNone/>
+                      </a:pPr>
+                      <a:r>
+                        <a:rPr lang="en-US" sz="1200" dirty="0">
+                          <a:solidFill>
+                            <a:srgbClr val="5B6B7A"/>
+                          </a:solidFill>
+                          <a:latin typeface="Calibri" pitchFamily="34" charset="0"/>
+                          <a:ea typeface="Calibri" pitchFamily="34" charset="-122"/>
+                          <a:cs typeface="Calibri" pitchFamily="34" charset="-120"/>
+                        </a:rPr>
+                        <a:t>Регламент эксплуатации + периодический отчёт</a:t>
+                      </a:r>
+                      <a:endParaRPr lang="en-US" sz="1200" dirty="0">
+                        <a:latin typeface="Calibri" charset="0"/>
+                        <a:ea typeface="Calibri" charset="0"/>
+                        <a:cs typeface="Calibri" charset="0"/>
+                      </a:endParaRPr>
+                    </a:p>
+                  </a:txBody>
+                  <a:tcPr marL="127000" marR="127000" marT="76200" marB="76200" anchor="ctr">
+                    <a:lnL w="9525" cap="flat" cmpd="sng" algn="ctr">
+                      <a:solidFill>
+                        <a:srgbClr val="D8DEE2"/>
+                      </a:solidFill>
+                      <a:prstDash val="solid"/>
+                      <a:round/>
+                      <a:headEnd type="none" w="med" len="med"/>
+                      <a:tailEnd type="none" w="med" len="med"/>
+                    </a:lnL>
+                    <a:lnR w="9525" cap="flat" cmpd="sng" algn="ctr">
+                      <a:solidFill>
+                        <a:srgbClr val="D8DEE2"/>
+                      </a:solidFill>
+                      <a:prstDash val="solid"/>
+                      <a:round/>
+                      <a:headEnd type="none" w="med" len="med"/>
+                      <a:tailEnd type="none" w="med" len="med"/>
+                    </a:lnR>
+                    <a:lnT w="9525" cap="flat" cmpd="sng" algn="ctr">
+                      <a:solidFill>
+                        <a:srgbClr val="D8DEE2"/>
+                      </a:solidFill>
+                      <a:prstDash val="solid"/>
+                      <a:round/>
+                      <a:headEnd type="none" w="med" len="med"/>
+                      <a:tailEnd type="none" w="med" len="med"/>
+                    </a:lnT>
+                    <a:lnB w="9525" cap="flat" cmpd="sng" algn="ctr">
+                      <a:solidFill>
+                        <a:srgbClr val="D8DEE2"/>
+                      </a:solidFill>
+                      <a:prstDash val="solid"/>
+                      <a:round/>
+                      <a:headEnd type="none" w="med" len="med"/>
+                      <a:tailEnd type="none" w="med" len="med"/>
+                    </a:lnB>
+                  </a:tcPr>
+                </a:tc>
+              </a:tr>
+              <a:tr h="692331">
+                <a:tc>
+                  <a:txBody>
+                    <a:bodyPr/>
+                    <a:lstStyle/>
+                    <a:p>
+                      <a:pPr indent="0" marL="0">
+                        <a:buNone/>
+                      </a:pPr>
+                      <a:r>
+                        <a:rPr lang="en-US" sz="1200" b="1" dirty="0">
+                          <a:solidFill>
+                            <a:srgbClr val="1A2733"/>
+                          </a:solidFill>
+                          <a:latin typeface="Calibri" pitchFamily="34" charset="0"/>
+                          <a:ea typeface="Calibri" pitchFamily="34" charset="-122"/>
+                          <a:cs typeface="Calibri" pitchFamily="34" charset="-120"/>
+                        </a:rPr>
+                        <a:t>Трудоёмкость</a:t>
+                      </a:r>
+                      <a:endParaRPr lang="en-US" sz="1200" dirty="0">
+                        <a:latin typeface="Calibri" charset="0"/>
+                        <a:ea typeface="Calibri" charset="0"/>
+                        <a:cs typeface="Calibri" charset="0"/>
+                      </a:endParaRPr>
+                    </a:p>
+                  </a:txBody>
+                  <a:tcPr marL="127000" marR="127000" marT="76200" marB="76200" anchor="ctr">
+                    <a:lnL w="9525" cap="flat" cmpd="sng" algn="ctr">
+                      <a:solidFill>
+                        <a:srgbClr val="D8DEE2"/>
+                      </a:solidFill>
+                      <a:prstDash val="solid"/>
+                      <a:round/>
+                      <a:headEnd type="none" w="med" len="med"/>
+                      <a:tailEnd type="none" w="med" len="med"/>
+                    </a:lnL>
+                    <a:lnR w="9525" cap="flat" cmpd="sng" algn="ctr">
+                      <a:solidFill>
+                        <a:srgbClr val="D8DEE2"/>
+                      </a:solidFill>
+                      <a:prstDash val="solid"/>
+                      <a:round/>
+                      <a:headEnd type="none" w="med" len="med"/>
+                      <a:tailEnd type="none" w="med" len="med"/>
+                    </a:lnR>
+                    <a:lnT w="9525" cap="flat" cmpd="sng" algn="ctr">
+                      <a:solidFill>
+                        <a:srgbClr val="D8DEE2"/>
+                      </a:solidFill>
+                      <a:prstDash val="solid"/>
+                      <a:round/>
+                      <a:headEnd type="none" w="med" len="med"/>
+                      <a:tailEnd type="none" w="med" len="med"/>
+                    </a:lnT>
+                    <a:lnB w="9525" cap="flat" cmpd="sng" algn="ctr">
+                      <a:solidFill>
+                        <a:srgbClr val="D8DEE2"/>
+                      </a:solidFill>
+                      <a:prstDash val="solid"/>
+                      <a:round/>
+                      <a:headEnd type="none" w="med" len="med"/>
+                      <a:tailEnd type="none" w="med" len="med"/>
+                    </a:lnB>
+                  </a:tcPr>
+                </a:tc>
+                <a:tc>
+                  <a:txBody>
+                    <a:bodyPr/>
+                    <a:lstStyle/>
+                    <a:p>
+                      <a:pPr indent="0" marL="0">
+                        <a:buNone/>
+                      </a:pPr>
+                      <a:r>
+                        <a:rPr lang="en-US" sz="1200" dirty="0">
+                          <a:solidFill>
+                            <a:srgbClr val="5B6B7A"/>
+                          </a:solidFill>
+                          <a:latin typeface="Calibri" pitchFamily="34" charset="0"/>
+                          <a:ea typeface="Calibri" pitchFamily="34" charset="-122"/>
+                          <a:cs typeface="Calibri" pitchFamily="34" charset="-120"/>
+                        </a:rPr>
+                        <a:t>Оценена (реконструкция по Д8)</a:t>
+                      </a:r>
+                      <a:endParaRPr lang="en-US" sz="1200" dirty="0">
+                        <a:latin typeface="Calibri" charset="0"/>
+                        <a:ea typeface="Calibri" charset="0"/>
+                        <a:cs typeface="Calibri" charset="0"/>
+                      </a:endParaRPr>
+                    </a:p>
+                  </a:txBody>
+                  <a:tcPr marL="127000" marR="127000" marT="76200" marB="76200" anchor="ctr">
+                    <a:lnL w="9525" cap="flat" cmpd="sng" algn="ctr">
+                      <a:solidFill>
+                        <a:srgbClr val="D8DEE2"/>
+                      </a:solidFill>
+                      <a:prstDash val="solid"/>
+                      <a:round/>
+                      <a:headEnd type="none" w="med" len="med"/>
+                      <a:tailEnd type="none" w="med" len="med"/>
+                    </a:lnL>
+                    <a:lnR w="9525" cap="flat" cmpd="sng" algn="ctr">
+                      <a:solidFill>
+                        <a:srgbClr val="D8DEE2"/>
+                      </a:solidFill>
+                      <a:prstDash val="solid"/>
+                      <a:round/>
+                      <a:headEnd type="none" w="med" len="med"/>
+                      <a:tailEnd type="none" w="med" len="med"/>
+                    </a:lnR>
+                    <a:lnT w="9525" cap="flat" cmpd="sng" algn="ctr">
+                      <a:solidFill>
+                        <a:srgbClr val="D8DEE2"/>
+                      </a:solidFill>
+                      <a:prstDash val="solid"/>
+                      <a:round/>
+                      <a:headEnd type="none" w="med" len="med"/>
+                      <a:tailEnd type="none" w="med" len="med"/>
+                    </a:lnT>
+                    <a:lnB w="9525" cap="flat" cmpd="sng" algn="ctr">
+                      <a:solidFill>
+                        <a:srgbClr val="D8DEE2"/>
+                      </a:solidFill>
+                      <a:prstDash val="solid"/>
+                      <a:round/>
+                      <a:headEnd type="none" w="med" len="med"/>
+                      <a:tailEnd type="none" w="med" len="med"/>
+                    </a:lnB>
+                  </a:tcPr>
+                </a:tc>
+                <a:tc>
+                  <a:txBody>
+                    <a:bodyPr/>
+                    <a:lstStyle/>
+                    <a:p>
+                      <a:pPr indent="0" marL="0">
+                        <a:buNone/>
+                      </a:pPr>
+                      <a:r>
+                        <a:rPr lang="en-US" sz="1200" dirty="0">
+                          <a:solidFill>
+                            <a:srgbClr val="5B6B7A"/>
+                          </a:solidFill>
+                          <a:latin typeface="Calibri" pitchFamily="34" charset="0"/>
+                          <a:ea typeface="Calibri" pitchFamily="34" charset="-122"/>
+                          <a:cs typeface="Calibri" pitchFamily="34" charset="-120"/>
+                        </a:rPr>
+                        <a:t>Не оценена — нет ни одного прецедента</a:t>
+                      </a:r>
+                      <a:endParaRPr lang="en-US" sz="1200" dirty="0">
+                        <a:latin typeface="Calibri" charset="0"/>
+                        <a:ea typeface="Calibri" charset="0"/>
+                        <a:cs typeface="Calibri" charset="0"/>
+                      </a:endParaRPr>
+                    </a:p>
+                  </a:txBody>
+                  <a:tcPr marL="127000" marR="127000" marT="76200" marB="76200" anchor="ctr">
+                    <a:lnL w="9525" cap="flat" cmpd="sng" algn="ctr">
+                      <a:solidFill>
+                        <a:srgbClr val="D8DEE2"/>
+                      </a:solidFill>
+                      <a:prstDash val="solid"/>
+                      <a:round/>
+                      <a:headEnd type="none" w="med" len="med"/>
+                      <a:tailEnd type="none" w="med" len="med"/>
+                    </a:lnL>
+                    <a:lnR w="9525" cap="flat" cmpd="sng" algn="ctr">
+                      <a:solidFill>
+                        <a:srgbClr val="D8DEE2"/>
+                      </a:solidFill>
+                      <a:prstDash val="solid"/>
+                      <a:round/>
+                      <a:headEnd type="none" w="med" len="med"/>
+                      <a:tailEnd type="none" w="med" len="med"/>
+                    </a:lnR>
+                    <a:lnT w="9525" cap="flat" cmpd="sng" algn="ctr">
+                      <a:solidFill>
+                        <a:srgbClr val="D8DEE2"/>
+                      </a:solidFill>
+                      <a:prstDash val="solid"/>
+                      <a:round/>
+                      <a:headEnd type="none" w="med" len="med"/>
+                      <a:tailEnd type="none" w="med" len="med"/>
+                    </a:lnT>
+                    <a:lnB w="9525" cap="flat" cmpd="sng" algn="ctr">
+                      <a:solidFill>
+                        <a:srgbClr val="D8DEE2"/>
+                      </a:solidFill>
+                      <a:prstDash val="solid"/>
+                      <a:round/>
+                      <a:headEnd type="none" w="med" len="med"/>
+                      <a:tailEnd type="none" w="med" len="med"/>
+                    </a:lnB>
+                  </a:tcPr>
+                </a:tc>
+              </a:tr>
+            </a:tbl>
+          </a:graphicData>
+        </a:graphic>
+      </p:graphicFrame>
+      <p:sp>
+        <p:nvSpPr>
+          <p:cNvPr id="5" name="Text 2"/>
           <p:cNvSpPr txBox="1"/>
           <p:nvPr/>
         </p:nvSpPr>
@@ -6882,7 +11129,7 @@
                 <a:ea typeface="Calibri" pitchFamily="34" charset="-122"/>
                 <a:cs typeface="Calibri" pitchFamily="34" charset="-120"/>
               </a:rPr>
-              <a:t>5 / 6</a:t>
+              <a:t>5 / 8</a:t>
             </a:r>
             <a:endParaRPr lang="en-US" sz="1050" dirty="0"/>
           </a:p>
@@ -6946,7 +11193,7 @@
                 <a:ea typeface="Calibri" pitchFamily="34" charset="-122"/>
                 <a:cs typeface="Calibri" pitchFamily="34" charset="-120"/>
               </a:rPr>
-              <a:t>§5 — ДАЛЬШЕ</a:t>
+              <a:t>КЕЙС 1 — ПИЛОТ · ПРИЛОЖЕНИЕ</a:t>
             </a:r>
             <a:endParaRPr lang="en-US" sz="1100" dirty="0"/>
           </a:p>
@@ -6960,7 +11207,7 @@
         </p:nvSpPr>
         <p:spPr>
           <a:xfrm>
-            <a:off x="502920" y="621792"/>
+            <a:off x="502920" y="658368"/>
             <a:ext cx="11155680" cy="566928"/>
           </a:xfrm>
           <a:prstGeom prst="rect">
@@ -6977,7 +11224,7 @@
               <a:buNone/>
             </a:pPr>
             <a:r>
-              <a:rPr lang="en-US" sz="3000" b="1" dirty="0">
+              <a:rPr lang="en-US" sz="2800" b="1" dirty="0">
                 <a:solidFill>
                   <a:srgbClr val="1A2733"/>
                 </a:solidFill>
@@ -6985,9 +11232,445 @@
                 <a:ea typeface="Cambria" pitchFamily="34" charset="-122"/>
                 <a:cs typeface="Cambria" pitchFamily="34" charset="-120"/>
               </a:rPr>
-              <a:t>Из методики — в переиспользуемые шаблоны</a:t>
+              <a:t>Диаграмма Ганта: 9 этапов на 8 неделях</a:t>
             </a:r>
-            <a:endParaRPr lang="en-US" sz="3000" dirty="0"/>
+            <a:endParaRPr lang="en-US" sz="2800" dirty="0"/>
+          </a:p>
+        </p:txBody>
+      </p:sp>
+      <p:sp>
+        <p:nvSpPr>
+          <p:cNvPr id="4" name="Text 2"/>
+          <p:cNvSpPr txBox="1"/>
+          <p:nvPr/>
+        </p:nvSpPr>
+        <p:spPr>
+          <a:xfrm>
+            <a:off x="502920" y="1225296"/>
+            <a:ext cx="11155680" cy="365760"/>
+          </a:xfrm>
+          <a:prstGeom prst="rect">
+            <a:avLst/>
+          </a:prstGeom>
+          <a:noFill/>
+          <a:ln/>
+        </p:spPr>
+        <p:txBody>
+          <a:bodyPr wrap="square" lIns="0" tIns="0" rIns="0" bIns="0" rtlCol="0" anchor="ctr"/>
+          <a:lstStyle/>
+          <a:p>
+            <a:pPr indent="0" marL="0">
+              <a:buNone/>
+            </a:pPr>
+            <a:r>
+              <a:rPr lang="en-US" sz="1350" dirty="0">
+                <a:solidFill>
+                  <a:srgbClr val="5B6B7A"/>
+                </a:solidFill>
+                <a:latin typeface="Calibri" pitchFamily="34" charset="0"/>
+                <a:ea typeface="Calibri" pitchFamily="34" charset="-122"/>
+                <a:cs typeface="Calibri" pitchFamily="34" charset="-120"/>
+              </a:rPr>
+              <a:t>Этапы 2–3 и 4–7 идут параллельно/итеративно, не строго друг за другом</a:t>
+            </a:r>
+            <a:endParaRPr lang="en-US" sz="1350" dirty="0"/>
+          </a:p>
+        </p:txBody>
+      </p:sp>
+      <p:graphicFrame>
+        <p:nvGraphicFramePr>
+          <p:cNvPr id="5" name="Chart 0" descr=""/>
+          <p:cNvGraphicFramePr/>
+          <p:nvPr/>
+        </p:nvGraphicFramePr>
+        <p:xfrm>
+          <a:off x="502920" y="1600200"/>
+          <a:ext cx="11155680" cy="4572000"/>
+        </p:xfrm>
+        <a:graphic xmlns:a="http://schemas.openxmlformats.org/drawingml/2006/main">
+          <a:graphicData uri="http://schemas.openxmlformats.org/drawingml/2006/chart">
+            <c:chart xmlns:c="http://schemas.openxmlformats.org/drawingml/2006/chart" r:id="rId1"/>
+          </a:graphicData>
+        </a:graphic>
+      </p:graphicFrame>
+      <p:sp>
+        <p:nvSpPr>
+          <p:cNvPr id="6" name="Text 3"/>
+          <p:cNvSpPr txBox="1"/>
+          <p:nvPr/>
+        </p:nvSpPr>
+        <p:spPr>
+          <a:xfrm>
+            <a:off x="10881360" y="6473952"/>
+            <a:ext cx="822960" cy="274320"/>
+          </a:xfrm>
+          <a:prstGeom prst="rect">
+            <a:avLst/>
+          </a:prstGeom>
+          <a:noFill/>
+          <a:ln/>
+        </p:spPr>
+        <p:txBody>
+          <a:bodyPr wrap="square" lIns="0" tIns="0" rIns="0" bIns="0" rtlCol="0" anchor="ctr"/>
+          <a:lstStyle/>
+          <a:p>
+            <a:pPr algn="r" indent="0" marL="0">
+              <a:buNone/>
+            </a:pPr>
+            <a:r>
+              <a:rPr lang="en-US" sz="1050" dirty="0">
+                <a:solidFill>
+                  <a:srgbClr val="8C99A6"/>
+                </a:solidFill>
+                <a:latin typeface="Calibri" pitchFamily="34" charset="0"/>
+                <a:ea typeface="Calibri" pitchFamily="34" charset="-122"/>
+                <a:cs typeface="Calibri" pitchFamily="34" charset="-120"/>
+              </a:rPr>
+              <a:t>6 / 8</a:t>
+            </a:r>
+            <a:endParaRPr lang="en-US" sz="1050" dirty="0"/>
+          </a:p>
+        </p:txBody>
+      </p:sp>
+    </p:spTree>
+  </p:cSld>
+  <p:clrMapOvr>
+    <a:masterClrMapping/>
+  </p:clrMapOvr>
+</p:sld>
+</file>
+
+<file path=ppt/slides/slide7.xml><?xml version="1.0" encoding="utf-8"?>
+<p:sld xmlns:a="http://schemas.openxmlformats.org/drawingml/2006/main" xmlns:r="http://schemas.openxmlformats.org/officeDocument/2006/relationships" xmlns:p="http://schemas.openxmlformats.org/presentationml/2006/main">
+  <p:cSld name="Slide 7">
+    <p:spTree>
+      <p:nvGrpSpPr>
+        <p:cNvPr id="1" name=""/>
+        <p:cNvGrpSpPr/>
+        <p:nvPr/>
+      </p:nvGrpSpPr>
+      <p:grpSpPr>
+        <a:xfrm>
+          <a:off x="0" y="0"/>
+          <a:ext cx="0" cy="0"/>
+          <a:chOff x="0" y="0"/>
+          <a:chExt cx="0" cy="0"/>
+        </a:xfrm>
+      </p:grpSpPr>
+      <p:sp>
+        <p:nvSpPr>
+          <p:cNvPr id="2" name="Text 0"/>
+          <p:cNvSpPr txBox="1"/>
+          <p:nvPr/>
+        </p:nvSpPr>
+        <p:spPr>
+          <a:xfrm>
+            <a:off x="502920" y="320040"/>
+            <a:ext cx="11155680" cy="274320"/>
+          </a:xfrm>
+          <a:prstGeom prst="rect">
+            <a:avLst/>
+          </a:prstGeom>
+          <a:noFill/>
+          <a:ln/>
+        </p:spPr>
+        <p:txBody>
+          <a:bodyPr wrap="square" lIns="0" tIns="0" rIns="0" bIns="0" rtlCol="0" anchor="ctr"/>
+          <a:lstStyle/>
+          <a:p>
+            <a:pPr indent="0" marL="0">
+              <a:buNone/>
+            </a:pPr>
+            <a:r>
+              <a:rPr lang="en-US" sz="1100" b="1" spc="120" kern="0" dirty="0">
+                <a:solidFill>
+                  <a:srgbClr val="0E7C86"/>
+                </a:solidFill>
+                <a:latin typeface="Calibri" pitchFamily="34" charset="0"/>
+                <a:ea typeface="Calibri" pitchFamily="34" charset="-122"/>
+                <a:cs typeface="Calibri" pitchFamily="34" charset="-120"/>
+              </a:rPr>
+              <a:t>КЕЙС 1 — ПИЛОТ · ПРИЛОЖЕНИЕ</a:t>
+            </a:r>
+            <a:endParaRPr lang="en-US" sz="1100" dirty="0"/>
+          </a:p>
+        </p:txBody>
+      </p:sp>
+      <p:sp>
+        <p:nvSpPr>
+          <p:cNvPr id="3" name="Text 1"/>
+          <p:cNvSpPr txBox="1"/>
+          <p:nvPr/>
+        </p:nvSpPr>
+        <p:spPr>
+          <a:xfrm>
+            <a:off x="502920" y="658368"/>
+            <a:ext cx="11155680" cy="566928"/>
+          </a:xfrm>
+          <a:prstGeom prst="rect">
+            <a:avLst/>
+          </a:prstGeom>
+          <a:noFill/>
+          <a:ln/>
+        </p:spPr>
+        <p:txBody>
+          <a:bodyPr wrap="square" lIns="0" tIns="0" rIns="0" bIns="0" rtlCol="0" anchor="ctr"/>
+          <a:lstStyle/>
+          <a:p>
+            <a:pPr indent="0" marL="0">
+              <a:buNone/>
+            </a:pPr>
+            <a:r>
+              <a:rPr lang="en-US" sz="2800" b="1" dirty="0">
+                <a:solidFill>
+                  <a:srgbClr val="1A2733"/>
+                </a:solidFill>
+                <a:latin typeface="Cambria" pitchFamily="34" charset="0"/>
+                <a:ea typeface="Cambria" pitchFamily="34" charset="-122"/>
+                <a:cs typeface="Cambria" pitchFamily="34" charset="-120"/>
+              </a:rPr>
+              <a:t>Пиковые загрузки по неделям</a:t>
+            </a:r>
+            <a:endParaRPr lang="en-US" sz="2800" dirty="0"/>
+          </a:p>
+        </p:txBody>
+      </p:sp>
+      <p:sp>
+        <p:nvSpPr>
+          <p:cNvPr id="4" name="Text 2"/>
+          <p:cNvSpPr txBox="1"/>
+          <p:nvPr/>
+        </p:nvSpPr>
+        <p:spPr>
+          <a:xfrm>
+            <a:off x="502920" y="1225296"/>
+            <a:ext cx="11155680" cy="365760"/>
+          </a:xfrm>
+          <a:prstGeom prst="rect">
+            <a:avLst/>
+          </a:prstGeom>
+          <a:noFill/>
+          <a:ln/>
+        </p:spPr>
+        <p:txBody>
+          <a:bodyPr wrap="square" lIns="0" tIns="0" rIns="0" bIns="0" rtlCol="0" anchor="ctr"/>
+          <a:lstStyle/>
+          <a:p>
+            <a:pPr indent="0" marL="0">
+              <a:buNone/>
+            </a:pPr>
+            <a:r>
+              <a:rPr lang="en-US" sz="1350" dirty="0">
+                <a:solidFill>
+                  <a:srgbClr val="5B6B7A"/>
+                </a:solidFill>
+                <a:latin typeface="Calibri" pitchFamily="34" charset="0"/>
+                <a:ea typeface="Calibri" pitchFamily="34" charset="-122"/>
+                <a:cs typeface="Calibri" pitchFamily="34" charset="-120"/>
+              </a:rPr>
+              <a:t>Чел.-дн. в неделю на роль · пунктир — потолок 1 ФТЕ (5 дн./нед.)</a:t>
+            </a:r>
+            <a:endParaRPr lang="en-US" sz="1350" dirty="0"/>
+          </a:p>
+        </p:txBody>
+      </p:sp>
+      <p:graphicFrame>
+        <p:nvGraphicFramePr>
+          <p:cNvPr id="5" name="Chart 0" descr=""/>
+          <p:cNvGraphicFramePr/>
+          <p:nvPr/>
+        </p:nvGraphicFramePr>
+        <p:xfrm>
+          <a:off x="502920" y="1600200"/>
+          <a:ext cx="11155680" cy="4114800"/>
+        </p:xfrm>
+        <a:graphic xmlns:a="http://schemas.openxmlformats.org/drawingml/2006/main">
+          <a:graphicData uri="http://schemas.openxmlformats.org/drawingml/2006/chart">
+            <c:chart xmlns:c="http://schemas.openxmlformats.org/drawingml/2006/chart" r:id="rId1"/>
+          </a:graphicData>
+        </a:graphic>
+      </p:graphicFrame>
+      <p:sp>
+        <p:nvSpPr>
+          <p:cNvPr id="6" name="Text 3"/>
+          <p:cNvSpPr txBox="1"/>
+          <p:nvPr/>
+        </p:nvSpPr>
+        <p:spPr>
+          <a:xfrm>
+            <a:off x="502920" y="5852160"/>
+            <a:ext cx="11155680" cy="502920"/>
+          </a:xfrm>
+          <a:prstGeom prst="rect">
+            <a:avLst/>
+          </a:prstGeom>
+          <a:noFill/>
+          <a:ln/>
+        </p:spPr>
+        <p:txBody>
+          <a:bodyPr wrap="square" lIns="0" tIns="0" rIns="0" bIns="0" rtlCol="0" anchor="ctr"/>
+          <a:lstStyle/>
+          <a:p>
+            <a:pPr indent="0" marL="0">
+              <a:lnSpc>
+                <a:spcPct val="120000"/>
+              </a:lnSpc>
+              <a:buNone/>
+            </a:pPr>
+            <a:r>
+              <a:rPr lang="en-US" sz="1200" dirty="0">
+                <a:solidFill>
+                  <a:srgbClr val="5B6B7A"/>
+                </a:solidFill>
+                <a:latin typeface="Calibri" pitchFamily="34" charset="0"/>
+                <a:ea typeface="Calibri" pitchFamily="34" charset="-122"/>
+                <a:cs typeface="Calibri" pitchFamily="34" charset="-120"/>
+              </a:rPr>
+              <a:t>Пик аналитика — недели 6–7 (пересечение этапов 6 и 7): вероятная точка, где стоит планировать второго аналитика точечно, в т.ч. на первых волнах Кейса 2.</a:t>
+            </a:r>
+            <a:endParaRPr lang="en-US" sz="1200" dirty="0"/>
+          </a:p>
+        </p:txBody>
+      </p:sp>
+      <p:sp>
+        <p:nvSpPr>
+          <p:cNvPr id="7" name="Text 4"/>
+          <p:cNvSpPr txBox="1"/>
+          <p:nvPr/>
+        </p:nvSpPr>
+        <p:spPr>
+          <a:xfrm>
+            <a:off x="10881360" y="6473952"/>
+            <a:ext cx="822960" cy="274320"/>
+          </a:xfrm>
+          <a:prstGeom prst="rect">
+            <a:avLst/>
+          </a:prstGeom>
+          <a:noFill/>
+          <a:ln/>
+        </p:spPr>
+        <p:txBody>
+          <a:bodyPr wrap="square" lIns="0" tIns="0" rIns="0" bIns="0" rtlCol="0" anchor="ctr"/>
+          <a:lstStyle/>
+          <a:p>
+            <a:pPr algn="r" indent="0" marL="0">
+              <a:buNone/>
+            </a:pPr>
+            <a:r>
+              <a:rPr lang="en-US" sz="1050" dirty="0">
+                <a:solidFill>
+                  <a:srgbClr val="8C99A6"/>
+                </a:solidFill>
+                <a:latin typeface="Calibri" pitchFamily="34" charset="0"/>
+                <a:ea typeface="Calibri" pitchFamily="34" charset="-122"/>
+                <a:cs typeface="Calibri" pitchFamily="34" charset="-120"/>
+              </a:rPr>
+              <a:t>7 / 8</a:t>
+            </a:r>
+            <a:endParaRPr lang="en-US" sz="1050" dirty="0"/>
+          </a:p>
+        </p:txBody>
+      </p:sp>
+    </p:spTree>
+  </p:cSld>
+  <p:clrMapOvr>
+    <a:masterClrMapping/>
+  </p:clrMapOvr>
+</p:sld>
+</file>
+
+<file path=ppt/slides/slide8.xml><?xml version="1.0" encoding="utf-8"?>
+<p:sld xmlns:a="http://schemas.openxmlformats.org/drawingml/2006/main" xmlns:r="http://schemas.openxmlformats.org/officeDocument/2006/relationships" xmlns:p="http://schemas.openxmlformats.org/presentationml/2006/main">
+  <p:cSld name="Slide 8">
+    <p:spTree>
+      <p:nvGrpSpPr>
+        <p:cNvPr id="1" name=""/>
+        <p:cNvGrpSpPr/>
+        <p:nvPr/>
+      </p:nvGrpSpPr>
+      <p:grpSpPr>
+        <a:xfrm>
+          <a:off x="0" y="0"/>
+          <a:ext cx="0" cy="0"/>
+          <a:chOff x="0" y="0"/>
+          <a:chExt cx="0" cy="0"/>
+        </a:xfrm>
+      </p:grpSpPr>
+      <p:sp>
+        <p:nvSpPr>
+          <p:cNvPr id="2" name="Text 0"/>
+          <p:cNvSpPr txBox="1"/>
+          <p:nvPr/>
+        </p:nvSpPr>
+        <p:spPr>
+          <a:xfrm>
+            <a:off x="502920" y="320040"/>
+            <a:ext cx="11155680" cy="274320"/>
+          </a:xfrm>
+          <a:prstGeom prst="rect">
+            <a:avLst/>
+          </a:prstGeom>
+          <a:noFill/>
+          <a:ln/>
+        </p:spPr>
+        <p:txBody>
+          <a:bodyPr wrap="square" lIns="0" tIns="0" rIns="0" bIns="0" rtlCol="0" anchor="ctr"/>
+          <a:lstStyle/>
+          <a:p>
+            <a:pPr indent="0" marL="0">
+              <a:buNone/>
+            </a:pPr>
+            <a:r>
+              <a:rPr lang="en-US" sz="1100" b="1" spc="120" kern="0" dirty="0">
+                <a:solidFill>
+                  <a:srgbClr val="0E7C86"/>
+                </a:solidFill>
+                <a:latin typeface="Calibri" pitchFamily="34" charset="0"/>
+                <a:ea typeface="Calibri" pitchFamily="34" charset="-122"/>
+                <a:cs typeface="Calibri" pitchFamily="34" charset="-120"/>
+              </a:rPr>
+              <a:t>ИТОГИ</a:t>
+            </a:r>
+            <a:endParaRPr lang="en-US" sz="1100" dirty="0"/>
+          </a:p>
+        </p:txBody>
+      </p:sp>
+      <p:sp>
+        <p:nvSpPr>
+          <p:cNvPr id="3" name="Text 1"/>
+          <p:cNvSpPr txBox="1"/>
+          <p:nvPr/>
+        </p:nvSpPr>
+        <p:spPr>
+          <a:xfrm>
+            <a:off x="502920" y="658368"/>
+            <a:ext cx="11155680" cy="566928"/>
+          </a:xfrm>
+          <a:prstGeom prst="rect">
+            <a:avLst/>
+          </a:prstGeom>
+          <a:noFill/>
+          <a:ln/>
+        </p:spPr>
+        <p:txBody>
+          <a:bodyPr wrap="square" lIns="0" tIns="0" rIns="0" bIns="0" rtlCol="0" anchor="ctr"/>
+          <a:lstStyle/>
+          <a:p>
+            <a:pPr indent="0" marL="0">
+              <a:buNone/>
+            </a:pPr>
+            <a:r>
+              <a:rPr lang="en-US" sz="2800" b="1" dirty="0">
+                <a:solidFill>
+                  <a:srgbClr val="1A2733"/>
+                </a:solidFill>
+                <a:latin typeface="Cambria" pitchFamily="34" charset="0"/>
+                <a:ea typeface="Cambria" pitchFamily="34" charset="-122"/>
+                <a:cs typeface="Cambria" pitchFamily="34" charset="-120"/>
+              </a:rPr>
+              <a:t>Что дальше</a:t>
+            </a:r>
+            <a:endParaRPr lang="en-US" sz="2800" dirty="0"/>
           </a:p>
         </p:txBody>
       </p:sp>
@@ -7066,7 +11749,7 @@
         <p:spPr>
           <a:xfrm>
             <a:off x="1463040" y="1975104"/>
-            <a:ext cx="4023360" cy="960120"/>
+            <a:ext cx="3840480" cy="960120"/>
           </a:xfrm>
           <a:prstGeom prst="rect">
             <a:avLst/>
@@ -7085,7 +11768,7 @@
               <a:buNone/>
             </a:pPr>
             <a:r>
-              <a:rPr lang="en-US" sz="1550" b="1" dirty="0">
+              <a:rPr lang="en-US" sz="1500" b="1" dirty="0">
                 <a:solidFill>
                   <a:srgbClr val="1A2733"/>
                 </a:solidFill>
@@ -7093,9 +11776,9 @@
                 <a:ea typeface="Cambria" pitchFamily="34" charset="-122"/>
                 <a:cs typeface="Cambria" pitchFamily="34" charset="-120"/>
               </a:rPr>
-              <a:t>Шаблон датированного трекера</a:t>
+              <a:t>Шаблоны из Кейса 1</a:t>
             </a:r>
-            <a:endParaRPr lang="en-US" sz="1550" dirty="0"/>
+            <a:endParaRPr lang="en-US" sz="1500" dirty="0"/>
           </a:p>
         </p:txBody>
       </p:sp>
@@ -7107,8 +11790,8 @@
         </p:nvSpPr>
         <p:spPr>
           <a:xfrm>
-            <a:off x="5623560" y="1975104"/>
-            <a:ext cx="5760720" cy="960120"/>
+            <a:off x="5486400" y="1975104"/>
+            <a:ext cx="5897880" cy="960120"/>
           </a:xfrm>
           <a:prstGeom prst="rect">
             <a:avLst/>
@@ -7135,7 +11818,7 @@
                 <a:ea typeface="Calibri" pitchFamily="34" charset="-122"/>
                 <a:cs typeface="Calibri" pitchFamily="34" charset="-120"/>
               </a:rPr>
-              <a:t>Структура столбцов, легенда условий теста (этапы 3–4) — чтобы не пересобирать на каждом новом клиенте с нуля</a:t>
+              <a:t>Датированный трекер (этап 3–4) и формат баг-репорта «для вендора / внутреннее мнение» (этап 5) — переиспользуемые артефакты для следующего клиента</a:t>
             </a:r>
             <a:endParaRPr lang="en-US" sz="1200" dirty="0"/>
           </a:p>
@@ -7216,7 +11899,7 @@
         <p:spPr>
           <a:xfrm>
             <a:off x="1463040" y="3392424"/>
-            <a:ext cx="4023360" cy="960120"/>
+            <a:ext cx="3840480" cy="960120"/>
           </a:xfrm>
           <a:prstGeom prst="rect">
             <a:avLst/>
@@ -7235,7 +11918,7 @@
               <a:buNone/>
             </a:pPr>
             <a:r>
-              <a:rPr lang="en-US" sz="1550" b="1" dirty="0">
+              <a:rPr lang="en-US" sz="1500" b="1" dirty="0">
                 <a:solidFill>
                   <a:srgbClr val="1A2733"/>
                 </a:solidFill>
@@ -7243,9 +11926,9 @@
                 <a:ea typeface="Cambria" pitchFamily="34" charset="-122"/>
                 <a:cs typeface="Cambria" pitchFamily="34" charset="-120"/>
               </a:rPr>
-              <a:t>Формат баг-репорта вендору</a:t>
+              <a:t>Трудоёмкость П1–П5</a:t>
             </a:r>
-            <a:endParaRPr lang="en-US" sz="1550" dirty="0"/>
+            <a:endParaRPr lang="en-US" sz="1500" dirty="0"/>
           </a:p>
         </p:txBody>
       </p:sp>
@@ -7257,8 +11940,8 @@
         </p:nvSpPr>
         <p:spPr>
           <a:xfrm>
-            <a:off x="5623560" y="3392424"/>
-            <a:ext cx="5760720" cy="960120"/>
+            <a:off x="5486400" y="3392424"/>
+            <a:ext cx="5897880" cy="960120"/>
           </a:xfrm>
           <a:prstGeom prst="rect">
             <a:avLst/>
@@ -7285,7 +11968,7 @@
                 <a:ea typeface="Calibri" pitchFamily="34" charset="-122"/>
                 <a:cs typeface="Calibri" pitchFamily="34" charset="-120"/>
               </a:rPr>
-              <a:t>«Для вендора» + «наше внутреннее мнение» отдельными блоками (этап 5) — закрепить как переиспользуемый шаблон</a:t>
+              <a:t>Оценить, как только появится первый реальный переход клиента из пилота в проект — кандидат: Д8, когда пилот формально закроется</a:t>
             </a:r>
             <a:endParaRPr lang="en-US" sz="1200" dirty="0"/>
           </a:p>
@@ -7366,7 +12049,7 @@
         <p:spPr>
           <a:xfrm>
             <a:off x="1463040" y="4809744"/>
-            <a:ext cx="4023360" cy="960120"/>
+            <a:ext cx="3840480" cy="960120"/>
           </a:xfrm>
           <a:prstGeom prst="rect">
             <a:avLst/>
@@ -7385,7 +12068,7 @@
               <a:buNone/>
             </a:pPr>
             <a:r>
-              <a:rPr lang="en-US" sz="1550" b="1" dirty="0">
+              <a:rPr lang="en-US" sz="1500" b="1" dirty="0">
                 <a:solidFill>
                   <a:srgbClr val="1A2733"/>
                 </a:solidFill>
@@ -7393,9 +12076,9 @@
                 <a:ea typeface="Cambria" pitchFamily="34" charset="-122"/>
                 <a:cs typeface="Cambria" pitchFamily="34" charset="-120"/>
               </a:rPr>
-              <a:t>Сверка трудоёмкости на практике</a:t>
+              <a:t>Презентация Кейса 2</a:t>
             </a:r>
-            <a:endParaRPr lang="en-US" sz="1550" dirty="0"/>
+            <a:endParaRPr lang="en-US" sz="1500" dirty="0"/>
           </a:p>
         </p:txBody>
       </p:sp>
@@ -7407,8 +12090,8 @@
         </p:nvSpPr>
         <p:spPr>
           <a:xfrm>
-            <a:off x="5623560" y="4809744"/>
-            <a:ext cx="5760720" cy="960120"/>
+            <a:off x="5486400" y="4809744"/>
+            <a:ext cx="5897880" cy="960120"/>
           </a:xfrm>
           <a:prstGeom prst="rect">
             <a:avLst/>
@@ -7435,7 +12118,7 @@
                 <a:ea typeface="Calibri" pitchFamily="34" charset="-122"/>
                 <a:cs typeface="Calibri" pitchFamily="34" charset="-120"/>
               </a:rPr>
-              <a:t>Сверить оценки §2–3 методики с фактическим временем на следующем пилоте, скорректировать веса по фазам</a:t>
+              <a:t>Уже здесь (слайды 4–5) — детализировать по мере накопления практики, аналогично тому, как детализирован Кейс 1</a:t>
             </a:r>
             <a:endParaRPr lang="en-US" sz="1200" dirty="0"/>
           </a:p>
@@ -7513,7 +12196,7 @@
                 <a:ea typeface="Calibri" pitchFamily="34" charset="-122"/>
                 <a:cs typeface="Calibri" pitchFamily="34" charset="-120"/>
               </a:rPr>
-              <a:t>6 / 6</a:t>
+              <a:t>8 / 8</a:t>
             </a:r>
             <a:endParaRPr lang="en-US" sz="1050" dirty="0"/>
           </a:p>
